--- a/docs/sales-enablement/opros-konkurentov-presentation.pptx
+++ b/docs/sales-enablement/opros-konkurentov-presentation.pptx
@@ -11,10 +11,9 @@
     <p:sldId id="259" r:id="rId5"/>
     <p:sldId id="260" r:id="rId6"/>
     <p:sldId id="261" r:id="rId7"/>
-    <p:sldId id="262" r:id="rId8"/>
   </p:sldIdLst>
   <p:notesMasterIdLst>
-    <p:notesMasterId r:id="rId9"/>
+    <p:notesMasterId r:id="rId8"/>
   </p:notesMasterIdLst>
   <p:sldSz cx="12192000" cy="6858000"/>
   <p:notesSz cx="6858000" cy="12192000"/>
@@ -972,94 +971,6 @@
             <a:fld id="{F7021451-1387-4CA6-816F-3879F97B5CBC}" type="slidenum">
               <a:rPr lang="en-US"/>
               <a:t>6</a:t>
-            </a:fld>
-            <a:endParaRPr lang="en-US"/>
-          </a:p>
-        </p:txBody>
-      </p:sp>
-    </p:spTree>
-    <p:extLst>
-      <p:ext uri="{BB962C8B-B14F-4D97-AF65-F5344CB8AC3E}">
-        <p14:creationId xmlns:p14="http://schemas.microsoft.com/office/powerpoint/2010/main" val="1024086991"/>
-      </p:ext>
-    </p:extLst>
-  </p:cSld>
-  <p:clrMapOvr>
-    <a:masterClrMapping/>
-  </p:clrMapOvr>
-</p:notes>
-</file>
-
-<file path=ppt/notesSlides/notesSlide7.xml><?xml version="1.0" encoding="utf-8"?>
-<p:notes xmlns:a="http://schemas.openxmlformats.org/drawingml/2006/main" xmlns:r="http://schemas.openxmlformats.org/officeDocument/2006/relationships" xmlns:p="http://schemas.openxmlformats.org/presentationml/2006/main">
-  <p:cSld>
-    <p:spTree>
-      <p:nvGrpSpPr>
-        <p:cNvPr id="1" name=""/>
-        <p:cNvGrpSpPr/>
-        <p:nvPr/>
-      </p:nvGrpSpPr>
-      <p:grpSpPr>
-        <a:xfrm>
-          <a:off x="0" y="0"/>
-          <a:ext cx="0" cy="0"/>
-          <a:chOff x="0" y="0"/>
-          <a:chExt cx="0" cy="0"/>
-        </a:xfrm>
-      </p:grpSpPr>
-      <p:sp>
-        <p:nvSpPr>
-          <p:cNvPr id="2" name="Slide Image Placeholder 1"/>
-          <p:cNvSpPr>
-            <a:spLocks noGrp="1" noRot="1" noChangeAspect="1"/>
-          </p:cNvSpPr>
-          <p:nvPr>
-            <p:ph type="sldImg"/>
-          </p:nvPr>
-        </p:nvSpPr>
-        <p:spPr/>
-      </p:sp>
-      <p:sp>
-        <p:nvSpPr>
-          <p:cNvPr id="3" name="Notes Placeholder 2"/>
-          <p:cNvSpPr>
-            <a:spLocks noGrp="1"/>
-          </p:cNvSpPr>
-          <p:nvPr>
-            <p:ph type="body" idx="1"/>
-          </p:nvPr>
-        </p:nvSpPr>
-        <p:spPr/>
-        <p:txBody>
-          <a:bodyPr/>
-          <a:lstStyle/>
-          <a:p>
-            <a:r>
-              <a:rPr lang="en-US" dirty="0"/>
-              <a:t/>
-            </a:r>
-            <a:endParaRPr lang="en-US" dirty="0"/>
-          </a:p>
-        </p:txBody>
-      </p:sp>
-      <p:sp>
-        <p:nvSpPr>
-          <p:cNvPr id="4" name="Slide Number Placeholder 3"/>
-          <p:cNvSpPr>
-            <a:spLocks noGrp="1"/>
-          </p:cNvSpPr>
-          <p:nvPr>
-            <p:ph type="sldNum" sz="quarter" idx="10"/>
-          </p:nvPr>
-        </p:nvSpPr>
-        <p:spPr/>
-        <p:txBody>
-          <a:bodyPr/>
-          <a:lstStyle/>
-          <a:p>
-            <a:fld id="{F7021451-1387-4CA6-816F-3879F97B5CBC}" type="slidenum">
-              <a:rPr lang="en-US"/>
-              <a:t>7</a:t>
             </a:fld>
             <a:endParaRPr lang="en-US"/>
           </a:p>
@@ -2020,7 +1931,7 @@
                 <a:ea typeface="Calibri" pitchFamily="34" charset="-122"/>
                 <a:cs typeface="Calibri" pitchFamily="34" charset="-120"/>
               </a:rPr>
-              <a:t>1 / 7</a:t>
+              <a:t>1 / 6</a:t>
             </a:r>
             <a:endParaRPr lang="en-US" sz="1050" dirty="0"/>
           </a:p>
@@ -2084,7 +1995,7 @@
                 <a:ea typeface="Calibri" pitchFamily="34" charset="-122"/>
                 <a:cs typeface="Calibri" pitchFamily="34" charset="-120"/>
               </a:rPr>
-              <a:t>1 · КАК ПРОВОДИТЬ</a:t>
+              <a:t>1 · КРИТИЧНО СПРОСИТЬ</a:t>
             </a:r>
             <a:endParaRPr lang="en-US" sz="1100" dirty="0"/>
           </a:p>
@@ -2123,7 +2034,7 @@
                 <a:ea typeface="Cambria" pitchFamily="34" charset="-122"/>
                 <a:cs typeface="Cambria" pitchFamily="34" charset="-120"/>
               </a:rPr>
-              <a:t>Правила разговора</a:t>
+              <a:t>Критично спросить</a:t>
             </a:r>
             <a:endParaRPr lang="en-US" sz="2700" dirty="0"/>
           </a:p>
@@ -2162,7 +2073,7 @@
                 <a:ea typeface="Calibri" pitchFamily="34" charset="-122"/>
                 <a:cs typeface="Calibri" pitchFamily="34" charset="-120"/>
               </a:rPr>
-              <a:t>Естественность важнее полноты — не нужно задавать все вопросы подряд</a:t>
+              <a:t>Вопрос — своими словами; объяснение — для вас, не для клиента</a:t>
             </a:r>
             <a:endParaRPr lang="en-US" sz="1300" dirty="0"/>
           </a:p>
@@ -2170,23 +2081,103 @@
       </p:sp>
       <p:sp>
         <p:nvSpPr>
-          <p:cNvPr id="5" name="Shape 3"/>
+          <p:cNvPr id="5" name="Text 3"/>
+          <p:cNvSpPr txBox="1"/>
+          <p:nvPr/>
+        </p:nvSpPr>
+        <p:spPr>
+          <a:xfrm>
+            <a:off x="502920" y="1783080"/>
+            <a:ext cx="11155680" cy="512064"/>
+          </a:xfrm>
+          <a:prstGeom prst="rect">
+            <a:avLst/>
+          </a:prstGeom>
+          <a:noFill/>
+          <a:ln/>
+        </p:spPr>
+        <p:txBody>
+          <a:bodyPr wrap="square" lIns="0" tIns="0" rIns="0" bIns="0" rtlCol="0" anchor="t"/>
+          <a:lstStyle/>
+          <a:p>
+            <a:pPr indent="0" marL="0">
+              <a:lnSpc>
+                <a:spcPct val="105000"/>
+              </a:lnSpc>
+              <a:buNone/>
+            </a:pPr>
+            <a:r>
+              <a:rPr lang="en-US" sz="1300" b="1" dirty="0">
+                <a:solidFill>
+                  <a:srgbClr val="1A2733"/>
+                </a:solidFill>
+                <a:latin typeface="Calibri" pitchFamily="34" charset="0"/>
+                <a:ea typeface="Calibri" pitchFamily="34" charset="-122"/>
+                <a:cs typeface="Calibri" pitchFamily="34" charset="-120"/>
+              </a:rPr>
+              <a:t>Есть ли автоматическое скрытие/маскирование персональных данных (ФИО, паспорта, счета) в ответах системы?</a:t>
+            </a:r>
+            <a:endParaRPr lang="en-US" sz="1300" dirty="0"/>
+          </a:p>
+        </p:txBody>
+      </p:sp>
+      <p:sp>
+        <p:nvSpPr>
+          <p:cNvPr id="6" name="Text 4"/>
+          <p:cNvSpPr txBox="1"/>
+          <p:nvPr/>
+        </p:nvSpPr>
+        <p:spPr>
+          <a:xfrm>
+            <a:off x="502920" y="2267712"/>
+            <a:ext cx="11155680" cy="292608"/>
+          </a:xfrm>
+          <a:prstGeom prst="rect">
+            <a:avLst/>
+          </a:prstGeom>
+          <a:noFill/>
+          <a:ln/>
+        </p:spPr>
+        <p:txBody>
+          <a:bodyPr wrap="square" lIns="0" tIns="0" rIns="0" bIns="0" rtlCol="0" anchor="t"/>
+          <a:lstStyle/>
+          <a:p>
+            <a:pPr indent="0" marL="0">
+              <a:lnSpc>
+                <a:spcPct val="102000"/>
+              </a:lnSpc>
+              <a:buNone/>
+            </a:pPr>
+            <a:r>
+              <a:rPr lang="en-US" sz="1050" i="1" dirty="0">
+                <a:solidFill>
+                  <a:srgbClr val="5B6B7A"/>
+                </a:solidFill>
+                <a:latin typeface="Calibri" pitchFamily="34" charset="0"/>
+                <a:ea typeface="Calibri" pitchFamily="34" charset="-122"/>
+                <a:cs typeface="Calibri" pitchFamily="34" charset="-120"/>
+              </a:rPr>
+              <a:t>Проверяем наличие автоматической защиты персональных данных в ответах — критично для комплаенса.</a:t>
+            </a:r>
+            <a:endParaRPr lang="en-US" sz="1050" dirty="0"/>
+          </a:p>
+        </p:txBody>
+      </p:sp>
+      <p:sp>
+        <p:nvSpPr>
+          <p:cNvPr id="7" name="Shape 5"/>
           <p:cNvSpPr/>
           <p:nvPr/>
         </p:nvSpPr>
         <p:spPr>
           <a:xfrm>
-            <a:off x="502920" y="1691640"/>
-            <a:ext cx="5394960" cy="1234440"/>
-          </a:xfrm>
-          <a:prstGeom prst="roundRect">
-            <a:avLst>
-              <a:gd name="adj" fmla="val 4444"/>
-            </a:avLst>
-          </a:prstGeom>
-          <a:solidFill>
-            <a:srgbClr val="F4F6F7"/>
-          </a:solidFill>
+            <a:off x="502920" y="2606040"/>
+            <a:ext cx="11155680" cy="0"/>
+          </a:xfrm>
+          <a:prstGeom prst="line">
+            <a:avLst/>
+          </a:prstGeom>
+          <a:noFill/>
           <a:ln w="9525">
             <a:solidFill>
               <a:srgbClr val="D8DEE2"/>
@@ -2197,92 +2188,14 @@
       </p:sp>
       <p:sp>
         <p:nvSpPr>
-          <p:cNvPr id="6" name="Text 4"/>
-          <p:cNvSpPr txBox="1"/>
-          <p:nvPr/>
-        </p:nvSpPr>
-        <p:spPr>
-          <a:xfrm>
-            <a:off x="685800" y="1828800"/>
-            <a:ext cx="457200" cy="457200"/>
-          </a:xfrm>
-          <a:prstGeom prst="rect">
-            <a:avLst/>
-          </a:prstGeom>
-          <a:noFill/>
-          <a:ln/>
-        </p:spPr>
-        <p:txBody>
-          <a:bodyPr wrap="square" lIns="0" tIns="0" rIns="0" bIns="0" rtlCol="0" anchor="ctr"/>
-          <a:lstStyle/>
-          <a:p>
-            <a:pPr indent="0" marL="0">
-              <a:buNone/>
-            </a:pPr>
-            <a:r>
-              <a:rPr lang="en-US" sz="2000" b="1" dirty="0">
-                <a:solidFill>
-                  <a:srgbClr val="0A5F67"/>
-                </a:solidFill>
-                <a:latin typeface="Cambria" pitchFamily="34" charset="0"/>
-                <a:ea typeface="Cambria" pitchFamily="34" charset="-122"/>
-                <a:cs typeface="Cambria" pitchFamily="34" charset="-120"/>
-              </a:rPr>
-              <a:t>1</a:t>
-            </a:r>
-            <a:endParaRPr lang="en-US" sz="2000" dirty="0"/>
-          </a:p>
-        </p:txBody>
-      </p:sp>
-      <p:sp>
-        <p:nvSpPr>
-          <p:cNvPr id="7" name="Text 5"/>
-          <p:cNvSpPr txBox="1"/>
-          <p:nvPr/>
-        </p:nvSpPr>
-        <p:spPr>
-          <a:xfrm>
-            <a:off x="1188720" y="1828800"/>
-            <a:ext cx="4526280" cy="320040"/>
-          </a:xfrm>
-          <a:prstGeom prst="rect">
-            <a:avLst/>
-          </a:prstGeom>
-          <a:noFill/>
-          <a:ln/>
-        </p:spPr>
-        <p:txBody>
-          <a:bodyPr wrap="square" lIns="0" tIns="0" rIns="0" bIns="0" rtlCol="0" anchor="ctr"/>
-          <a:lstStyle/>
-          <a:p>
-            <a:pPr indent="0" marL="0">
-              <a:buNone/>
-            </a:pPr>
-            <a:r>
-              <a:rPr lang="en-US" sz="1250" b="1" dirty="0">
-                <a:solidFill>
-                  <a:srgbClr val="1A2733"/>
-                </a:solidFill>
-                <a:latin typeface="Calibri" pitchFamily="34" charset="0"/>
-                <a:ea typeface="Calibri" pitchFamily="34" charset="-122"/>
-                <a:cs typeface="Calibri" pitchFamily="34" charset="-120"/>
-              </a:rPr>
-              <a:t>Представьтесь тем, кто вы есть</a:t>
-            </a:r>
-            <a:endParaRPr lang="en-US" sz="1250" dirty="0"/>
-          </a:p>
-        </p:txBody>
-      </p:sp>
-      <p:sp>
-        <p:nvSpPr>
           <p:cNvPr id="8" name="Text 6"/>
           <p:cNvSpPr txBox="1"/>
           <p:nvPr/>
         </p:nvSpPr>
         <p:spPr>
           <a:xfrm>
-            <a:off x="1188720" y="2148840"/>
-            <a:ext cx="4526280" cy="777240"/>
+            <a:off x="502920" y="2697480"/>
+            <a:ext cx="11155680" cy="512064"/>
           </a:xfrm>
           <a:prstGeom prst="rect">
             <a:avLst/>
@@ -2296,12 +2209,54 @@
           <a:p>
             <a:pPr indent="0" marL="0">
               <a:lnSpc>
-                <a:spcPct val="110000"/>
+                <a:spcPct val="105000"/>
               </a:lnSpc>
               <a:buNone/>
             </a:pPr>
             <a:r>
-              <a:rPr lang="en-US" sz="1050" dirty="0">
+              <a:rPr lang="en-US" sz="1300" b="1" dirty="0">
+                <a:solidFill>
+                  <a:srgbClr val="1A2733"/>
+                </a:solidFill>
+                <a:latin typeface="Calibri" pitchFamily="34" charset="0"/>
+                <a:ea typeface="Calibri" pitchFamily="34" charset="-122"/>
+                <a:cs typeface="Calibri" pitchFamily="34" charset="-120"/>
+              </a:rPr>
+              <a:t>Можно ли развернуть систему полностью у нас, в закрытом контуре, без доступа к интернету?</a:t>
+            </a:r>
+            <a:endParaRPr lang="en-US" sz="1300" dirty="0"/>
+          </a:p>
+        </p:txBody>
+      </p:sp>
+      <p:sp>
+        <p:nvSpPr>
+          <p:cNvPr id="9" name="Text 7"/>
+          <p:cNvSpPr txBox="1"/>
+          <p:nvPr/>
+        </p:nvSpPr>
+        <p:spPr>
+          <a:xfrm>
+            <a:off x="502920" y="3182112"/>
+            <a:ext cx="11155680" cy="292608"/>
+          </a:xfrm>
+          <a:prstGeom prst="rect">
+            <a:avLst/>
+          </a:prstGeom>
+          <a:noFill/>
+          <a:ln/>
+        </p:spPr>
+        <p:txBody>
+          <a:bodyPr wrap="square" lIns="0" tIns="0" rIns="0" bIns="0" rtlCol="0" anchor="t"/>
+          <a:lstStyle/>
+          <a:p>
+            <a:pPr indent="0" marL="0">
+              <a:lnSpc>
+                <a:spcPct val="102000"/>
+              </a:lnSpc>
+              <a:buNone/>
+            </a:pPr>
+            <a:r>
+              <a:rPr lang="en-US" sz="1050" i="1" dirty="0">
                 <a:solidFill>
                   <a:srgbClr val="5B6B7A"/>
                 </a:solidFill>
@@ -2309,7 +2264,7 @@
                 <a:ea typeface="Calibri" pitchFamily="34" charset="-122"/>
                 <a:cs typeface="Calibri" pitchFamily="34" charset="-120"/>
               </a:rPr>
-              <a:t>Компания выбирает платформу для работы с ИИ и данными — это правда, ничего выдумывать не нужно.</a:t>
+              <a:t>Проверяем, есть ли у них поставка «в закрытом контуре» — важно для клиентов с высокими требованиями к безопасности.</a:t>
             </a:r>
             <a:endParaRPr lang="en-US" sz="1050" dirty="0"/>
           </a:p>
@@ -2317,23 +2272,19 @@
       </p:sp>
       <p:sp>
         <p:nvSpPr>
-          <p:cNvPr id="9" name="Shape 7"/>
+          <p:cNvPr id="10" name="Shape 8"/>
           <p:cNvSpPr/>
           <p:nvPr/>
         </p:nvSpPr>
         <p:spPr>
           <a:xfrm>
-            <a:off x="6263640" y="1691640"/>
-            <a:ext cx="5394960" cy="1234440"/>
-          </a:xfrm>
-          <a:prstGeom prst="roundRect">
-            <a:avLst>
-              <a:gd name="adj" fmla="val 4444"/>
-            </a:avLst>
-          </a:prstGeom>
-          <a:solidFill>
-            <a:srgbClr val="F4F6F7"/>
-          </a:solidFill>
+            <a:off x="502920" y="3520440"/>
+            <a:ext cx="11155680" cy="0"/>
+          </a:xfrm>
+          <a:prstGeom prst="line">
+            <a:avLst/>
+          </a:prstGeom>
+          <a:noFill/>
           <a:ln w="9525">
             <a:solidFill>
               <a:srgbClr val="D8DEE2"/>
@@ -2344,92 +2295,14 @@
       </p:sp>
       <p:sp>
         <p:nvSpPr>
-          <p:cNvPr id="10" name="Text 8"/>
-          <p:cNvSpPr txBox="1"/>
-          <p:nvPr/>
-        </p:nvSpPr>
-        <p:spPr>
-          <a:xfrm>
-            <a:off x="6446520" y="1828800"/>
-            <a:ext cx="457200" cy="457200"/>
-          </a:xfrm>
-          <a:prstGeom prst="rect">
-            <a:avLst/>
-          </a:prstGeom>
-          <a:noFill/>
-          <a:ln/>
-        </p:spPr>
-        <p:txBody>
-          <a:bodyPr wrap="square" lIns="0" tIns="0" rIns="0" bIns="0" rtlCol="0" anchor="ctr"/>
-          <a:lstStyle/>
-          <a:p>
-            <a:pPr indent="0" marL="0">
-              <a:buNone/>
-            </a:pPr>
-            <a:r>
-              <a:rPr lang="en-US" sz="2000" b="1" dirty="0">
-                <a:solidFill>
-                  <a:srgbClr val="0A5F67"/>
-                </a:solidFill>
-                <a:latin typeface="Cambria" pitchFamily="34" charset="0"/>
-                <a:ea typeface="Cambria" pitchFamily="34" charset="-122"/>
-                <a:cs typeface="Cambria" pitchFamily="34" charset="-120"/>
-              </a:rPr>
-              <a:t>2</a:t>
-            </a:r>
-            <a:endParaRPr lang="en-US" sz="2000" dirty="0"/>
-          </a:p>
-        </p:txBody>
-      </p:sp>
-      <p:sp>
-        <p:nvSpPr>
           <p:cNvPr id="11" name="Text 9"/>
           <p:cNvSpPr txBox="1"/>
           <p:nvPr/>
         </p:nvSpPr>
         <p:spPr>
           <a:xfrm>
-            <a:off x="6949440" y="1828800"/>
-            <a:ext cx="4526280" cy="320040"/>
-          </a:xfrm>
-          <a:prstGeom prst="rect">
-            <a:avLst/>
-          </a:prstGeom>
-          <a:noFill/>
-          <a:ln/>
-        </p:spPr>
-        <p:txBody>
-          <a:bodyPr wrap="square" lIns="0" tIns="0" rIns="0" bIns="0" rtlCol="0" anchor="ctr"/>
-          <a:lstStyle/>
-          <a:p>
-            <a:pPr indent="0" marL="0">
-              <a:buNone/>
-            </a:pPr>
-            <a:r>
-              <a:rPr lang="en-US" sz="1250" b="1" dirty="0">
-                <a:solidFill>
-                  <a:srgbClr val="1A2733"/>
-                </a:solidFill>
-                <a:latin typeface="Calibri" pitchFamily="34" charset="0"/>
-                <a:ea typeface="Calibri" pitchFamily="34" charset="-122"/>
-                <a:cs typeface="Calibri" pitchFamily="34" charset="-120"/>
-              </a:rPr>
-              <a:t>Не называйте наш продукт</a:t>
-            </a:r>
-            <a:endParaRPr lang="en-US" sz="1250" dirty="0"/>
-          </a:p>
-        </p:txBody>
-      </p:sp>
-      <p:sp>
-        <p:nvSpPr>
-          <p:cNvPr id="12" name="Text 10"/>
-          <p:cNvSpPr txBox="1"/>
-          <p:nvPr/>
-        </p:nvSpPr>
-        <p:spPr>
-          <a:xfrm>
-            <a:off x="6949440" y="2148840"/>
-            <a:ext cx="4526280" cy="777240"/>
+            <a:off x="502920" y="3611880"/>
+            <a:ext cx="11155680" cy="512064"/>
           </a:xfrm>
           <a:prstGeom prst="rect">
             <a:avLst/>
@@ -2443,12 +2316,54 @@
           <a:p>
             <a:pPr indent="0" marL="0">
               <a:lnSpc>
-                <a:spcPct val="110000"/>
+                <a:spcPct val="105000"/>
               </a:lnSpc>
               <a:buNone/>
             </a:pPr>
             <a:r>
-              <a:rPr lang="en-US" sz="1050" dirty="0">
+              <a:rPr lang="en-US" sz="1300" b="1" dirty="0">
+                <a:solidFill>
+                  <a:srgbClr val="1A2733"/>
+                </a:solidFill>
+                <a:latin typeface="Calibri" pitchFamily="34" charset="0"/>
+                <a:ea typeface="Calibri" pitchFamily="34" charset="-122"/>
+                <a:cs typeface="Calibri" pitchFamily="34" charset="-120"/>
+              </a:rPr>
+              <a:t>Может ли система отвечать, объединяя данные сразу из нескольких систем, а не только по одной?</a:t>
+            </a:r>
+            <a:endParaRPr lang="en-US" sz="1300" dirty="0"/>
+          </a:p>
+        </p:txBody>
+      </p:sp>
+      <p:sp>
+        <p:nvSpPr>
+          <p:cNvPr id="12" name="Text 10"/>
+          <p:cNvSpPr txBox="1"/>
+          <p:nvPr/>
+        </p:nvSpPr>
+        <p:spPr>
+          <a:xfrm>
+            <a:off x="502920" y="4096512"/>
+            <a:ext cx="11155680" cy="292608"/>
+          </a:xfrm>
+          <a:prstGeom prst="rect">
+            <a:avLst/>
+          </a:prstGeom>
+          <a:noFill/>
+          <a:ln/>
+        </p:spPr>
+        <p:txBody>
+          <a:bodyPr wrap="square" lIns="0" tIns="0" rIns="0" bIns="0" rtlCol="0" anchor="t"/>
+          <a:lstStyle/>
+          <a:p>
+            <a:pPr indent="0" marL="0">
+              <a:lnSpc>
+                <a:spcPct val="102000"/>
+              </a:lnSpc>
+              <a:buNone/>
+            </a:pPr>
+            <a:r>
+              <a:rPr lang="en-US" sz="1050" i="1" dirty="0">
                 <a:solidFill>
                   <a:srgbClr val="5B6B7A"/>
                 </a:solidFill>
@@ -2456,7 +2371,7 @@
                 <a:ea typeface="Calibri" pitchFamily="34" charset="-122"/>
                 <a:cs typeface="Calibri" pitchFamily="34" charset="-120"/>
               </a:rPr>
-              <a:t>Не сравнивайте вслух — расспрашивайте как обычный заинтересованный клиент.</a:t>
+              <a:t>Проверяем, умеет ли конкурент строить один ответ на основе сразу нескольких источников данных, а не искать по одному за раз.</a:t>
             </a:r>
             <a:endParaRPr lang="en-US" sz="1050" dirty="0"/>
           </a:p>
@@ -2470,17 +2385,13 @@
         </p:nvSpPr>
         <p:spPr>
           <a:xfrm>
-            <a:off x="502920" y="3108960"/>
-            <a:ext cx="5394960" cy="1234440"/>
-          </a:xfrm>
-          <a:prstGeom prst="roundRect">
-            <a:avLst>
-              <a:gd name="adj" fmla="val 4444"/>
-            </a:avLst>
-          </a:prstGeom>
-          <a:solidFill>
-            <a:srgbClr val="F4F6F7"/>
-          </a:solidFill>
+            <a:off x="502920" y="4434840"/>
+            <a:ext cx="11155680" cy="0"/>
+          </a:xfrm>
+          <a:prstGeom prst="line">
+            <a:avLst/>
+          </a:prstGeom>
+          <a:noFill/>
           <a:ln w="9525">
             <a:solidFill>
               <a:srgbClr val="D8DEE2"/>
@@ -2497,86 +2408,8 @@
         </p:nvSpPr>
         <p:spPr>
           <a:xfrm>
-            <a:off x="685800" y="3246120"/>
-            <a:ext cx="457200" cy="457200"/>
-          </a:xfrm>
-          <a:prstGeom prst="rect">
-            <a:avLst/>
-          </a:prstGeom>
-          <a:noFill/>
-          <a:ln/>
-        </p:spPr>
-        <p:txBody>
-          <a:bodyPr wrap="square" lIns="0" tIns="0" rIns="0" bIns="0" rtlCol="0" anchor="ctr"/>
-          <a:lstStyle/>
-          <a:p>
-            <a:pPr indent="0" marL="0">
-              <a:buNone/>
-            </a:pPr>
-            <a:r>
-              <a:rPr lang="en-US" sz="2000" b="1" dirty="0">
-                <a:solidFill>
-                  <a:srgbClr val="0A5F67"/>
-                </a:solidFill>
-                <a:latin typeface="Cambria" pitchFamily="34" charset="0"/>
-                <a:ea typeface="Cambria" pitchFamily="34" charset="-122"/>
-                <a:cs typeface="Cambria" pitchFamily="34" charset="-120"/>
-              </a:rPr>
-              <a:t>3</a:t>
-            </a:r>
-            <a:endParaRPr lang="en-US" sz="2000" dirty="0"/>
-          </a:p>
-        </p:txBody>
-      </p:sp>
-      <p:sp>
-        <p:nvSpPr>
-          <p:cNvPr id="15" name="Text 13"/>
-          <p:cNvSpPr txBox="1"/>
-          <p:nvPr/>
-        </p:nvSpPr>
-        <p:spPr>
-          <a:xfrm>
-            <a:off x="1188720" y="3246120"/>
-            <a:ext cx="4526280" cy="320040"/>
-          </a:xfrm>
-          <a:prstGeom prst="rect">
-            <a:avLst/>
-          </a:prstGeom>
-          <a:noFill/>
-          <a:ln/>
-        </p:spPr>
-        <p:txBody>
-          <a:bodyPr wrap="square" lIns="0" tIns="0" rIns="0" bIns="0" rtlCol="0" anchor="ctr"/>
-          <a:lstStyle/>
-          <a:p>
-            <a:pPr indent="0" marL="0">
-              <a:buNone/>
-            </a:pPr>
-            <a:r>
-              <a:rPr lang="en-US" sz="1250" b="1" dirty="0">
-                <a:solidFill>
-                  <a:srgbClr val="1A2733"/>
-                </a:solidFill>
-                <a:latin typeface="Calibri" pitchFamily="34" charset="0"/>
-                <a:ea typeface="Calibri" pitchFamily="34" charset="-122"/>
-                <a:cs typeface="Calibri" pitchFamily="34" charset="-120"/>
-              </a:rPr>
-              <a:t>Выбирайте вопросы по ходу разговора</a:t>
-            </a:r>
-            <a:endParaRPr lang="en-US" sz="1250" dirty="0"/>
-          </a:p>
-        </p:txBody>
-      </p:sp>
-      <p:sp>
-        <p:nvSpPr>
-          <p:cNvPr id="16" name="Text 14"/>
-          <p:cNvSpPr txBox="1"/>
-          <p:nvPr/>
-        </p:nvSpPr>
-        <p:spPr>
-          <a:xfrm>
-            <a:off x="1188720" y="3566160"/>
-            <a:ext cx="4526280" cy="777240"/>
+            <a:off x="502920" y="4526280"/>
+            <a:ext cx="11155680" cy="512064"/>
           </a:xfrm>
           <a:prstGeom prst="rect">
             <a:avLst/>
@@ -2590,12 +2423,54 @@
           <a:p>
             <a:pPr indent="0" marL="0">
               <a:lnSpc>
-                <a:spcPct val="110000"/>
+                <a:spcPct val="105000"/>
               </a:lnSpc>
               <a:buNone/>
             </a:pPr>
             <a:r>
-              <a:rPr lang="en-US" sz="1050" dirty="0">
+              <a:rPr lang="en-US" sz="1300" b="1" dirty="0">
+                <a:solidFill>
+                  <a:srgbClr val="1A2733"/>
+                </a:solidFill>
+                <a:latin typeface="Calibri" pitchFamily="34" charset="0"/>
+                <a:ea typeface="Calibri" pitchFamily="34" charset="-122"/>
+                <a:cs typeface="Calibri" pitchFamily="34" charset="-120"/>
+              </a:rPr>
+              <a:t>Есть ли единый справочник бизнес-показателей, чтобы разные сотрудники получали одинаковый ответ на один и тот же вопрос?</a:t>
+            </a:r>
+            <a:endParaRPr lang="en-US" sz="1300" dirty="0"/>
+          </a:p>
+        </p:txBody>
+      </p:sp>
+      <p:sp>
+        <p:nvSpPr>
+          <p:cNvPr id="15" name="Text 13"/>
+          <p:cNvSpPr txBox="1"/>
+          <p:nvPr/>
+        </p:nvSpPr>
+        <p:spPr>
+          <a:xfrm>
+            <a:off x="502920" y="5010912"/>
+            <a:ext cx="11155680" cy="292608"/>
+          </a:xfrm>
+          <a:prstGeom prst="rect">
+            <a:avLst/>
+          </a:prstGeom>
+          <a:noFill/>
+          <a:ln/>
+        </p:spPr>
+        <p:txBody>
+          <a:bodyPr wrap="square" lIns="0" tIns="0" rIns="0" bIns="0" rtlCol="0" anchor="t"/>
+          <a:lstStyle/>
+          <a:p>
+            <a:pPr indent="0" marL="0">
+              <a:lnSpc>
+                <a:spcPct val="102000"/>
+              </a:lnSpc>
+              <a:buNone/>
+            </a:pPr>
+            <a:r>
+              <a:rPr lang="en-US" sz="1050" i="1" dirty="0">
                 <a:solidFill>
                   <a:srgbClr val="5B6B7A"/>
                 </a:solidFill>
@@ -2603,7 +2478,7 @@
                 <a:ea typeface="Calibri" pitchFamily="34" charset="-122"/>
                 <a:cs typeface="Calibri" pitchFamily="34" charset="-120"/>
               </a:rPr>
-              <a:t>Не обязательно задавать все подряд — естественность важнее полноты списка.</a:t>
+              <a:t>Проверяем, есть ли у них общий каталог метрик с готовыми формулами, чтобы ответы не расходились между сотрудниками.</a:t>
             </a:r>
             <a:endParaRPr lang="en-US" sz="1050" dirty="0"/>
           </a:p>
@@ -2611,23 +2486,19 @@
       </p:sp>
       <p:sp>
         <p:nvSpPr>
-          <p:cNvPr id="17" name="Shape 15"/>
+          <p:cNvPr id="16" name="Shape 14"/>
           <p:cNvSpPr/>
           <p:nvPr/>
         </p:nvSpPr>
         <p:spPr>
           <a:xfrm>
-            <a:off x="6263640" y="3108960"/>
-            <a:ext cx="5394960" cy="1234440"/>
-          </a:xfrm>
-          <a:prstGeom prst="roundRect">
-            <a:avLst>
-              <a:gd name="adj" fmla="val 4444"/>
-            </a:avLst>
-          </a:prstGeom>
-          <a:solidFill>
-            <a:srgbClr val="F4F6F7"/>
-          </a:solidFill>
+            <a:off x="502920" y="5349240"/>
+            <a:ext cx="11155680" cy="0"/>
+          </a:xfrm>
+          <a:prstGeom prst="line">
+            <a:avLst/>
+          </a:prstGeom>
+          <a:noFill/>
           <a:ln w="9525">
             <a:solidFill>
               <a:srgbClr val="D8DEE2"/>
@@ -2638,92 +2509,14 @@
       </p:sp>
       <p:sp>
         <p:nvSpPr>
-          <p:cNvPr id="18" name="Text 16"/>
-          <p:cNvSpPr txBox="1"/>
-          <p:nvPr/>
-        </p:nvSpPr>
-        <p:spPr>
-          <a:xfrm>
-            <a:off x="6446520" y="3246120"/>
-            <a:ext cx="457200" cy="457200"/>
-          </a:xfrm>
-          <a:prstGeom prst="rect">
-            <a:avLst/>
-          </a:prstGeom>
-          <a:noFill/>
-          <a:ln/>
-        </p:spPr>
-        <p:txBody>
-          <a:bodyPr wrap="square" lIns="0" tIns="0" rIns="0" bIns="0" rtlCol="0" anchor="ctr"/>
-          <a:lstStyle/>
-          <a:p>
-            <a:pPr indent="0" marL="0">
-              <a:buNone/>
-            </a:pPr>
-            <a:r>
-              <a:rPr lang="en-US" sz="2000" b="1" dirty="0">
-                <a:solidFill>
-                  <a:srgbClr val="0A5F67"/>
-                </a:solidFill>
-                <a:latin typeface="Cambria" pitchFamily="34" charset="0"/>
-                <a:ea typeface="Cambria" pitchFamily="34" charset="-122"/>
-                <a:cs typeface="Cambria" pitchFamily="34" charset="-120"/>
-              </a:rPr>
-              <a:t>4</a:t>
-            </a:r>
-            <a:endParaRPr lang="en-US" sz="2000" dirty="0"/>
-          </a:p>
-        </p:txBody>
-      </p:sp>
-      <p:sp>
-        <p:nvSpPr>
-          <p:cNvPr id="19" name="Text 17"/>
-          <p:cNvSpPr txBox="1"/>
-          <p:nvPr/>
-        </p:nvSpPr>
-        <p:spPr>
-          <a:xfrm>
-            <a:off x="6949440" y="3246120"/>
-            <a:ext cx="4526280" cy="320040"/>
-          </a:xfrm>
-          <a:prstGeom prst="rect">
-            <a:avLst/>
-          </a:prstGeom>
-          <a:noFill/>
-          <a:ln/>
-        </p:spPr>
-        <p:txBody>
-          <a:bodyPr wrap="square" lIns="0" tIns="0" rIns="0" bIns="0" rtlCol="0" anchor="ctr"/>
-          <a:lstStyle/>
-          <a:p>
-            <a:pPr indent="0" marL="0">
-              <a:buNone/>
-            </a:pPr>
-            <a:r>
-              <a:rPr lang="en-US" sz="1250" b="1" dirty="0">
-                <a:solidFill>
-                  <a:srgbClr val="1A2733"/>
-                </a:solidFill>
-                <a:latin typeface="Calibri" pitchFamily="34" charset="0"/>
-                <a:ea typeface="Calibri" pitchFamily="34" charset="-122"/>
-                <a:cs typeface="Calibri" pitchFamily="34" charset="-120"/>
-              </a:rPr>
-              <a:t>Говорите своими словами</a:t>
-            </a:r>
-            <a:endParaRPr lang="en-US" sz="1250" dirty="0"/>
-          </a:p>
-        </p:txBody>
-      </p:sp>
-      <p:sp>
-        <p:nvSpPr>
-          <p:cNvPr id="20" name="Text 18"/>
-          <p:cNvSpPr txBox="1"/>
-          <p:nvPr/>
-        </p:nvSpPr>
-        <p:spPr>
-          <a:xfrm>
-            <a:off x="6949440" y="3566160"/>
-            <a:ext cx="4526280" cy="777240"/>
+          <p:cNvPr id="17" name="Text 15"/>
+          <p:cNvSpPr txBox="1"/>
+          <p:nvPr/>
+        </p:nvSpPr>
+        <p:spPr>
+          <a:xfrm>
+            <a:off x="502920" y="5440680"/>
+            <a:ext cx="11155680" cy="512064"/>
           </a:xfrm>
           <a:prstGeom prst="rect">
             <a:avLst/>
@@ -2737,117 +2530,12 @@
           <a:p>
             <a:pPr indent="0" marL="0">
               <a:lnSpc>
-                <a:spcPct val="110000"/>
+                <a:spcPct val="105000"/>
               </a:lnSpc>
               <a:buNone/>
             </a:pPr>
             <a:r>
-              <a:rPr lang="en-US" sz="1050" dirty="0">
-                <a:solidFill>
-                  <a:srgbClr val="5B6B7A"/>
-                </a:solidFill>
-                <a:latin typeface="Calibri" pitchFamily="34" charset="0"/>
-                <a:ea typeface="Calibri" pitchFamily="34" charset="-122"/>
-                <a:cs typeface="Calibri" pitchFamily="34" charset="-120"/>
-              </a:rPr>
-              <a:t>Формулировки в чек-листе — заготовка, а не сценарий для зачитывания.</a:t>
-            </a:r>
-            <a:endParaRPr lang="en-US" sz="1050" dirty="0"/>
-          </a:p>
-        </p:txBody>
-      </p:sp>
-      <p:sp>
-        <p:nvSpPr>
-          <p:cNvPr id="21" name="Shape 19"/>
-          <p:cNvSpPr/>
-          <p:nvPr/>
-        </p:nvSpPr>
-        <p:spPr>
-          <a:xfrm>
-            <a:off x="502920" y="4526280"/>
-            <a:ext cx="5394960" cy="1234440"/>
-          </a:xfrm>
-          <a:prstGeom prst="roundRect">
-            <a:avLst>
-              <a:gd name="adj" fmla="val 4444"/>
-            </a:avLst>
-          </a:prstGeom>
-          <a:solidFill>
-            <a:srgbClr val="F4F6F7"/>
-          </a:solidFill>
-          <a:ln w="9525">
-            <a:solidFill>
-              <a:srgbClr val="D8DEE2"/>
-            </a:solidFill>
-            <a:prstDash val="solid"/>
-          </a:ln>
-        </p:spPr>
-      </p:sp>
-      <p:sp>
-        <p:nvSpPr>
-          <p:cNvPr id="22" name="Text 20"/>
-          <p:cNvSpPr txBox="1"/>
-          <p:nvPr/>
-        </p:nvSpPr>
-        <p:spPr>
-          <a:xfrm>
-            <a:off x="685800" y="4663440"/>
-            <a:ext cx="457200" cy="457200"/>
-          </a:xfrm>
-          <a:prstGeom prst="rect">
-            <a:avLst/>
-          </a:prstGeom>
-          <a:noFill/>
-          <a:ln/>
-        </p:spPr>
-        <p:txBody>
-          <a:bodyPr wrap="square" lIns="0" tIns="0" rIns="0" bIns="0" rtlCol="0" anchor="ctr"/>
-          <a:lstStyle/>
-          <a:p>
-            <a:pPr indent="0" marL="0">
-              <a:buNone/>
-            </a:pPr>
-            <a:r>
-              <a:rPr lang="en-US" sz="2000" b="1" dirty="0">
-                <a:solidFill>
-                  <a:srgbClr val="0A5F67"/>
-                </a:solidFill>
-                <a:latin typeface="Cambria" pitchFamily="34" charset="0"/>
-                <a:ea typeface="Cambria" pitchFamily="34" charset="-122"/>
-                <a:cs typeface="Cambria" pitchFamily="34" charset="-120"/>
-              </a:rPr>
-              <a:t>5</a:t>
-            </a:r>
-            <a:endParaRPr lang="en-US" sz="2000" dirty="0"/>
-          </a:p>
-        </p:txBody>
-      </p:sp>
-      <p:sp>
-        <p:nvSpPr>
-          <p:cNvPr id="23" name="Text 21"/>
-          <p:cNvSpPr txBox="1"/>
-          <p:nvPr/>
-        </p:nvSpPr>
-        <p:spPr>
-          <a:xfrm>
-            <a:off x="1188720" y="4663440"/>
-            <a:ext cx="4526280" cy="320040"/>
-          </a:xfrm>
-          <a:prstGeom prst="rect">
-            <a:avLst/>
-          </a:prstGeom>
-          <a:noFill/>
-          <a:ln/>
-        </p:spPr>
-        <p:txBody>
-          <a:bodyPr wrap="square" lIns="0" tIns="0" rIns="0" bIns="0" rtlCol="0" anchor="ctr"/>
-          <a:lstStyle/>
-          <a:p>
-            <a:pPr indent="0" marL="0">
-              <a:buNone/>
-            </a:pPr>
-            <a:r>
-              <a:rPr lang="en-US" sz="1250" b="1" dirty="0">
+              <a:rPr lang="en-US" sz="1300" b="1" dirty="0">
                 <a:solidFill>
                   <a:srgbClr val="1A2733"/>
                 </a:solidFill>
@@ -2855,22 +2543,22 @@
                 <a:ea typeface="Calibri" pitchFamily="34" charset="-122"/>
                 <a:cs typeface="Calibri" pitchFamily="34" charset="-120"/>
               </a:rPr>
-              <a:t>Пропускайте, если звучит подозрительно</a:t>
-            </a:r>
-            <a:endParaRPr lang="en-US" sz="1250" dirty="0"/>
-          </a:p>
-        </p:txBody>
-      </p:sp>
-      <p:sp>
-        <p:nvSpPr>
-          <p:cNvPr id="24" name="Text 22"/>
-          <p:cNvSpPr txBox="1"/>
-          <p:nvPr/>
-        </p:nvSpPr>
-        <p:spPr>
-          <a:xfrm>
-            <a:off x="1188720" y="4983480"/>
-            <a:ext cx="4526280" cy="777240"/>
+              <a:t>Можно ли выгружать логи действий (кто что спрашивал/делал) в наши системы безопасности?</a:t>
+            </a:r>
+            <a:endParaRPr lang="en-US" sz="1300" dirty="0"/>
+          </a:p>
+        </p:txBody>
+      </p:sp>
+      <p:sp>
+        <p:nvSpPr>
+          <p:cNvPr id="18" name="Text 16"/>
+          <p:cNvSpPr txBox="1"/>
+          <p:nvPr/>
+        </p:nvSpPr>
+        <p:spPr>
+          <a:xfrm>
+            <a:off x="502920" y="5925312"/>
+            <a:ext cx="11155680" cy="292608"/>
           </a:xfrm>
           <a:prstGeom prst="rect">
             <a:avLst/>
@@ -2884,12 +2572,12 @@
           <a:p>
             <a:pPr indent="0" marL="0">
               <a:lnSpc>
-                <a:spcPct val="110000"/>
+                <a:spcPct val="102000"/>
               </a:lnSpc>
               <a:buNone/>
             </a:pPr>
             <a:r>
-              <a:rPr lang="en-US" sz="1050" dirty="0">
+              <a:rPr lang="en-US" sz="1050" i="1" dirty="0">
                 <a:solidFill>
                   <a:srgbClr val="5B6B7A"/>
                 </a:solidFill>
@@ -2897,7 +2585,7 @@
                 <a:ea typeface="Calibri" pitchFamily="34" charset="-122"/>
                 <a:cs typeface="Calibri" pitchFamily="34" charset="-120"/>
               </a:rPr>
-              <a:t>Слишком технический вопрос — спросите проще или отложите на другой раз.</a:t>
+              <a:t>Проверяем интеграцию с системами информационной безопасности и экспорт журналов действий.</a:t>
             </a:r>
             <a:endParaRPr lang="en-US" sz="1050" dirty="0"/>
           </a:p>
@@ -2905,154 +2593,7 @@
       </p:sp>
       <p:sp>
         <p:nvSpPr>
-          <p:cNvPr id="25" name="Shape 23"/>
-          <p:cNvSpPr/>
-          <p:nvPr/>
-        </p:nvSpPr>
-        <p:spPr>
-          <a:xfrm>
-            <a:off x="6263640" y="4526280"/>
-            <a:ext cx="5394960" cy="1234440"/>
-          </a:xfrm>
-          <a:prstGeom prst="roundRect">
-            <a:avLst>
-              <a:gd name="adj" fmla="val 4444"/>
-            </a:avLst>
-          </a:prstGeom>
-          <a:solidFill>
-            <a:srgbClr val="F4F6F7"/>
-          </a:solidFill>
-          <a:ln w="9525">
-            <a:solidFill>
-              <a:srgbClr val="D8DEE2"/>
-            </a:solidFill>
-            <a:prstDash val="solid"/>
-          </a:ln>
-        </p:spPr>
-      </p:sp>
-      <p:sp>
-        <p:nvSpPr>
-          <p:cNvPr id="26" name="Text 24"/>
-          <p:cNvSpPr txBox="1"/>
-          <p:nvPr/>
-        </p:nvSpPr>
-        <p:spPr>
-          <a:xfrm>
-            <a:off x="6446520" y="4663440"/>
-            <a:ext cx="457200" cy="457200"/>
-          </a:xfrm>
-          <a:prstGeom prst="rect">
-            <a:avLst/>
-          </a:prstGeom>
-          <a:noFill/>
-          <a:ln/>
-        </p:spPr>
-        <p:txBody>
-          <a:bodyPr wrap="square" lIns="0" tIns="0" rIns="0" bIns="0" rtlCol="0" anchor="ctr"/>
-          <a:lstStyle/>
-          <a:p>
-            <a:pPr indent="0" marL="0">
-              <a:buNone/>
-            </a:pPr>
-            <a:r>
-              <a:rPr lang="en-US" sz="2000" b="1" dirty="0">
-                <a:solidFill>
-                  <a:srgbClr val="0A5F67"/>
-                </a:solidFill>
-                <a:latin typeface="Cambria" pitchFamily="34" charset="0"/>
-                <a:ea typeface="Cambria" pitchFamily="34" charset="-122"/>
-                <a:cs typeface="Cambria" pitchFamily="34" charset="-120"/>
-              </a:rPr>
-              <a:t>6</a:t>
-            </a:r>
-            <a:endParaRPr lang="en-US" sz="2000" dirty="0"/>
-          </a:p>
-        </p:txBody>
-      </p:sp>
-      <p:sp>
-        <p:nvSpPr>
-          <p:cNvPr id="27" name="Text 25"/>
-          <p:cNvSpPr txBox="1"/>
-          <p:nvPr/>
-        </p:nvSpPr>
-        <p:spPr>
-          <a:xfrm>
-            <a:off x="6949440" y="4663440"/>
-            <a:ext cx="4526280" cy="320040"/>
-          </a:xfrm>
-          <a:prstGeom prst="rect">
-            <a:avLst/>
-          </a:prstGeom>
-          <a:noFill/>
-          <a:ln/>
-        </p:spPr>
-        <p:txBody>
-          <a:bodyPr wrap="square" lIns="0" tIns="0" rIns="0" bIns="0" rtlCol="0" anchor="ctr"/>
-          <a:lstStyle/>
-          <a:p>
-            <a:pPr indent="0" marL="0">
-              <a:buNone/>
-            </a:pPr>
-            <a:r>
-              <a:rPr lang="en-US" sz="1250" b="1" dirty="0">
-                <a:solidFill>
-                  <a:srgbClr val="1A2733"/>
-                </a:solidFill>
-                <a:latin typeface="Calibri" pitchFamily="34" charset="0"/>
-                <a:ea typeface="Calibri" pitchFamily="34" charset="-122"/>
-                <a:cs typeface="Calibri" pitchFamily="34" charset="-120"/>
-              </a:rPr>
-              <a:t>Записывайте сразу после разговора</a:t>
-            </a:r>
-            <a:endParaRPr lang="en-US" sz="1250" dirty="0"/>
-          </a:p>
-        </p:txBody>
-      </p:sp>
-      <p:sp>
-        <p:nvSpPr>
-          <p:cNvPr id="28" name="Text 26"/>
-          <p:cNvSpPr txBox="1"/>
-          <p:nvPr/>
-        </p:nvSpPr>
-        <p:spPr>
-          <a:xfrm>
-            <a:off x="6949440" y="4983480"/>
-            <a:ext cx="4526280" cy="777240"/>
-          </a:xfrm>
-          <a:prstGeom prst="rect">
-            <a:avLst/>
-          </a:prstGeom>
-          <a:noFill/>
-          <a:ln/>
-        </p:spPr>
-        <p:txBody>
-          <a:bodyPr wrap="square" lIns="0" tIns="0" rIns="0" bIns="0" rtlCol="0" anchor="t"/>
-          <a:lstStyle/>
-          <a:p>
-            <a:pPr indent="0" marL="0">
-              <a:lnSpc>
-                <a:spcPct val="110000"/>
-              </a:lnSpc>
-              <a:buNone/>
-            </a:pPr>
-            <a:r>
-              <a:rPr lang="en-US" sz="1050" dirty="0">
-                <a:solidFill>
-                  <a:srgbClr val="5B6B7A"/>
-                </a:solidFill>
-                <a:latin typeface="Calibri" pitchFamily="34" charset="0"/>
-                <a:ea typeface="Calibri" pitchFamily="34" charset="-122"/>
-                <a:cs typeface="Calibri" pitchFamily="34" charset="-120"/>
-              </a:rPr>
-              <a:t>Пока не забылись детали — заносите в чек-лист интервью.</a:t>
-            </a:r>
-            <a:endParaRPr lang="en-US" sz="1050" dirty="0"/>
-          </a:p>
-        </p:txBody>
-      </p:sp>
-      <p:sp>
-        <p:nvSpPr>
-          <p:cNvPr id="29" name="Text 27"/>
+          <p:cNvPr id="19" name="Text 17"/>
           <p:cNvSpPr txBox="1"/>
           <p:nvPr/>
         </p:nvSpPr>
@@ -3083,7 +2624,7 @@
                 <a:ea typeface="Calibri" pitchFamily="34" charset="-122"/>
                 <a:cs typeface="Calibri" pitchFamily="34" charset="-120"/>
               </a:rPr>
-              <a:t>2 / 7</a:t>
+              <a:t>2 / 6</a:t>
             </a:r>
             <a:endParaRPr lang="en-US" sz="1050" dirty="0"/>
           </a:p>
@@ -3147,7 +2688,7 @@
                 <a:ea typeface="Calibri" pitchFamily="34" charset="-122"/>
                 <a:cs typeface="Calibri" pitchFamily="34" charset="-120"/>
               </a:rPr>
-              <a:t>2 · КРИТИЧНО СПРОСИТЬ</a:t>
+              <a:t>2 · ВАЖНО</a:t>
             </a:r>
             <a:endParaRPr lang="en-US" sz="1100" dirty="0"/>
           </a:p>
@@ -3186,7 +2727,7 @@
                 <a:ea typeface="Cambria" pitchFamily="34" charset="-122"/>
                 <a:cs typeface="Cambria" pitchFamily="34" charset="-120"/>
               </a:rPr>
-              <a:t>Критично спросить</a:t>
+              <a:t>Важно</a:t>
             </a:r>
             <a:endParaRPr lang="en-US" sz="2700" dirty="0"/>
           </a:p>
@@ -3267,7 +2808,7 @@
                 <a:ea typeface="Calibri" pitchFamily="34" charset="-122"/>
                 <a:cs typeface="Calibri" pitchFamily="34" charset="-120"/>
               </a:rPr>
-              <a:t>Есть ли автоматическое скрытие/маскирование персональных данных (ФИО, паспорта, счета) в ответах системы?</a:t>
+              <a:t>Если агент собирается сделать что-то важное (отправить письмо, изменить данные) — он спросит подтверждения у человека или сделает сам?</a:t>
             </a:r>
             <a:endParaRPr lang="en-US" sz="1300" dirty="0"/>
           </a:p>
@@ -3309,7 +2850,7 @@
                 <a:ea typeface="Calibri" pitchFamily="34" charset="-122"/>
                 <a:cs typeface="Calibri" pitchFamily="34" charset="-120"/>
               </a:rPr>
-              <a:t>Проверяем наличие автоматической защиты персональных данных в ответах — критично для комплаенса.</a:t>
+              <a:t>Проверяем наличие контроля человека перед важными автоматическими действиями агента.</a:t>
             </a:r>
             <a:endParaRPr lang="en-US" sz="1050" dirty="0"/>
           </a:p>
@@ -3374,7 +2915,7 @@
                 <a:ea typeface="Calibri" pitchFamily="34" charset="-122"/>
                 <a:cs typeface="Calibri" pitchFamily="34" charset="-120"/>
               </a:rPr>
-              <a:t>Можно ли развернуть систему полностью у нас, в закрытом контуре, без доступа к интернету?</a:t>
+              <a:t>Можно ли гибко настроить, кому какие источники данных доступны — вплоть до отдельных папок?</a:t>
             </a:r>
             <a:endParaRPr lang="en-US" sz="1300" dirty="0"/>
           </a:p>
@@ -3416,7 +2957,7 @@
                 <a:ea typeface="Calibri" pitchFamily="34" charset="-122"/>
                 <a:cs typeface="Calibri" pitchFamily="34" charset="-120"/>
               </a:rPr>
-              <a:t>Проверяем, есть ли у них поставка «в закрытом контуре» — важно для клиентов с высокими требованиями к безопасности.</a:t>
+              <a:t>Проверяем гранулярность разграничения доступа к источникам данных.</a:t>
             </a:r>
             <a:endParaRPr lang="en-US" sz="1050" dirty="0"/>
           </a:p>
@@ -3481,7 +3022,7 @@
                 <a:ea typeface="Calibri" pitchFamily="34" charset="-122"/>
                 <a:cs typeface="Calibri" pitchFamily="34" charset="-120"/>
               </a:rPr>
-              <a:t>Может ли система отвечать, объединяя данные сразу из нескольких систем, а не только по одной?</a:t>
+              <a:t>Если нужно посчитать показатель по данным из разных систем — система сама сведёт расчёт, или это делается вручную?</a:t>
             </a:r>
             <a:endParaRPr lang="en-US" sz="1300" dirty="0"/>
           </a:p>
@@ -3523,7 +3064,7 @@
                 <a:ea typeface="Calibri" pitchFamily="34" charset="-122"/>
                 <a:cs typeface="Calibri" pitchFamily="34" charset="-120"/>
               </a:rPr>
-              <a:t>Проверяем, умеет ли конкурент строить один ответ на основе сразу нескольких источников данных, а не искать по одному за раз.</a:t>
+              <a:t>Проверяем, автоматизирован ли у них расчёт, который затрагивает несколько систем.</a:t>
             </a:r>
             <a:endParaRPr lang="en-US" sz="1050" dirty="0"/>
           </a:p>
@@ -3588,7 +3129,7 @@
                 <a:ea typeface="Calibri" pitchFamily="34" charset="-122"/>
                 <a:cs typeface="Calibri" pitchFamily="34" charset="-120"/>
               </a:rPr>
-              <a:t>Есть ли единый справочник бизнес-показателей, чтобы разные сотрудники получали одинаковый ответ на один и тот же вопрос?</a:t>
+              <a:t>Можно ли самостоятельно, без программиста, настраивать, какие выборки/срезы данных доступны для вопросов?</a:t>
             </a:r>
             <a:endParaRPr lang="en-US" sz="1300" dirty="0"/>
           </a:p>
@@ -3630,7 +3171,7 @@
                 <a:ea typeface="Calibri" pitchFamily="34" charset="-122"/>
                 <a:cs typeface="Calibri" pitchFamily="34" charset="-120"/>
               </a:rPr>
-              <a:t>Проверяем, есть ли у них общий каталог метрик с готовыми формулами, чтобы ответы не расходились между сотрудниками.</a:t>
+              <a:t>Проверяем, есть ли у них простой конструктор настройки данных, без обращения к разработчикам.</a:t>
             </a:r>
             <a:endParaRPr lang="en-US" sz="1050" dirty="0"/>
           </a:p>
@@ -3695,7 +3236,7 @@
                 <a:ea typeface="Calibri" pitchFamily="34" charset="-122"/>
                 <a:cs typeface="Calibri" pitchFamily="34" charset="-120"/>
               </a:rPr>
-              <a:t>Можно ли выгружать логи действий (кто что спрашивал/делал) в наши системы безопасности?</a:t>
+              <a:t>Можно ли подключить систему к моделям, которые мы уже используем, или она работает только со своими?</a:t>
             </a:r>
             <a:endParaRPr lang="en-US" sz="1300" dirty="0"/>
           </a:p>
@@ -3737,7 +3278,7 @@
                 <a:ea typeface="Calibri" pitchFamily="34" charset="-122"/>
                 <a:cs typeface="Calibri" pitchFamily="34" charset="-120"/>
               </a:rPr>
-              <a:t>Проверяем интеграцию с системами информационной безопасности и экспорт журналов действий.</a:t>
+              <a:t>Проверяем, насколько открыта их платформа к сторонним ИИ-моделям.</a:t>
             </a:r>
             <a:endParaRPr lang="en-US" sz="1050" dirty="0"/>
           </a:p>
@@ -3776,7 +3317,7 @@
                 <a:ea typeface="Calibri" pitchFamily="34" charset="-122"/>
                 <a:cs typeface="Calibri" pitchFamily="34" charset="-120"/>
               </a:rPr>
-              <a:t>3 / 7</a:t>
+              <a:t>3 / 6</a:t>
             </a:r>
             <a:endParaRPr lang="en-US" sz="1050" dirty="0"/>
           </a:p>
@@ -3840,7 +3381,7 @@
                 <a:ea typeface="Calibri" pitchFamily="34" charset="-122"/>
                 <a:cs typeface="Calibri" pitchFamily="34" charset="-120"/>
               </a:rPr>
-              <a:t>3 · ВАЖНО</a:t>
+              <a:t>3 · ЕСЛИ БУДЕТ ВРЕМЯ</a:t>
             </a:r>
             <a:endParaRPr lang="en-US" sz="1100" dirty="0"/>
           </a:p>
@@ -3879,7 +3420,7 @@
                 <a:ea typeface="Cambria" pitchFamily="34" charset="-122"/>
                 <a:cs typeface="Cambria" pitchFamily="34" charset="-120"/>
               </a:rPr>
-              <a:t>Важно</a:t>
+              <a:t>Если будет время</a:t>
             </a:r>
             <a:endParaRPr lang="en-US" sz="2700" dirty="0"/>
           </a:p>
@@ -3960,7 +3501,7 @@
                 <a:ea typeface="Calibri" pitchFamily="34" charset="-122"/>
                 <a:cs typeface="Calibri" pitchFamily="34" charset="-120"/>
               </a:rPr>
-              <a:t>Если агент собирается сделать что-то важное (отправить письмо, изменить данные) — он спросит подтверждения у человека или сделает сам?</a:t>
+              <a:t>Как хранятся пароли и ключи доступа к нашим системам — есть ли отдельная защита?</a:t>
             </a:r>
             <a:endParaRPr lang="en-US" sz="1300" dirty="0"/>
           </a:p>
@@ -4002,7 +3543,7 @@
                 <a:ea typeface="Calibri" pitchFamily="34" charset="-122"/>
                 <a:cs typeface="Calibri" pitchFamily="34" charset="-120"/>
               </a:rPr>
-              <a:t>Проверяем наличие контроля человека перед важными автоматическими действиями агента.</a:t>
+              <a:t>Проверяем, как конкурент защищает учётные данные для подключения к системам клиента.</a:t>
             </a:r>
             <a:endParaRPr lang="en-US" sz="1050" dirty="0"/>
           </a:p>
@@ -4067,7 +3608,7 @@
                 <a:ea typeface="Calibri" pitchFamily="34" charset="-122"/>
                 <a:cs typeface="Calibri" pitchFamily="34" charset="-120"/>
               </a:rPr>
-              <a:t>Можно ли гибко настроить, кому какие источники данных доступны — вплоть до отдельных папок?</a:t>
+              <a:t>Если у вас есть агенты, которые сами выполняют действия — видно ли, к каким системам у какого агента есть доступ?</a:t>
             </a:r>
             <a:endParaRPr lang="en-US" sz="1300" dirty="0"/>
           </a:p>
@@ -4109,7 +3650,7 @@
                 <a:ea typeface="Calibri" pitchFamily="34" charset="-122"/>
                 <a:cs typeface="Calibri" pitchFamily="34" charset="-120"/>
               </a:rPr>
-              <a:t>Проверяем гранулярность разграничения доступа к источникам данных.</a:t>
+              <a:t>Проверяем, ведут ли они учёт того, к каким системам может обращаться каждый агент.</a:t>
             </a:r>
             <a:endParaRPr lang="en-US" sz="1050" dirty="0"/>
           </a:p>
@@ -4174,7 +3715,7 @@
                 <a:ea typeface="Calibri" pitchFamily="34" charset="-122"/>
                 <a:cs typeface="Calibri" pitchFamily="34" charset="-120"/>
               </a:rPr>
-              <a:t>Если нужно посчитать показатель по данным из разных систем — система сама сведёт расчёт, или это делается вручную?</a:t>
+              <a:t>Можно ли отличить текст или документ, который создал ИИ, от написанного человеком?</a:t>
             </a:r>
             <a:endParaRPr lang="en-US" sz="1300" dirty="0"/>
           </a:p>
@@ -4216,7 +3757,7 @@
                 <a:ea typeface="Calibri" pitchFamily="34" charset="-122"/>
                 <a:cs typeface="Calibri" pitchFamily="34" charset="-120"/>
               </a:rPr>
-              <a:t>Проверяем, автоматизирован ли у них расчёт, который затрагивает несколько систем.</a:t>
+              <a:t>Проверяем, маркируют ли они контент, созданный моделью.</a:t>
             </a:r>
             <a:endParaRPr lang="en-US" sz="1050" dirty="0"/>
           </a:p>
@@ -4224,221 +3765,7 @@
       </p:sp>
       <p:sp>
         <p:nvSpPr>
-          <p:cNvPr id="13" name="Shape 11"/>
-          <p:cNvSpPr/>
-          <p:nvPr/>
-        </p:nvSpPr>
-        <p:spPr>
-          <a:xfrm>
-            <a:off x="502920" y="4434840"/>
-            <a:ext cx="11155680" cy="0"/>
-          </a:xfrm>
-          <a:prstGeom prst="line">
-            <a:avLst/>
-          </a:prstGeom>
-          <a:noFill/>
-          <a:ln w="9525">
-            <a:solidFill>
-              <a:srgbClr val="D8DEE2"/>
-            </a:solidFill>
-            <a:prstDash val="solid"/>
-          </a:ln>
-        </p:spPr>
-      </p:sp>
-      <p:sp>
-        <p:nvSpPr>
-          <p:cNvPr id="14" name="Text 12"/>
-          <p:cNvSpPr txBox="1"/>
-          <p:nvPr/>
-        </p:nvSpPr>
-        <p:spPr>
-          <a:xfrm>
-            <a:off x="502920" y="4526280"/>
-            <a:ext cx="11155680" cy="512064"/>
-          </a:xfrm>
-          <a:prstGeom prst="rect">
-            <a:avLst/>
-          </a:prstGeom>
-          <a:noFill/>
-          <a:ln/>
-        </p:spPr>
-        <p:txBody>
-          <a:bodyPr wrap="square" lIns="0" tIns="0" rIns="0" bIns="0" rtlCol="0" anchor="t"/>
-          <a:lstStyle/>
-          <a:p>
-            <a:pPr indent="0" marL="0">
-              <a:lnSpc>
-                <a:spcPct val="105000"/>
-              </a:lnSpc>
-              <a:buNone/>
-            </a:pPr>
-            <a:r>
-              <a:rPr lang="en-US" sz="1300" b="1" dirty="0">
-                <a:solidFill>
-                  <a:srgbClr val="1A2733"/>
-                </a:solidFill>
-                <a:latin typeface="Calibri" pitchFamily="34" charset="0"/>
-                <a:ea typeface="Calibri" pitchFamily="34" charset="-122"/>
-                <a:cs typeface="Calibri" pitchFamily="34" charset="-120"/>
-              </a:rPr>
-              <a:t>Можно ли самостоятельно, без программиста, настраивать, какие выборки/срезы данных доступны для вопросов?</a:t>
-            </a:r>
-            <a:endParaRPr lang="en-US" sz="1300" dirty="0"/>
-          </a:p>
-        </p:txBody>
-      </p:sp>
-      <p:sp>
-        <p:nvSpPr>
-          <p:cNvPr id="15" name="Text 13"/>
-          <p:cNvSpPr txBox="1"/>
-          <p:nvPr/>
-        </p:nvSpPr>
-        <p:spPr>
-          <a:xfrm>
-            <a:off x="502920" y="5010912"/>
-            <a:ext cx="11155680" cy="292608"/>
-          </a:xfrm>
-          <a:prstGeom prst="rect">
-            <a:avLst/>
-          </a:prstGeom>
-          <a:noFill/>
-          <a:ln/>
-        </p:spPr>
-        <p:txBody>
-          <a:bodyPr wrap="square" lIns="0" tIns="0" rIns="0" bIns="0" rtlCol="0" anchor="t"/>
-          <a:lstStyle/>
-          <a:p>
-            <a:pPr indent="0" marL="0">
-              <a:lnSpc>
-                <a:spcPct val="102000"/>
-              </a:lnSpc>
-              <a:buNone/>
-            </a:pPr>
-            <a:r>
-              <a:rPr lang="en-US" sz="1050" i="1" dirty="0">
-                <a:solidFill>
-                  <a:srgbClr val="5B6B7A"/>
-                </a:solidFill>
-                <a:latin typeface="Calibri" pitchFamily="34" charset="0"/>
-                <a:ea typeface="Calibri" pitchFamily="34" charset="-122"/>
-                <a:cs typeface="Calibri" pitchFamily="34" charset="-120"/>
-              </a:rPr>
-              <a:t>Проверяем, есть ли у них простой конструктор настройки данных, без обращения к разработчикам.</a:t>
-            </a:r>
-            <a:endParaRPr lang="en-US" sz="1050" dirty="0"/>
-          </a:p>
-        </p:txBody>
-      </p:sp>
-      <p:sp>
-        <p:nvSpPr>
-          <p:cNvPr id="16" name="Shape 14"/>
-          <p:cNvSpPr/>
-          <p:nvPr/>
-        </p:nvSpPr>
-        <p:spPr>
-          <a:xfrm>
-            <a:off x="502920" y="5349240"/>
-            <a:ext cx="11155680" cy="0"/>
-          </a:xfrm>
-          <a:prstGeom prst="line">
-            <a:avLst/>
-          </a:prstGeom>
-          <a:noFill/>
-          <a:ln w="9525">
-            <a:solidFill>
-              <a:srgbClr val="D8DEE2"/>
-            </a:solidFill>
-            <a:prstDash val="solid"/>
-          </a:ln>
-        </p:spPr>
-      </p:sp>
-      <p:sp>
-        <p:nvSpPr>
-          <p:cNvPr id="17" name="Text 15"/>
-          <p:cNvSpPr txBox="1"/>
-          <p:nvPr/>
-        </p:nvSpPr>
-        <p:spPr>
-          <a:xfrm>
-            <a:off x="502920" y="5440680"/>
-            <a:ext cx="11155680" cy="512064"/>
-          </a:xfrm>
-          <a:prstGeom prst="rect">
-            <a:avLst/>
-          </a:prstGeom>
-          <a:noFill/>
-          <a:ln/>
-        </p:spPr>
-        <p:txBody>
-          <a:bodyPr wrap="square" lIns="0" tIns="0" rIns="0" bIns="0" rtlCol="0" anchor="t"/>
-          <a:lstStyle/>
-          <a:p>
-            <a:pPr indent="0" marL="0">
-              <a:lnSpc>
-                <a:spcPct val="105000"/>
-              </a:lnSpc>
-              <a:buNone/>
-            </a:pPr>
-            <a:r>
-              <a:rPr lang="en-US" sz="1300" b="1" dirty="0">
-                <a:solidFill>
-                  <a:srgbClr val="1A2733"/>
-                </a:solidFill>
-                <a:latin typeface="Calibri" pitchFamily="34" charset="0"/>
-                <a:ea typeface="Calibri" pitchFamily="34" charset="-122"/>
-                <a:cs typeface="Calibri" pitchFamily="34" charset="-120"/>
-              </a:rPr>
-              <a:t>Можно ли подключить систему к моделям, которые мы уже используем, или она работает только со своими?</a:t>
-            </a:r>
-            <a:endParaRPr lang="en-US" sz="1300" dirty="0"/>
-          </a:p>
-        </p:txBody>
-      </p:sp>
-      <p:sp>
-        <p:nvSpPr>
-          <p:cNvPr id="18" name="Text 16"/>
-          <p:cNvSpPr txBox="1"/>
-          <p:nvPr/>
-        </p:nvSpPr>
-        <p:spPr>
-          <a:xfrm>
-            <a:off x="502920" y="5925312"/>
-            <a:ext cx="11155680" cy="292608"/>
-          </a:xfrm>
-          <a:prstGeom prst="rect">
-            <a:avLst/>
-          </a:prstGeom>
-          <a:noFill/>
-          <a:ln/>
-        </p:spPr>
-        <p:txBody>
-          <a:bodyPr wrap="square" lIns="0" tIns="0" rIns="0" bIns="0" rtlCol="0" anchor="t"/>
-          <a:lstStyle/>
-          <a:p>
-            <a:pPr indent="0" marL="0">
-              <a:lnSpc>
-                <a:spcPct val="102000"/>
-              </a:lnSpc>
-              <a:buNone/>
-            </a:pPr>
-            <a:r>
-              <a:rPr lang="en-US" sz="1050" i="1" dirty="0">
-                <a:solidFill>
-                  <a:srgbClr val="5B6B7A"/>
-                </a:solidFill>
-                <a:latin typeface="Calibri" pitchFamily="34" charset="0"/>
-                <a:ea typeface="Calibri" pitchFamily="34" charset="-122"/>
-                <a:cs typeface="Calibri" pitchFamily="34" charset="-120"/>
-              </a:rPr>
-              <a:t>Проверяем, насколько открыта их платформа к сторонним ИИ-моделям.</a:t>
-            </a:r>
-            <a:endParaRPr lang="en-US" sz="1050" dirty="0"/>
-          </a:p>
-        </p:txBody>
-      </p:sp>
-      <p:sp>
-        <p:nvSpPr>
-          <p:cNvPr id="19" name="Text 17"/>
+          <p:cNvPr id="13" name="Text 11"/>
           <p:cNvSpPr txBox="1"/>
           <p:nvPr/>
         </p:nvSpPr>
@@ -4469,7 +3796,7 @@
                 <a:ea typeface="Calibri" pitchFamily="34" charset="-122"/>
                 <a:cs typeface="Calibri" pitchFamily="34" charset="-120"/>
               </a:rPr>
-              <a:t>4 / 7</a:t>
+              <a:t>4 / 6</a:t>
             </a:r>
             <a:endParaRPr lang="en-US" sz="1050" dirty="0"/>
           </a:p>
@@ -4533,7 +3860,7 @@
                 <a:ea typeface="Calibri" pitchFamily="34" charset="-122"/>
                 <a:cs typeface="Calibri" pitchFamily="34" charset="-120"/>
               </a:rPr>
-              <a:t>4 · ЕСЛИ БУДЕТ ВРЕМЯ</a:t>
+              <a:t>4 · ОРГАНИЗАЦИОННЫЕ ВОПРОСЫ</a:t>
             </a:r>
             <a:endParaRPr lang="en-US" sz="1100" dirty="0"/>
           </a:p>
@@ -4572,7 +3899,7 @@
                 <a:ea typeface="Cambria" pitchFamily="34" charset="-122"/>
                 <a:cs typeface="Cambria" pitchFamily="34" charset="-120"/>
               </a:rPr>
-              <a:t>Если будет время</a:t>
+              <a:t>Организационные вопросы — спрашивать всегда</a:t>
             </a:r>
             <a:endParaRPr lang="en-US" sz="2700" dirty="0"/>
           </a:p>
@@ -4653,7 +3980,7 @@
                 <a:ea typeface="Calibri" pitchFamily="34" charset="-122"/>
                 <a:cs typeface="Calibri" pitchFamily="34" charset="-120"/>
               </a:rPr>
-              <a:t>Как хранятся пароли и ключи доступа к нашим системам — есть ли отдельная защита?</a:t>
+              <a:t>Сколько времени обычно занимает внедрение?</a:t>
             </a:r>
             <a:endParaRPr lang="en-US" sz="1300" dirty="0"/>
           </a:p>
@@ -4695,7 +4022,7 @@
                 <a:ea typeface="Calibri" pitchFamily="34" charset="-122"/>
                 <a:cs typeface="Calibri" pitchFamily="34" charset="-120"/>
               </a:rPr>
-              <a:t>Проверяем, как конкурент защищает учётные данные для подключения к системам клиента.</a:t>
+              <a:t>Ориентир скорости поставки у конкурента — для сравнения с нашими сроками.</a:t>
             </a:r>
             <a:endParaRPr lang="en-US" sz="1050" dirty="0"/>
           </a:p>
@@ -4760,7 +4087,7 @@
                 <a:ea typeface="Calibri" pitchFamily="34" charset="-122"/>
                 <a:cs typeface="Calibri" pitchFamily="34" charset="-120"/>
               </a:rPr>
-              <a:t>Если у вас есть агенты, которые сами выполняют действия — видно ли, к каким системам у какого агента есть доступ?</a:t>
+              <a:t>Как строится ценообразование — за пользователя, за объём данных, фиксированная стоимость?</a:t>
             </a:r>
             <a:endParaRPr lang="en-US" sz="1300" dirty="0"/>
           </a:p>
@@ -4802,7 +4129,7 @@
                 <a:ea typeface="Calibri" pitchFamily="34" charset="-122"/>
                 <a:cs typeface="Calibri" pitchFamily="34" charset="-120"/>
               </a:rPr>
-              <a:t>Проверяем, ведут ли они учёт того, к каким системам может обращаться каждый агент.</a:t>
+              <a:t>Модель цены конкурента — для сравнения с нашей.</a:t>
             </a:r>
             <a:endParaRPr lang="en-US" sz="1050" dirty="0"/>
           </a:p>
@@ -4867,7 +4194,7 @@
                 <a:ea typeface="Calibri" pitchFamily="34" charset="-122"/>
                 <a:cs typeface="Calibri" pitchFamily="34" charset="-120"/>
               </a:rPr>
-              <a:t>Можно ли отличить текст или документ, который создал ИИ, от написанного человеком?</a:t>
+              <a:t>Есть ли у вас клиенты в нашей отрасли, на которых можно посмотреть референс?</a:t>
             </a:r>
             <a:endParaRPr lang="en-US" sz="1300" dirty="0"/>
           </a:p>
@@ -4909,7 +4236,7 @@
                 <a:ea typeface="Calibri" pitchFamily="34" charset="-122"/>
                 <a:cs typeface="Calibri" pitchFamily="34" charset="-120"/>
               </a:rPr>
-              <a:t>Проверяем, маркируют ли они контент, созданный моделью.</a:t>
+              <a:t>Отраслевой опыт конкурента.</a:t>
             </a:r>
             <a:endParaRPr lang="en-US" sz="1050" dirty="0"/>
           </a:p>
@@ -4948,7 +4275,7 @@
                 <a:ea typeface="Calibri" pitchFamily="34" charset="-122"/>
                 <a:cs typeface="Calibri" pitchFamily="34" charset="-120"/>
               </a:rPr>
-              <a:t>5 / 7</a:t>
+              <a:t>5 / 6</a:t>
             </a:r>
             <a:endParaRPr lang="en-US" sz="1050" dirty="0"/>
           </a:p>
@@ -5012,7 +4339,7 @@
                 <a:ea typeface="Calibri" pitchFamily="34" charset="-122"/>
                 <a:cs typeface="Calibri" pitchFamily="34" charset="-120"/>
               </a:rPr>
-              <a:t>5 · ОРГАНИЗАЦИОННЫЕ ВОПРОСЫ</a:t>
+              <a:t>5 · МАТРИЦА ПОКРЫТИЯ</a:t>
             </a:r>
             <a:endParaRPr lang="en-US" sz="1100" dirty="0"/>
           </a:p>
@@ -5051,7 +4378,7 @@
                 <a:ea typeface="Cambria" pitchFamily="34" charset="-122"/>
                 <a:cs typeface="Cambria" pitchFamily="34" charset="-120"/>
               </a:rPr>
-              <a:t>Организационные вопросы — спрашивать всегда</a:t>
+              <a:t>Какой вопрос подтверждает какую функциональность</a:t>
             </a:r>
             <a:endParaRPr lang="en-US" sz="2700" dirty="0"/>
           </a:p>
@@ -5090,7 +4417,7 @@
                 <a:ea typeface="Calibri" pitchFamily="34" charset="-122"/>
                 <a:cs typeface="Calibri" pitchFamily="34" charset="-120"/>
               </a:rPr>
-              <a:t>Вопрос — своими словами; объяснение — для вас, не для клиента</a:t>
+              <a:t>X — подтверждает напрямую. ~ — подтверждает частично. Пусто — не связано.</a:t>
             </a:r>
             <a:endParaRPr lang="en-US" sz="1300" dirty="0"/>
           </a:p>
@@ -5103,28 +4430,28 @@
           <p:nvPr/>
         </p:nvSpPr>
         <p:spPr>
-          <a:xfrm>
-            <a:off x="502920" y="1783080"/>
-            <a:ext cx="11155680" cy="512064"/>
-          </a:xfrm>
-          <a:prstGeom prst="rect">
-            <a:avLst/>
-          </a:prstGeom>
-          <a:noFill/>
-          <a:ln/>
-        </p:spPr>
-        <p:txBody>
-          <a:bodyPr wrap="square" lIns="0" tIns="0" rIns="0" bIns="0" rtlCol="0" anchor="t"/>
-          <a:lstStyle/>
-          <a:p>
-            <a:pPr indent="0" marL="0">
+          <a:xfrm rot="-5400000">
+            <a:off x="2873636" y="2155564"/>
+            <a:ext cx="1417320" cy="489473"/>
+          </a:xfrm>
+          <a:prstGeom prst="rect">
+            <a:avLst/>
+          </a:prstGeom>
+          <a:noFill/>
+          <a:ln/>
+        </p:spPr>
+        <p:txBody>
+          <a:bodyPr wrap="square" lIns="0" tIns="0" rIns="0" bIns="0" rtlCol="0" anchor="ctr"/>
+          <a:lstStyle/>
+          <a:p>
+            <a:pPr algn="ctr" indent="0" marL="0">
               <a:lnSpc>
-                <a:spcPct val="105000"/>
+                <a:spcPct val="95000"/>
               </a:lnSpc>
               <a:buNone/>
             </a:pPr>
             <a:r>
-              <a:rPr lang="en-US" sz="1300" b="1" dirty="0">
+              <a:rPr lang="en-US" sz="750" dirty="0">
                 <a:solidFill>
                   <a:srgbClr val="1A2733"/>
                 </a:solidFill>
@@ -5132,9 +4459,9 @@
                 <a:ea typeface="Calibri" pitchFamily="34" charset="-122"/>
                 <a:cs typeface="Calibri" pitchFamily="34" charset="-120"/>
               </a:rPr>
-              <a:t>Сколько времени обычно занимает внедрение?</a:t>
-            </a:r>
-            <a:endParaRPr lang="en-US" sz="1300" dirty="0"/>
+              <a:t>Контроль персональных данных</a:t>
+            </a:r>
+            <a:endParaRPr lang="en-US" sz="750" dirty="0"/>
           </a:p>
         </p:txBody>
       </p:sp>
@@ -5145,50 +4472,1094 @@
           <p:nvPr/>
         </p:nvSpPr>
         <p:spPr>
-          <a:xfrm>
-            <a:off x="502920" y="2267712"/>
-            <a:ext cx="11155680" cy="292608"/>
-          </a:xfrm>
-          <a:prstGeom prst="rect">
-            <a:avLst/>
-          </a:prstGeom>
-          <a:noFill/>
-          <a:ln/>
-        </p:spPr>
-        <p:txBody>
-          <a:bodyPr wrap="square" lIns="0" tIns="0" rIns="0" bIns="0" rtlCol="0" anchor="t"/>
-          <a:lstStyle/>
-          <a:p>
-            <a:pPr indent="0" marL="0">
+          <a:xfrm rot="-5400000">
+            <a:off x="3363109" y="2155564"/>
+            <a:ext cx="1417320" cy="489473"/>
+          </a:xfrm>
+          <a:prstGeom prst="rect">
+            <a:avLst/>
+          </a:prstGeom>
+          <a:noFill/>
+          <a:ln/>
+        </p:spPr>
+        <p:txBody>
+          <a:bodyPr wrap="square" lIns="0" tIns="0" rIns="0" bIns="0" rtlCol="0" anchor="ctr"/>
+          <a:lstStyle/>
+          <a:p>
+            <a:pPr algn="ctr" indent="0" marL="0">
               <a:lnSpc>
-                <a:spcPct val="102000"/>
+                <a:spcPct val="95000"/>
               </a:lnSpc>
               <a:buNone/>
             </a:pPr>
             <a:r>
-              <a:rPr lang="en-US" sz="1050" i="1" dirty="0">
-                <a:solidFill>
-                  <a:srgbClr val="5B6B7A"/>
-                </a:solidFill>
-                <a:latin typeface="Calibri" pitchFamily="34" charset="0"/>
-                <a:ea typeface="Calibri" pitchFamily="34" charset="-122"/>
-                <a:cs typeface="Calibri" pitchFamily="34" charset="-120"/>
-              </a:rPr>
-              <a:t>Ориентир скорости поставки у конкурента — для сравнения с нашими сроками.</a:t>
-            </a:r>
-            <a:endParaRPr lang="en-US" sz="1050" dirty="0"/>
-          </a:p>
-        </p:txBody>
-      </p:sp>
-      <p:sp>
-        <p:nvSpPr>
-          <p:cNvPr id="7" name="Shape 5"/>
+              <a:rPr lang="en-US" sz="750" dirty="0">
+                <a:solidFill>
+                  <a:srgbClr val="1A2733"/>
+                </a:solidFill>
+                <a:latin typeface="Calibri" pitchFamily="34" charset="0"/>
+                <a:ea typeface="Calibri" pitchFamily="34" charset="-122"/>
+                <a:cs typeface="Calibri" pitchFamily="34" charset="-120"/>
+              </a:rPr>
+              <a:t>Офлайн-образы поставки</a:t>
+            </a:r>
+            <a:endParaRPr lang="en-US" sz="750" dirty="0"/>
+          </a:p>
+        </p:txBody>
+      </p:sp>
+      <p:sp>
+        <p:nvSpPr>
+          <p:cNvPr id="7" name="Text 5"/>
+          <p:cNvSpPr txBox="1"/>
+          <p:nvPr/>
+        </p:nvSpPr>
+        <p:spPr>
+          <a:xfrm rot="-5400000">
+            <a:off x="3852582" y="2155564"/>
+            <a:ext cx="1417320" cy="489473"/>
+          </a:xfrm>
+          <a:prstGeom prst="rect">
+            <a:avLst/>
+          </a:prstGeom>
+          <a:noFill/>
+          <a:ln/>
+        </p:spPr>
+        <p:txBody>
+          <a:bodyPr wrap="square" lIns="0" tIns="0" rIns="0" bIns="0" rtlCol="0" anchor="ctr"/>
+          <a:lstStyle/>
+          <a:p>
+            <a:pPr algn="ctr" indent="0" marL="0">
+              <a:lnSpc>
+                <a:spcPct val="95000"/>
+              </a:lnSpc>
+              <a:buNone/>
+            </a:pPr>
+            <a:r>
+              <a:rPr lang="en-US" sz="750" dirty="0">
+                <a:solidFill>
+                  <a:srgbClr val="1A2733"/>
+                </a:solidFill>
+                <a:latin typeface="Calibri" pitchFamily="34" charset="0"/>
+                <a:ea typeface="Calibri" pitchFamily="34" charset="-122"/>
+                <a:cs typeface="Calibri" pitchFamily="34" charset="-120"/>
+              </a:rPr>
+              <a:t>Гейт режима поставки</a:t>
+            </a:r>
+            <a:endParaRPr lang="en-US" sz="750" dirty="0"/>
+          </a:p>
+        </p:txBody>
+      </p:sp>
+      <p:sp>
+        <p:nvSpPr>
+          <p:cNvPr id="8" name="Text 6"/>
+          <p:cNvSpPr txBox="1"/>
+          <p:nvPr/>
+        </p:nvSpPr>
+        <p:spPr>
+          <a:xfrm rot="-5400000">
+            <a:off x="4342055" y="2155564"/>
+            <a:ext cx="1417320" cy="489473"/>
+          </a:xfrm>
+          <a:prstGeom prst="rect">
+            <a:avLst/>
+          </a:prstGeom>
+          <a:noFill/>
+          <a:ln/>
+        </p:spPr>
+        <p:txBody>
+          <a:bodyPr wrap="square" lIns="0" tIns="0" rIns="0" bIns="0" rtlCol="0" anchor="ctr"/>
+          <a:lstStyle/>
+          <a:p>
+            <a:pPr algn="ctr" indent="0" marL="0">
+              <a:lnSpc>
+                <a:spcPct val="95000"/>
+              </a:lnSpc>
+              <a:buNone/>
+            </a:pPr>
+            <a:r>
+              <a:rPr lang="en-US" sz="750" dirty="0">
+                <a:solidFill>
+                  <a:srgbClr val="1A2733"/>
+                </a:solidFill>
+                <a:latin typeface="Calibri" pitchFamily="34" charset="0"/>
+                <a:ea typeface="Calibri" pitchFamily="34" charset="-122"/>
+                <a:cs typeface="Calibri" pitchFamily="34" charset="-120"/>
+              </a:rPr>
+              <a:t>Кросс-источниковая аналитика</a:t>
+            </a:r>
+            <a:endParaRPr lang="en-US" sz="750" dirty="0"/>
+          </a:p>
+        </p:txBody>
+      </p:sp>
+      <p:sp>
+        <p:nvSpPr>
+          <p:cNvPr id="9" name="Text 7"/>
+          <p:cNvSpPr txBox="1"/>
+          <p:nvPr/>
+        </p:nvSpPr>
+        <p:spPr>
+          <a:xfrm rot="-5400000">
+            <a:off x="4831528" y="2155564"/>
+            <a:ext cx="1417320" cy="489473"/>
+          </a:xfrm>
+          <a:prstGeom prst="rect">
+            <a:avLst/>
+          </a:prstGeom>
+          <a:noFill/>
+          <a:ln/>
+        </p:spPr>
+        <p:txBody>
+          <a:bodyPr wrap="square" lIns="0" tIns="0" rIns="0" bIns="0" rtlCol="0" anchor="ctr"/>
+          <a:lstStyle/>
+          <a:p>
+            <a:pPr algn="ctr" indent="0" marL="0">
+              <a:lnSpc>
+                <a:spcPct val="95000"/>
+              </a:lnSpc>
+              <a:buNone/>
+            </a:pPr>
+            <a:r>
+              <a:rPr lang="en-US" sz="750" dirty="0">
+                <a:solidFill>
+                  <a:srgbClr val="1A2733"/>
+                </a:solidFill>
+                <a:latin typeface="Calibri" pitchFamily="34" charset="0"/>
+                <a:ea typeface="Calibri" pitchFamily="34" charset="-122"/>
+                <a:cs typeface="Calibri" pitchFamily="34" charset="-120"/>
+              </a:rPr>
+              <a:t>Наполнение каталога из глоссария</a:t>
+            </a:r>
+            <a:endParaRPr lang="en-US" sz="750" dirty="0"/>
+          </a:p>
+        </p:txBody>
+      </p:sp>
+      <p:sp>
+        <p:nvSpPr>
+          <p:cNvPr id="10" name="Text 8"/>
+          <p:cNvSpPr txBox="1"/>
+          <p:nvPr/>
+        </p:nvSpPr>
+        <p:spPr>
+          <a:xfrm rot="-5400000">
+            <a:off x="5321001" y="2155564"/>
+            <a:ext cx="1417320" cy="489473"/>
+          </a:xfrm>
+          <a:prstGeom prst="rect">
+            <a:avLst/>
+          </a:prstGeom>
+          <a:noFill/>
+          <a:ln/>
+        </p:spPr>
+        <p:txBody>
+          <a:bodyPr wrap="square" lIns="0" tIns="0" rIns="0" bIns="0" rtlCol="0" anchor="ctr"/>
+          <a:lstStyle/>
+          <a:p>
+            <a:pPr algn="ctr" indent="0" marL="0">
+              <a:lnSpc>
+                <a:spcPct val="95000"/>
+              </a:lnSpc>
+              <a:buNone/>
+            </a:pPr>
+            <a:r>
+              <a:rPr lang="en-US" sz="750" dirty="0">
+                <a:solidFill>
+                  <a:srgbClr val="1A2733"/>
+                </a:solidFill>
+                <a:latin typeface="Calibri" pitchFamily="34" charset="0"/>
+                <a:ea typeface="Calibri" pitchFamily="34" charset="-122"/>
+                <a:cs typeface="Calibri" pitchFamily="34" charset="-120"/>
+              </a:rPr>
+              <a:t>Показатель как объект каталога</a:t>
+            </a:r>
+            <a:endParaRPr lang="en-US" sz="750" dirty="0"/>
+          </a:p>
+        </p:txBody>
+      </p:sp>
+      <p:sp>
+        <p:nvSpPr>
+          <p:cNvPr id="11" name="Text 9"/>
+          <p:cNvSpPr txBox="1"/>
+          <p:nvPr/>
+        </p:nvSpPr>
+        <p:spPr>
+          <a:xfrm rot="-5400000">
+            <a:off x="5810474" y="2155564"/>
+            <a:ext cx="1417320" cy="489473"/>
+          </a:xfrm>
+          <a:prstGeom prst="rect">
+            <a:avLst/>
+          </a:prstGeom>
+          <a:noFill/>
+          <a:ln/>
+        </p:spPr>
+        <p:txBody>
+          <a:bodyPr wrap="square" lIns="0" tIns="0" rIns="0" bIns="0" rtlCol="0" anchor="ctr"/>
+          <a:lstStyle/>
+          <a:p>
+            <a:pPr algn="ctr" indent="0" marL="0">
+              <a:lnSpc>
+                <a:spcPct val="95000"/>
+              </a:lnSpc>
+              <a:buNone/>
+            </a:pPr>
+            <a:r>
+              <a:rPr lang="en-US" sz="750" dirty="0">
+                <a:solidFill>
+                  <a:srgbClr val="1A2733"/>
+                </a:solidFill>
+                <a:latin typeface="Calibri" pitchFamily="34" charset="0"/>
+                <a:ea typeface="Calibri" pitchFamily="34" charset="-122"/>
+                <a:cs typeface="Calibri" pitchFamily="34" charset="-120"/>
+              </a:rPr>
+              <a:t>Ответ из каталога</a:t>
+            </a:r>
+            <a:endParaRPr lang="en-US" sz="750" dirty="0"/>
+          </a:p>
+        </p:txBody>
+      </p:sp>
+      <p:sp>
+        <p:nvSpPr>
+          <p:cNvPr id="12" name="Text 10"/>
+          <p:cNvSpPr txBox="1"/>
+          <p:nvPr/>
+        </p:nvSpPr>
+        <p:spPr>
+          <a:xfrm rot="-5400000">
+            <a:off x="6299947" y="2155564"/>
+            <a:ext cx="1417320" cy="489473"/>
+          </a:xfrm>
+          <a:prstGeom prst="rect">
+            <a:avLst/>
+          </a:prstGeom>
+          <a:noFill/>
+          <a:ln/>
+        </p:spPr>
+        <p:txBody>
+          <a:bodyPr wrap="square" lIns="0" tIns="0" rIns="0" bIns="0" rtlCol="0" anchor="ctr"/>
+          <a:lstStyle/>
+          <a:p>
+            <a:pPr algn="ctr" indent="0" marL="0">
+              <a:lnSpc>
+                <a:spcPct val="95000"/>
+              </a:lnSpc>
+              <a:buNone/>
+            </a:pPr>
+            <a:r>
+              <a:rPr lang="en-US" sz="750" dirty="0">
+                <a:solidFill>
+                  <a:srgbClr val="1A2733"/>
+                </a:solidFill>
+                <a:latin typeface="Calibri" pitchFamily="34" charset="0"/>
+                <a:ea typeface="Calibri" pitchFamily="34" charset="-122"/>
+                <a:cs typeface="Calibri" pitchFamily="34" charset="-120"/>
+              </a:rPr>
+              <a:t>Экспорт аудита в SIEM</a:t>
+            </a:r>
+            <a:endParaRPr lang="en-US" sz="750" dirty="0"/>
+          </a:p>
+        </p:txBody>
+      </p:sp>
+      <p:sp>
+        <p:nvSpPr>
+          <p:cNvPr id="13" name="Text 11"/>
+          <p:cNvSpPr txBox="1"/>
+          <p:nvPr/>
+        </p:nvSpPr>
+        <p:spPr>
+          <a:xfrm rot="-5400000">
+            <a:off x="6789420" y="2155564"/>
+            <a:ext cx="1417320" cy="489473"/>
+          </a:xfrm>
+          <a:prstGeom prst="rect">
+            <a:avLst/>
+          </a:prstGeom>
+          <a:noFill/>
+          <a:ln/>
+        </p:spPr>
+        <p:txBody>
+          <a:bodyPr wrap="square" lIns="0" tIns="0" rIns="0" bIns="0" rtlCol="0" anchor="ctr"/>
+          <a:lstStyle/>
+          <a:p>
+            <a:pPr algn="ctr" indent="0" marL="0">
+              <a:lnSpc>
+                <a:spcPct val="95000"/>
+              </a:lnSpc>
+              <a:buNone/>
+            </a:pPr>
+            <a:r>
+              <a:rPr lang="en-US" sz="750" dirty="0">
+                <a:solidFill>
+                  <a:srgbClr val="1A2733"/>
+                </a:solidFill>
+                <a:latin typeface="Calibri" pitchFamily="34" charset="0"/>
+                <a:ea typeface="Calibri" pitchFamily="34" charset="-122"/>
+                <a:cs typeface="Calibri" pitchFamily="34" charset="-120"/>
+              </a:rPr>
+              <a:t>Контур подтверждения действий</a:t>
+            </a:r>
+            <a:endParaRPr lang="en-US" sz="750" dirty="0"/>
+          </a:p>
+        </p:txBody>
+      </p:sp>
+      <p:sp>
+        <p:nvSpPr>
+          <p:cNvPr id="14" name="Text 12"/>
+          <p:cNvSpPr txBox="1"/>
+          <p:nvPr/>
+        </p:nvSpPr>
+        <p:spPr>
+          <a:xfrm rot="-5400000">
+            <a:off x="7278893" y="2155564"/>
+            <a:ext cx="1417320" cy="489473"/>
+          </a:xfrm>
+          <a:prstGeom prst="rect">
+            <a:avLst/>
+          </a:prstGeom>
+          <a:noFill/>
+          <a:ln/>
+        </p:spPr>
+        <p:txBody>
+          <a:bodyPr wrap="square" lIns="0" tIns="0" rIns="0" bIns="0" rtlCol="0" anchor="ctr"/>
+          <a:lstStyle/>
+          <a:p>
+            <a:pPr algn="ctr" indent="0" marL="0">
+              <a:lnSpc>
+                <a:spcPct val="95000"/>
+              </a:lnSpc>
+              <a:buNone/>
+            </a:pPr>
+            <a:r>
+              <a:rPr lang="en-US" sz="750" dirty="0">
+                <a:solidFill>
+                  <a:srgbClr val="1A2733"/>
+                </a:solidFill>
+                <a:latin typeface="Calibri" pitchFamily="34" charset="0"/>
+                <a:ea typeface="Calibri" pitchFamily="34" charset="-122"/>
+                <a:cs typeface="Calibri" pitchFamily="34" charset="-120"/>
+              </a:rPr>
+              <a:t>Реестр доступов агентов</a:t>
+            </a:r>
+            <a:endParaRPr lang="en-US" sz="750" dirty="0"/>
+          </a:p>
+        </p:txBody>
+      </p:sp>
+      <p:sp>
+        <p:nvSpPr>
+          <p:cNvPr id="15" name="Text 13"/>
+          <p:cNvSpPr txBox="1"/>
+          <p:nvPr/>
+        </p:nvSpPr>
+        <p:spPr>
+          <a:xfrm rot="-5400000">
+            <a:off x="7768366" y="2155564"/>
+            <a:ext cx="1417320" cy="489473"/>
+          </a:xfrm>
+          <a:prstGeom prst="rect">
+            <a:avLst/>
+          </a:prstGeom>
+          <a:noFill/>
+          <a:ln/>
+        </p:spPr>
+        <p:txBody>
+          <a:bodyPr wrap="square" lIns="0" tIns="0" rIns="0" bIns="0" rtlCol="0" anchor="ctr"/>
+          <a:lstStyle/>
+          <a:p>
+            <a:pPr algn="ctr" indent="0" marL="0">
+              <a:lnSpc>
+                <a:spcPct val="95000"/>
+              </a:lnSpc>
+              <a:buNone/>
+            </a:pPr>
+            <a:r>
+              <a:rPr lang="en-US" sz="750" dirty="0">
+                <a:solidFill>
+                  <a:srgbClr val="1A2733"/>
+                </a:solidFill>
+                <a:latin typeface="Calibri" pitchFamily="34" charset="0"/>
+                <a:ea typeface="Calibri" pitchFamily="34" charset="-122"/>
+                <a:cs typeface="Calibri" pitchFamily="34" charset="-120"/>
+              </a:rPr>
+              <a:t>Политики на почтовые источники</a:t>
+            </a:r>
+            <a:endParaRPr lang="en-US" sz="750" dirty="0"/>
+          </a:p>
+        </p:txBody>
+      </p:sp>
+      <p:sp>
+        <p:nvSpPr>
+          <p:cNvPr id="16" name="Text 14"/>
+          <p:cNvSpPr txBox="1"/>
+          <p:nvPr/>
+        </p:nvSpPr>
+        <p:spPr>
+          <a:xfrm rot="-5400000">
+            <a:off x="8257839" y="2155564"/>
+            <a:ext cx="1417320" cy="489473"/>
+          </a:xfrm>
+          <a:prstGeom prst="rect">
+            <a:avLst/>
+          </a:prstGeom>
+          <a:noFill/>
+          <a:ln/>
+        </p:spPr>
+        <p:txBody>
+          <a:bodyPr wrap="square" lIns="0" tIns="0" rIns="0" bIns="0" rtlCol="0" anchor="ctr"/>
+          <a:lstStyle/>
+          <a:p>
+            <a:pPr algn="ctr" indent="0" marL="0">
+              <a:lnSpc>
+                <a:spcPct val="95000"/>
+              </a:lnSpc>
+              <a:buNone/>
+            </a:pPr>
+            <a:r>
+              <a:rPr lang="en-US" sz="750" dirty="0">
+                <a:solidFill>
+                  <a:srgbClr val="1A2733"/>
+                </a:solidFill>
+                <a:latin typeface="Calibri" pitchFamily="34" charset="0"/>
+                <a:ea typeface="Calibri" pitchFamily="34" charset="-122"/>
+                <a:cs typeface="Calibri" pitchFamily="34" charset="-120"/>
+              </a:rPr>
+              <a:t>Единая оркестрация расчётов</a:t>
+            </a:r>
+            <a:endParaRPr lang="en-US" sz="750" dirty="0"/>
+          </a:p>
+        </p:txBody>
+      </p:sp>
+      <p:sp>
+        <p:nvSpPr>
+          <p:cNvPr id="17" name="Text 15"/>
+          <p:cNvSpPr txBox="1"/>
+          <p:nvPr/>
+        </p:nvSpPr>
+        <p:spPr>
+          <a:xfrm rot="-5400000">
+            <a:off x="8747312" y="2155564"/>
+            <a:ext cx="1417320" cy="489473"/>
+          </a:xfrm>
+          <a:prstGeom prst="rect">
+            <a:avLst/>
+          </a:prstGeom>
+          <a:noFill/>
+          <a:ln/>
+        </p:spPr>
+        <p:txBody>
+          <a:bodyPr wrap="square" lIns="0" tIns="0" rIns="0" bIns="0" rtlCol="0" anchor="ctr"/>
+          <a:lstStyle/>
+          <a:p>
+            <a:pPr algn="ctr" indent="0" marL="0">
+              <a:lnSpc>
+                <a:spcPct val="95000"/>
+              </a:lnSpc>
+              <a:buNone/>
+            </a:pPr>
+            <a:r>
+              <a:rPr lang="en-US" sz="750" dirty="0">
+                <a:solidFill>
+                  <a:srgbClr val="1A2733"/>
+                </a:solidFill>
+                <a:latin typeface="Calibri" pitchFamily="34" charset="0"/>
+                <a:ea typeface="Calibri" pitchFamily="34" charset="-122"/>
+                <a:cs typeface="Calibri" pitchFamily="34" charset="-120"/>
+              </a:rPr>
+              <a:t>Конструктор витрин</a:t>
+            </a:r>
+            <a:endParaRPr lang="en-US" sz="750" dirty="0"/>
+          </a:p>
+        </p:txBody>
+      </p:sp>
+      <p:sp>
+        <p:nvSpPr>
+          <p:cNvPr id="18" name="Text 16"/>
+          <p:cNvSpPr txBox="1"/>
+          <p:nvPr/>
+        </p:nvSpPr>
+        <p:spPr>
+          <a:xfrm rot="-5400000">
+            <a:off x="9236785" y="2155564"/>
+            <a:ext cx="1417320" cy="489473"/>
+          </a:xfrm>
+          <a:prstGeom prst="rect">
+            <a:avLst/>
+          </a:prstGeom>
+          <a:noFill/>
+          <a:ln/>
+        </p:spPr>
+        <p:txBody>
+          <a:bodyPr wrap="square" lIns="0" tIns="0" rIns="0" bIns="0" rtlCol="0" anchor="ctr"/>
+          <a:lstStyle/>
+          <a:p>
+            <a:pPr algn="ctr" indent="0" marL="0">
+              <a:lnSpc>
+                <a:spcPct val="95000"/>
+              </a:lnSpc>
+              <a:buNone/>
+            </a:pPr>
+            <a:r>
+              <a:rPr lang="en-US" sz="750" dirty="0">
+                <a:solidFill>
+                  <a:srgbClr val="1A2733"/>
+                </a:solidFill>
+                <a:latin typeface="Calibri" pitchFamily="34" charset="0"/>
+                <a:ea typeface="Calibri" pitchFamily="34" charset="-122"/>
+                <a:cs typeface="Calibri" pitchFamily="34" charset="-120"/>
+              </a:rPr>
+              <a:t>Внешний шлюз к моделям</a:t>
+            </a:r>
+            <a:endParaRPr lang="en-US" sz="750" dirty="0"/>
+          </a:p>
+        </p:txBody>
+      </p:sp>
+      <p:sp>
+        <p:nvSpPr>
+          <p:cNvPr id="19" name="Text 17"/>
+          <p:cNvSpPr txBox="1"/>
+          <p:nvPr/>
+        </p:nvSpPr>
+        <p:spPr>
+          <a:xfrm rot="-5400000">
+            <a:off x="9726258" y="2155564"/>
+            <a:ext cx="1417320" cy="489473"/>
+          </a:xfrm>
+          <a:prstGeom prst="rect">
+            <a:avLst/>
+          </a:prstGeom>
+          <a:noFill/>
+          <a:ln/>
+        </p:spPr>
+        <p:txBody>
+          <a:bodyPr wrap="square" lIns="0" tIns="0" rIns="0" bIns="0" rtlCol="0" anchor="ctr"/>
+          <a:lstStyle/>
+          <a:p>
+            <a:pPr algn="ctr" indent="0" marL="0">
+              <a:lnSpc>
+                <a:spcPct val="95000"/>
+              </a:lnSpc>
+              <a:buNone/>
+            </a:pPr>
+            <a:r>
+              <a:rPr lang="en-US" sz="750" dirty="0">
+                <a:solidFill>
+                  <a:srgbClr val="1A2733"/>
+                </a:solidFill>
+                <a:latin typeface="Calibri" pitchFamily="34" charset="0"/>
+                <a:ea typeface="Calibri" pitchFamily="34" charset="-122"/>
+                <a:cs typeface="Calibri" pitchFamily="34" charset="-120"/>
+              </a:rPr>
+              <a:t>Совместимость с /v1/responses</a:t>
+            </a:r>
+            <a:endParaRPr lang="en-US" sz="750" dirty="0"/>
+          </a:p>
+        </p:txBody>
+      </p:sp>
+      <p:sp>
+        <p:nvSpPr>
+          <p:cNvPr id="20" name="Text 18"/>
+          <p:cNvSpPr txBox="1"/>
+          <p:nvPr/>
+        </p:nvSpPr>
+        <p:spPr>
+          <a:xfrm rot="-5400000">
+            <a:off x="10215731" y="2155564"/>
+            <a:ext cx="1417320" cy="489473"/>
+          </a:xfrm>
+          <a:prstGeom prst="rect">
+            <a:avLst/>
+          </a:prstGeom>
+          <a:noFill/>
+          <a:ln/>
+        </p:spPr>
+        <p:txBody>
+          <a:bodyPr wrap="square" lIns="0" tIns="0" rIns="0" bIns="0" rtlCol="0" anchor="ctr"/>
+          <a:lstStyle/>
+          <a:p>
+            <a:pPr algn="ctr" indent="0" marL="0">
+              <a:lnSpc>
+                <a:spcPct val="95000"/>
+              </a:lnSpc>
+              <a:buNone/>
+            </a:pPr>
+            <a:r>
+              <a:rPr lang="en-US" sz="750" dirty="0">
+                <a:solidFill>
+                  <a:srgbClr val="1A2733"/>
+                </a:solidFill>
+                <a:latin typeface="Calibri" pitchFamily="34" charset="0"/>
+                <a:ea typeface="Calibri" pitchFamily="34" charset="-122"/>
+                <a:cs typeface="Calibri" pitchFamily="34" charset="-120"/>
+              </a:rPr>
+              <a:t>Секреты и контрольные суммы</a:t>
+            </a:r>
+            <a:endParaRPr lang="en-US" sz="750" dirty="0"/>
+          </a:p>
+        </p:txBody>
+      </p:sp>
+      <p:sp>
+        <p:nvSpPr>
+          <p:cNvPr id="21" name="Text 19"/>
+          <p:cNvSpPr txBox="1"/>
+          <p:nvPr/>
+        </p:nvSpPr>
+        <p:spPr>
+          <a:xfrm rot="-5400000">
+            <a:off x="10705204" y="2155564"/>
+            <a:ext cx="1417320" cy="489473"/>
+          </a:xfrm>
+          <a:prstGeom prst="rect">
+            <a:avLst/>
+          </a:prstGeom>
+          <a:noFill/>
+          <a:ln/>
+        </p:spPr>
+        <p:txBody>
+          <a:bodyPr wrap="square" lIns="0" tIns="0" rIns="0" bIns="0" rtlCol="0" anchor="ctr"/>
+          <a:lstStyle/>
+          <a:p>
+            <a:pPr algn="ctr" indent="0" marL="0">
+              <a:lnSpc>
+                <a:spcPct val="95000"/>
+              </a:lnSpc>
+              <a:buNone/>
+            </a:pPr>
+            <a:r>
+              <a:rPr lang="en-US" sz="750" dirty="0">
+                <a:solidFill>
+                  <a:srgbClr val="1A2733"/>
+                </a:solidFill>
+                <a:latin typeface="Calibri" pitchFamily="34" charset="0"/>
+                <a:ea typeface="Calibri" pitchFamily="34" charset="-122"/>
+                <a:cs typeface="Calibri" pitchFamily="34" charset="-120"/>
+              </a:rPr>
+              <a:t>Провенанс «создано моделью»</a:t>
+            </a:r>
+            <a:endParaRPr lang="en-US" sz="750" dirty="0"/>
+          </a:p>
+        </p:txBody>
+      </p:sp>
+      <p:sp>
+        <p:nvSpPr>
+          <p:cNvPr id="22" name="Shape 20"/>
           <p:cNvSpPr/>
           <p:nvPr/>
         </p:nvSpPr>
         <p:spPr>
           <a:xfrm>
-            <a:off x="502920" y="2606040"/>
+            <a:off x="3337560" y="1691640"/>
+            <a:ext cx="0" cy="4727448"/>
+          </a:xfrm>
+          <a:prstGeom prst="line">
+            <a:avLst/>
+          </a:prstGeom>
+          <a:noFill/>
+          <a:ln w="6350">
+            <a:solidFill>
+              <a:srgbClr val="D8DEE2"/>
+            </a:solidFill>
+            <a:prstDash val="solid"/>
+          </a:ln>
+        </p:spPr>
+      </p:sp>
+      <p:sp>
+        <p:nvSpPr>
+          <p:cNvPr id="23" name="Shape 21"/>
+          <p:cNvSpPr/>
+          <p:nvPr/>
+        </p:nvSpPr>
+        <p:spPr>
+          <a:xfrm>
+            <a:off x="3827033" y="1691640"/>
+            <a:ext cx="0" cy="4727448"/>
+          </a:xfrm>
+          <a:prstGeom prst="line">
+            <a:avLst/>
+          </a:prstGeom>
+          <a:noFill/>
+          <a:ln w="6350">
+            <a:solidFill>
+              <a:srgbClr val="D8DEE2"/>
+            </a:solidFill>
+            <a:prstDash val="solid"/>
+          </a:ln>
+        </p:spPr>
+      </p:sp>
+      <p:sp>
+        <p:nvSpPr>
+          <p:cNvPr id="24" name="Shape 22"/>
+          <p:cNvSpPr/>
+          <p:nvPr/>
+        </p:nvSpPr>
+        <p:spPr>
+          <a:xfrm>
+            <a:off x="4316506" y="1691640"/>
+            <a:ext cx="0" cy="4727448"/>
+          </a:xfrm>
+          <a:prstGeom prst="line">
+            <a:avLst/>
+          </a:prstGeom>
+          <a:noFill/>
+          <a:ln w="6350">
+            <a:solidFill>
+              <a:srgbClr val="D8DEE2"/>
+            </a:solidFill>
+            <a:prstDash val="solid"/>
+          </a:ln>
+        </p:spPr>
+      </p:sp>
+      <p:sp>
+        <p:nvSpPr>
+          <p:cNvPr id="25" name="Shape 23"/>
+          <p:cNvSpPr/>
+          <p:nvPr/>
+        </p:nvSpPr>
+        <p:spPr>
+          <a:xfrm>
+            <a:off x="4805979" y="1691640"/>
+            <a:ext cx="0" cy="4727448"/>
+          </a:xfrm>
+          <a:prstGeom prst="line">
+            <a:avLst/>
+          </a:prstGeom>
+          <a:noFill/>
+          <a:ln w="6350">
+            <a:solidFill>
+              <a:srgbClr val="D8DEE2"/>
+            </a:solidFill>
+            <a:prstDash val="solid"/>
+          </a:ln>
+        </p:spPr>
+      </p:sp>
+      <p:sp>
+        <p:nvSpPr>
+          <p:cNvPr id="26" name="Shape 24"/>
+          <p:cNvSpPr/>
+          <p:nvPr/>
+        </p:nvSpPr>
+        <p:spPr>
+          <a:xfrm>
+            <a:off x="5295452" y="1691640"/>
+            <a:ext cx="0" cy="4727448"/>
+          </a:xfrm>
+          <a:prstGeom prst="line">
+            <a:avLst/>
+          </a:prstGeom>
+          <a:noFill/>
+          <a:ln w="6350">
+            <a:solidFill>
+              <a:srgbClr val="D8DEE2"/>
+            </a:solidFill>
+            <a:prstDash val="solid"/>
+          </a:ln>
+        </p:spPr>
+      </p:sp>
+      <p:sp>
+        <p:nvSpPr>
+          <p:cNvPr id="27" name="Shape 25"/>
+          <p:cNvSpPr/>
+          <p:nvPr/>
+        </p:nvSpPr>
+        <p:spPr>
+          <a:xfrm>
+            <a:off x="5784925" y="1691640"/>
+            <a:ext cx="0" cy="4727448"/>
+          </a:xfrm>
+          <a:prstGeom prst="line">
+            <a:avLst/>
+          </a:prstGeom>
+          <a:noFill/>
+          <a:ln w="6350">
+            <a:solidFill>
+              <a:srgbClr val="D8DEE2"/>
+            </a:solidFill>
+            <a:prstDash val="solid"/>
+          </a:ln>
+        </p:spPr>
+      </p:sp>
+      <p:sp>
+        <p:nvSpPr>
+          <p:cNvPr id="28" name="Shape 26"/>
+          <p:cNvSpPr/>
+          <p:nvPr/>
+        </p:nvSpPr>
+        <p:spPr>
+          <a:xfrm>
+            <a:off x="6274398" y="1691640"/>
+            <a:ext cx="0" cy="4727448"/>
+          </a:xfrm>
+          <a:prstGeom prst="line">
+            <a:avLst/>
+          </a:prstGeom>
+          <a:noFill/>
+          <a:ln w="6350">
+            <a:solidFill>
+              <a:srgbClr val="D8DEE2"/>
+            </a:solidFill>
+            <a:prstDash val="solid"/>
+          </a:ln>
+        </p:spPr>
+      </p:sp>
+      <p:sp>
+        <p:nvSpPr>
+          <p:cNvPr id="29" name="Shape 27"/>
+          <p:cNvSpPr/>
+          <p:nvPr/>
+        </p:nvSpPr>
+        <p:spPr>
+          <a:xfrm>
+            <a:off x="6763871" y="1691640"/>
+            <a:ext cx="0" cy="4727448"/>
+          </a:xfrm>
+          <a:prstGeom prst="line">
+            <a:avLst/>
+          </a:prstGeom>
+          <a:noFill/>
+          <a:ln w="6350">
+            <a:solidFill>
+              <a:srgbClr val="D8DEE2"/>
+            </a:solidFill>
+            <a:prstDash val="solid"/>
+          </a:ln>
+        </p:spPr>
+      </p:sp>
+      <p:sp>
+        <p:nvSpPr>
+          <p:cNvPr id="30" name="Shape 28"/>
+          <p:cNvSpPr/>
+          <p:nvPr/>
+        </p:nvSpPr>
+        <p:spPr>
+          <a:xfrm>
+            <a:off x="7253344" y="1691640"/>
+            <a:ext cx="0" cy="4727448"/>
+          </a:xfrm>
+          <a:prstGeom prst="line">
+            <a:avLst/>
+          </a:prstGeom>
+          <a:noFill/>
+          <a:ln w="6350">
+            <a:solidFill>
+              <a:srgbClr val="D8DEE2"/>
+            </a:solidFill>
+            <a:prstDash val="solid"/>
+          </a:ln>
+        </p:spPr>
+      </p:sp>
+      <p:sp>
+        <p:nvSpPr>
+          <p:cNvPr id="31" name="Shape 29"/>
+          <p:cNvSpPr/>
+          <p:nvPr/>
+        </p:nvSpPr>
+        <p:spPr>
+          <a:xfrm>
+            <a:off x="7742816" y="1691640"/>
+            <a:ext cx="0" cy="4727448"/>
+          </a:xfrm>
+          <a:prstGeom prst="line">
+            <a:avLst/>
+          </a:prstGeom>
+          <a:noFill/>
+          <a:ln w="6350">
+            <a:solidFill>
+              <a:srgbClr val="D8DEE2"/>
+            </a:solidFill>
+            <a:prstDash val="solid"/>
+          </a:ln>
+        </p:spPr>
+      </p:sp>
+      <p:sp>
+        <p:nvSpPr>
+          <p:cNvPr id="32" name="Shape 30"/>
+          <p:cNvSpPr/>
+          <p:nvPr/>
+        </p:nvSpPr>
+        <p:spPr>
+          <a:xfrm>
+            <a:off x="8232289" y="1691640"/>
+            <a:ext cx="0" cy="4727448"/>
+          </a:xfrm>
+          <a:prstGeom prst="line">
+            <a:avLst/>
+          </a:prstGeom>
+          <a:noFill/>
+          <a:ln w="6350">
+            <a:solidFill>
+              <a:srgbClr val="D8DEE2"/>
+            </a:solidFill>
+            <a:prstDash val="solid"/>
+          </a:ln>
+        </p:spPr>
+      </p:sp>
+      <p:sp>
+        <p:nvSpPr>
+          <p:cNvPr id="33" name="Shape 31"/>
+          <p:cNvSpPr/>
+          <p:nvPr/>
+        </p:nvSpPr>
+        <p:spPr>
+          <a:xfrm>
+            <a:off x="8721762" y="1691640"/>
+            <a:ext cx="0" cy="4727448"/>
+          </a:xfrm>
+          <a:prstGeom prst="line">
+            <a:avLst/>
+          </a:prstGeom>
+          <a:noFill/>
+          <a:ln w="6350">
+            <a:solidFill>
+              <a:srgbClr val="D8DEE2"/>
+            </a:solidFill>
+            <a:prstDash val="solid"/>
+          </a:ln>
+        </p:spPr>
+      </p:sp>
+      <p:sp>
+        <p:nvSpPr>
+          <p:cNvPr id="34" name="Shape 32"/>
+          <p:cNvSpPr/>
+          <p:nvPr/>
+        </p:nvSpPr>
+        <p:spPr>
+          <a:xfrm>
+            <a:off x="9211235" y="1691640"/>
+            <a:ext cx="0" cy="4727448"/>
+          </a:xfrm>
+          <a:prstGeom prst="line">
+            <a:avLst/>
+          </a:prstGeom>
+          <a:noFill/>
+          <a:ln w="6350">
+            <a:solidFill>
+              <a:srgbClr val="D8DEE2"/>
+            </a:solidFill>
+            <a:prstDash val="solid"/>
+          </a:ln>
+        </p:spPr>
+      </p:sp>
+      <p:sp>
+        <p:nvSpPr>
+          <p:cNvPr id="35" name="Shape 33"/>
+          <p:cNvSpPr/>
+          <p:nvPr/>
+        </p:nvSpPr>
+        <p:spPr>
+          <a:xfrm>
+            <a:off x="9700708" y="1691640"/>
+            <a:ext cx="0" cy="4727448"/>
+          </a:xfrm>
+          <a:prstGeom prst="line">
+            <a:avLst/>
+          </a:prstGeom>
+          <a:noFill/>
+          <a:ln w="6350">
+            <a:solidFill>
+              <a:srgbClr val="D8DEE2"/>
+            </a:solidFill>
+            <a:prstDash val="solid"/>
+          </a:ln>
+        </p:spPr>
+      </p:sp>
+      <p:sp>
+        <p:nvSpPr>
+          <p:cNvPr id="36" name="Shape 34"/>
+          <p:cNvSpPr/>
+          <p:nvPr/>
+        </p:nvSpPr>
+        <p:spPr>
+          <a:xfrm>
+            <a:off x="10190181" y="1691640"/>
+            <a:ext cx="0" cy="4727448"/>
+          </a:xfrm>
+          <a:prstGeom prst="line">
+            <a:avLst/>
+          </a:prstGeom>
+          <a:noFill/>
+          <a:ln w="6350">
+            <a:solidFill>
+              <a:srgbClr val="D8DEE2"/>
+            </a:solidFill>
+            <a:prstDash val="solid"/>
+          </a:ln>
+        </p:spPr>
+      </p:sp>
+      <p:sp>
+        <p:nvSpPr>
+          <p:cNvPr id="37" name="Shape 35"/>
+          <p:cNvSpPr/>
+          <p:nvPr/>
+        </p:nvSpPr>
+        <p:spPr>
+          <a:xfrm>
+            <a:off x="10679654" y="1691640"/>
+            <a:ext cx="0" cy="4727448"/>
+          </a:xfrm>
+          <a:prstGeom prst="line">
+            <a:avLst/>
+          </a:prstGeom>
+          <a:noFill/>
+          <a:ln w="6350">
+            <a:solidFill>
+              <a:srgbClr val="D8DEE2"/>
+            </a:solidFill>
+            <a:prstDash val="solid"/>
+          </a:ln>
+        </p:spPr>
+      </p:sp>
+      <p:sp>
+        <p:nvSpPr>
+          <p:cNvPr id="38" name="Shape 36"/>
+          <p:cNvSpPr/>
+          <p:nvPr/>
+        </p:nvSpPr>
+        <p:spPr>
+          <a:xfrm>
+            <a:off x="11169127" y="1691640"/>
+            <a:ext cx="0" cy="4727448"/>
+          </a:xfrm>
+          <a:prstGeom prst="line">
+            <a:avLst/>
+          </a:prstGeom>
+          <a:noFill/>
+          <a:ln w="6350">
+            <a:solidFill>
+              <a:srgbClr val="D8DEE2"/>
+            </a:solidFill>
+            <a:prstDash val="solid"/>
+          </a:ln>
+        </p:spPr>
+      </p:sp>
+      <p:sp>
+        <p:nvSpPr>
+          <p:cNvPr id="39" name="Shape 37"/>
+          <p:cNvSpPr/>
+          <p:nvPr/>
+        </p:nvSpPr>
+        <p:spPr>
+          <a:xfrm>
+            <a:off x="11658600" y="1691640"/>
+            <a:ext cx="0" cy="4727448"/>
+          </a:xfrm>
+          <a:prstGeom prst="line">
+            <a:avLst/>
+          </a:prstGeom>
+          <a:noFill/>
+          <a:ln w="6350">
+            <a:solidFill>
+              <a:srgbClr val="D8DEE2"/>
+            </a:solidFill>
+            <a:prstDash val="solid"/>
+          </a:ln>
+        </p:spPr>
+      </p:sp>
+      <p:sp>
+        <p:nvSpPr>
+          <p:cNvPr id="40" name="Shape 38"/>
+          <p:cNvSpPr/>
+          <p:nvPr/>
+        </p:nvSpPr>
+        <p:spPr>
+          <a:xfrm>
+            <a:off x="502920" y="3108960"/>
             <a:ext cx="11155680" cy="0"/>
           </a:xfrm>
           <a:prstGeom prst="line">
@@ -5205,104 +5576,20 @@
       </p:sp>
       <p:sp>
         <p:nvSpPr>
-          <p:cNvPr id="8" name="Text 6"/>
-          <p:cNvSpPr txBox="1"/>
-          <p:nvPr/>
-        </p:nvSpPr>
-        <p:spPr>
-          <a:xfrm>
-            <a:off x="502920" y="2697480"/>
-            <a:ext cx="11155680" cy="512064"/>
-          </a:xfrm>
-          <a:prstGeom prst="rect">
-            <a:avLst/>
-          </a:prstGeom>
-          <a:noFill/>
-          <a:ln/>
-        </p:spPr>
-        <p:txBody>
-          <a:bodyPr wrap="square" lIns="0" tIns="0" rIns="0" bIns="0" rtlCol="0" anchor="t"/>
-          <a:lstStyle/>
-          <a:p>
-            <a:pPr indent="0" marL="0">
-              <a:lnSpc>
-                <a:spcPct val="105000"/>
-              </a:lnSpc>
-              <a:buNone/>
-            </a:pPr>
-            <a:r>
-              <a:rPr lang="en-US" sz="1300" b="1" dirty="0">
-                <a:solidFill>
-                  <a:srgbClr val="1A2733"/>
-                </a:solidFill>
-                <a:latin typeface="Calibri" pitchFamily="34" charset="0"/>
-                <a:ea typeface="Calibri" pitchFamily="34" charset="-122"/>
-                <a:cs typeface="Calibri" pitchFamily="34" charset="-120"/>
-              </a:rPr>
-              <a:t>Как строится ценообразование — за пользователя, за объём данных, фиксированная стоимость?</a:t>
-            </a:r>
-            <a:endParaRPr lang="en-US" sz="1300" dirty="0"/>
-          </a:p>
-        </p:txBody>
-      </p:sp>
-      <p:sp>
-        <p:nvSpPr>
-          <p:cNvPr id="9" name="Text 7"/>
-          <p:cNvSpPr txBox="1"/>
-          <p:nvPr/>
-        </p:nvSpPr>
-        <p:spPr>
-          <a:xfrm>
-            <a:off x="502920" y="3182112"/>
-            <a:ext cx="11155680" cy="292608"/>
-          </a:xfrm>
-          <a:prstGeom prst="rect">
-            <a:avLst/>
-          </a:prstGeom>
-          <a:noFill/>
-          <a:ln/>
-        </p:spPr>
-        <p:txBody>
-          <a:bodyPr wrap="square" lIns="0" tIns="0" rIns="0" bIns="0" rtlCol="0" anchor="t"/>
-          <a:lstStyle/>
-          <a:p>
-            <a:pPr indent="0" marL="0">
-              <a:lnSpc>
-                <a:spcPct val="102000"/>
-              </a:lnSpc>
-              <a:buNone/>
-            </a:pPr>
-            <a:r>
-              <a:rPr lang="en-US" sz="1050" i="1" dirty="0">
-                <a:solidFill>
-                  <a:srgbClr val="5B6B7A"/>
-                </a:solidFill>
-                <a:latin typeface="Calibri" pitchFamily="34" charset="0"/>
-                <a:ea typeface="Calibri" pitchFamily="34" charset="-122"/>
-                <a:cs typeface="Calibri" pitchFamily="34" charset="-120"/>
-              </a:rPr>
-              <a:t>Модель цены конкурента — для сравнения с нашей.</a:t>
-            </a:r>
-            <a:endParaRPr lang="en-US" sz="1050" dirty="0"/>
-          </a:p>
-        </p:txBody>
-      </p:sp>
-      <p:sp>
-        <p:nvSpPr>
-          <p:cNvPr id="10" name="Shape 8"/>
+          <p:cNvPr id="41" name="Shape 39"/>
           <p:cNvSpPr/>
           <p:nvPr/>
         </p:nvSpPr>
         <p:spPr>
           <a:xfrm>
-            <a:off x="502920" y="3520440"/>
+            <a:off x="502920" y="3108960"/>
             <a:ext cx="11155680" cy="0"/>
           </a:xfrm>
           <a:prstGeom prst="line">
             <a:avLst/>
           </a:prstGeom>
           <a:noFill/>
-          <a:ln w="9525">
+          <a:ln w="6350">
             <a:solidFill>
               <a:srgbClr val="D8DEE2"/>
             </a:solidFill>
@@ -5312,33 +5599,332 @@
       </p:sp>
       <p:sp>
         <p:nvSpPr>
-          <p:cNvPr id="11" name="Text 9"/>
-          <p:cNvSpPr txBox="1"/>
-          <p:nvPr/>
-        </p:nvSpPr>
-        <p:spPr>
-          <a:xfrm>
-            <a:off x="502920" y="3611880"/>
-            <a:ext cx="11155680" cy="512064"/>
-          </a:xfrm>
-          <a:prstGeom prst="rect">
-            <a:avLst/>
-          </a:prstGeom>
-          <a:noFill/>
-          <a:ln/>
-        </p:spPr>
-        <p:txBody>
-          <a:bodyPr wrap="square" lIns="0" tIns="0" rIns="0" bIns="0" rtlCol="0" anchor="t"/>
+          <p:cNvPr id="42" name="Shape 40"/>
+          <p:cNvSpPr/>
+          <p:nvPr/>
+        </p:nvSpPr>
+        <p:spPr>
+          <a:xfrm>
+            <a:off x="502920" y="3363585"/>
+            <a:ext cx="11155680" cy="0"/>
+          </a:xfrm>
+          <a:prstGeom prst="line">
+            <a:avLst/>
+          </a:prstGeom>
+          <a:noFill/>
+          <a:ln w="6350">
+            <a:solidFill>
+              <a:srgbClr val="D8DEE2"/>
+            </a:solidFill>
+            <a:prstDash val="solid"/>
+          </a:ln>
+        </p:spPr>
+      </p:sp>
+      <p:sp>
+        <p:nvSpPr>
+          <p:cNvPr id="43" name="Shape 41"/>
+          <p:cNvSpPr/>
+          <p:nvPr/>
+        </p:nvSpPr>
+        <p:spPr>
+          <a:xfrm>
+            <a:off x="502920" y="3618210"/>
+            <a:ext cx="11155680" cy="0"/>
+          </a:xfrm>
+          <a:prstGeom prst="line">
+            <a:avLst/>
+          </a:prstGeom>
+          <a:noFill/>
+          <a:ln w="6350">
+            <a:solidFill>
+              <a:srgbClr val="D8DEE2"/>
+            </a:solidFill>
+            <a:prstDash val="solid"/>
+          </a:ln>
+        </p:spPr>
+      </p:sp>
+      <p:sp>
+        <p:nvSpPr>
+          <p:cNvPr id="44" name="Shape 42"/>
+          <p:cNvSpPr/>
+          <p:nvPr/>
+        </p:nvSpPr>
+        <p:spPr>
+          <a:xfrm>
+            <a:off x="502920" y="3872836"/>
+            <a:ext cx="11155680" cy="0"/>
+          </a:xfrm>
+          <a:prstGeom prst="line">
+            <a:avLst/>
+          </a:prstGeom>
+          <a:noFill/>
+          <a:ln w="6350">
+            <a:solidFill>
+              <a:srgbClr val="D8DEE2"/>
+            </a:solidFill>
+            <a:prstDash val="solid"/>
+          </a:ln>
+        </p:spPr>
+      </p:sp>
+      <p:sp>
+        <p:nvSpPr>
+          <p:cNvPr id="45" name="Shape 43"/>
+          <p:cNvSpPr/>
+          <p:nvPr/>
+        </p:nvSpPr>
+        <p:spPr>
+          <a:xfrm>
+            <a:off x="502920" y="4127461"/>
+            <a:ext cx="11155680" cy="0"/>
+          </a:xfrm>
+          <a:prstGeom prst="line">
+            <a:avLst/>
+          </a:prstGeom>
+          <a:noFill/>
+          <a:ln w="6350">
+            <a:solidFill>
+              <a:srgbClr val="D8DEE2"/>
+            </a:solidFill>
+            <a:prstDash val="solid"/>
+          </a:ln>
+        </p:spPr>
+      </p:sp>
+      <p:sp>
+        <p:nvSpPr>
+          <p:cNvPr id="46" name="Shape 44"/>
+          <p:cNvSpPr/>
+          <p:nvPr/>
+        </p:nvSpPr>
+        <p:spPr>
+          <a:xfrm>
+            <a:off x="502920" y="4382086"/>
+            <a:ext cx="11155680" cy="0"/>
+          </a:xfrm>
+          <a:prstGeom prst="line">
+            <a:avLst/>
+          </a:prstGeom>
+          <a:noFill/>
+          <a:ln w="6350">
+            <a:solidFill>
+              <a:srgbClr val="D8DEE2"/>
+            </a:solidFill>
+            <a:prstDash val="solid"/>
+          </a:ln>
+        </p:spPr>
+      </p:sp>
+      <p:sp>
+        <p:nvSpPr>
+          <p:cNvPr id="47" name="Shape 45"/>
+          <p:cNvSpPr/>
+          <p:nvPr/>
+        </p:nvSpPr>
+        <p:spPr>
+          <a:xfrm>
+            <a:off x="502920" y="4636711"/>
+            <a:ext cx="11155680" cy="0"/>
+          </a:xfrm>
+          <a:prstGeom prst="line">
+            <a:avLst/>
+          </a:prstGeom>
+          <a:noFill/>
+          <a:ln w="6350">
+            <a:solidFill>
+              <a:srgbClr val="D8DEE2"/>
+            </a:solidFill>
+            <a:prstDash val="solid"/>
+          </a:ln>
+        </p:spPr>
+      </p:sp>
+      <p:sp>
+        <p:nvSpPr>
+          <p:cNvPr id="48" name="Shape 46"/>
+          <p:cNvSpPr/>
+          <p:nvPr/>
+        </p:nvSpPr>
+        <p:spPr>
+          <a:xfrm>
+            <a:off x="502920" y="4891337"/>
+            <a:ext cx="11155680" cy="0"/>
+          </a:xfrm>
+          <a:prstGeom prst="line">
+            <a:avLst/>
+          </a:prstGeom>
+          <a:noFill/>
+          <a:ln w="6350">
+            <a:solidFill>
+              <a:srgbClr val="D8DEE2"/>
+            </a:solidFill>
+            <a:prstDash val="solid"/>
+          </a:ln>
+        </p:spPr>
+      </p:sp>
+      <p:sp>
+        <p:nvSpPr>
+          <p:cNvPr id="49" name="Shape 47"/>
+          <p:cNvSpPr/>
+          <p:nvPr/>
+        </p:nvSpPr>
+        <p:spPr>
+          <a:xfrm>
+            <a:off x="502920" y="5145962"/>
+            <a:ext cx="11155680" cy="0"/>
+          </a:xfrm>
+          <a:prstGeom prst="line">
+            <a:avLst/>
+          </a:prstGeom>
+          <a:noFill/>
+          <a:ln w="6350">
+            <a:solidFill>
+              <a:srgbClr val="D8DEE2"/>
+            </a:solidFill>
+            <a:prstDash val="solid"/>
+          </a:ln>
+        </p:spPr>
+      </p:sp>
+      <p:sp>
+        <p:nvSpPr>
+          <p:cNvPr id="50" name="Shape 48"/>
+          <p:cNvSpPr/>
+          <p:nvPr/>
+        </p:nvSpPr>
+        <p:spPr>
+          <a:xfrm>
+            <a:off x="502920" y="5400587"/>
+            <a:ext cx="11155680" cy="0"/>
+          </a:xfrm>
+          <a:prstGeom prst="line">
+            <a:avLst/>
+          </a:prstGeom>
+          <a:noFill/>
+          <a:ln w="6350">
+            <a:solidFill>
+              <a:srgbClr val="D8DEE2"/>
+            </a:solidFill>
+            <a:prstDash val="solid"/>
+          </a:ln>
+        </p:spPr>
+      </p:sp>
+      <p:sp>
+        <p:nvSpPr>
+          <p:cNvPr id="51" name="Shape 49"/>
+          <p:cNvSpPr/>
+          <p:nvPr/>
+        </p:nvSpPr>
+        <p:spPr>
+          <a:xfrm>
+            <a:off x="502920" y="5655212"/>
+            <a:ext cx="11155680" cy="0"/>
+          </a:xfrm>
+          <a:prstGeom prst="line">
+            <a:avLst/>
+          </a:prstGeom>
+          <a:noFill/>
+          <a:ln w="6350">
+            <a:solidFill>
+              <a:srgbClr val="D8DEE2"/>
+            </a:solidFill>
+            <a:prstDash val="solid"/>
+          </a:ln>
+        </p:spPr>
+      </p:sp>
+      <p:sp>
+        <p:nvSpPr>
+          <p:cNvPr id="52" name="Shape 50"/>
+          <p:cNvSpPr/>
+          <p:nvPr/>
+        </p:nvSpPr>
+        <p:spPr>
+          <a:xfrm>
+            <a:off x="502920" y="5909838"/>
+            <a:ext cx="11155680" cy="0"/>
+          </a:xfrm>
+          <a:prstGeom prst="line">
+            <a:avLst/>
+          </a:prstGeom>
+          <a:noFill/>
+          <a:ln w="6350">
+            <a:solidFill>
+              <a:srgbClr val="D8DEE2"/>
+            </a:solidFill>
+            <a:prstDash val="solid"/>
+          </a:ln>
+        </p:spPr>
+      </p:sp>
+      <p:sp>
+        <p:nvSpPr>
+          <p:cNvPr id="53" name="Shape 51"/>
+          <p:cNvSpPr/>
+          <p:nvPr/>
+        </p:nvSpPr>
+        <p:spPr>
+          <a:xfrm>
+            <a:off x="502920" y="6164463"/>
+            <a:ext cx="11155680" cy="0"/>
+          </a:xfrm>
+          <a:prstGeom prst="line">
+            <a:avLst/>
+          </a:prstGeom>
+          <a:noFill/>
+          <a:ln w="6350">
+            <a:solidFill>
+              <a:srgbClr val="D8DEE2"/>
+            </a:solidFill>
+            <a:prstDash val="solid"/>
+          </a:ln>
+        </p:spPr>
+      </p:sp>
+      <p:sp>
+        <p:nvSpPr>
+          <p:cNvPr id="54" name="Shape 52"/>
+          <p:cNvSpPr/>
+          <p:nvPr/>
+        </p:nvSpPr>
+        <p:spPr>
+          <a:xfrm>
+            <a:off x="502920" y="6419088"/>
+            <a:ext cx="11155680" cy="0"/>
+          </a:xfrm>
+          <a:prstGeom prst="line">
+            <a:avLst/>
+          </a:prstGeom>
+          <a:noFill/>
+          <a:ln w="6350">
+            <a:solidFill>
+              <a:srgbClr val="D8DEE2"/>
+            </a:solidFill>
+            <a:prstDash val="solid"/>
+          </a:ln>
+        </p:spPr>
+      </p:sp>
+      <p:sp>
+        <p:nvSpPr>
+          <p:cNvPr id="55" name="Text 53"/>
+          <p:cNvSpPr txBox="1"/>
+          <p:nvPr/>
+        </p:nvSpPr>
+        <p:spPr>
+          <a:xfrm>
+            <a:off x="576072" y="3108960"/>
+            <a:ext cx="2688336" cy="254625"/>
+          </a:xfrm>
+          <a:prstGeom prst="rect">
+            <a:avLst/>
+          </a:prstGeom>
+          <a:noFill/>
+          <a:ln/>
+        </p:spPr>
+        <p:txBody>
+          <a:bodyPr wrap="square" lIns="0" tIns="0" rIns="0" bIns="0" rtlCol="0" anchor="ctr"/>
           <a:lstStyle/>
           <a:p>
             <a:pPr indent="0" marL="0">
               <a:lnSpc>
-                <a:spcPct val="105000"/>
+                <a:spcPct val="95000"/>
               </a:lnSpc>
               <a:buNone/>
             </a:pPr>
             <a:r>
-              <a:rPr lang="en-US" sz="1300" b="1" dirty="0">
+              <a:rPr lang="en-US" sz="900" dirty="0">
                 <a:solidFill>
                   <a:srgbClr val="1A2733"/>
                 </a:solidFill>
@@ -5346,57 +5932,1221 @@
                 <a:ea typeface="Calibri" pitchFamily="34" charset="-122"/>
                 <a:cs typeface="Calibri" pitchFamily="34" charset="-120"/>
               </a:rPr>
-              <a:t>Есть ли у вас клиенты в нашей отрасли, на которых можно посмотреть референс?</a:t>
-            </a:r>
-            <a:endParaRPr lang="en-US" sz="1300" dirty="0"/>
-          </a:p>
-        </p:txBody>
-      </p:sp>
-      <p:sp>
-        <p:nvSpPr>
-          <p:cNvPr id="12" name="Text 10"/>
-          <p:cNvSpPr txBox="1"/>
-          <p:nvPr/>
-        </p:nvSpPr>
-        <p:spPr>
-          <a:xfrm>
-            <a:off x="502920" y="4096512"/>
-            <a:ext cx="11155680" cy="292608"/>
-          </a:xfrm>
-          <a:prstGeom prst="rect">
-            <a:avLst/>
-          </a:prstGeom>
-          <a:noFill/>
-          <a:ln/>
-        </p:spPr>
-        <p:txBody>
-          <a:bodyPr wrap="square" lIns="0" tIns="0" rIns="0" bIns="0" rtlCol="0" anchor="t"/>
+              <a:t>Маскирование персональных данных?</a:t>
+            </a:r>
+            <a:endParaRPr lang="en-US" sz="900" dirty="0"/>
+          </a:p>
+        </p:txBody>
+      </p:sp>
+      <p:sp>
+        <p:nvSpPr>
+          <p:cNvPr id="56" name="Text 54"/>
+          <p:cNvSpPr txBox="1"/>
+          <p:nvPr/>
+        </p:nvSpPr>
+        <p:spPr>
+          <a:xfrm>
+            <a:off x="3337560" y="3108960"/>
+            <a:ext cx="489473" cy="254625"/>
+          </a:xfrm>
+          <a:prstGeom prst="rect">
+            <a:avLst/>
+          </a:prstGeom>
+          <a:noFill/>
+          <a:ln/>
+        </p:spPr>
+        <p:txBody>
+          <a:bodyPr wrap="square" lIns="0" tIns="0" rIns="0" bIns="0" rtlCol="0" anchor="ctr"/>
+          <a:lstStyle/>
+          <a:p>
+            <a:pPr algn="ctr" indent="0" marL="0">
+              <a:buNone/>
+            </a:pPr>
+            <a:r>
+              <a:rPr lang="en-US" sz="1100" b="1" dirty="0">
+                <a:solidFill>
+                  <a:srgbClr val="1E7B4D"/>
+                </a:solidFill>
+                <a:latin typeface="Calibri" pitchFamily="34" charset="0"/>
+                <a:ea typeface="Calibri" pitchFamily="34" charset="-122"/>
+                <a:cs typeface="Calibri" pitchFamily="34" charset="-120"/>
+              </a:rPr>
+              <a:t>X</a:t>
+            </a:r>
+            <a:endParaRPr lang="en-US" sz="1100" dirty="0"/>
+          </a:p>
+        </p:txBody>
+      </p:sp>
+      <p:sp>
+        <p:nvSpPr>
+          <p:cNvPr id="57" name="Text 55"/>
+          <p:cNvSpPr txBox="1"/>
+          <p:nvPr/>
+        </p:nvSpPr>
+        <p:spPr>
+          <a:xfrm>
+            <a:off x="576072" y="3363585"/>
+            <a:ext cx="2688336" cy="254625"/>
+          </a:xfrm>
+          <a:prstGeom prst="rect">
+            <a:avLst/>
+          </a:prstGeom>
+          <a:noFill/>
+          <a:ln/>
+        </p:spPr>
+        <p:txBody>
+          <a:bodyPr wrap="square" lIns="0" tIns="0" rIns="0" bIns="0" rtlCol="0" anchor="ctr"/>
           <a:lstStyle/>
           <a:p>
             <a:pPr indent="0" marL="0">
               <a:lnSpc>
-                <a:spcPct val="102000"/>
+                <a:spcPct val="95000"/>
               </a:lnSpc>
               <a:buNone/>
             </a:pPr>
             <a:r>
-              <a:rPr lang="en-US" sz="1050" i="1" dirty="0">
-                <a:solidFill>
-                  <a:srgbClr val="5B6B7A"/>
-                </a:solidFill>
-                <a:latin typeface="Calibri" pitchFamily="34" charset="0"/>
-                <a:ea typeface="Calibri" pitchFamily="34" charset="-122"/>
-                <a:cs typeface="Calibri" pitchFamily="34" charset="-120"/>
-              </a:rPr>
-              <a:t>Отраслевой опыт конкурента.</a:t>
-            </a:r>
-            <a:endParaRPr lang="en-US" sz="1050" dirty="0"/>
-          </a:p>
-        </p:txBody>
-      </p:sp>
-      <p:sp>
-        <p:nvSpPr>
-          <p:cNvPr id="13" name="Text 11"/>
+              <a:rPr lang="en-US" sz="900" dirty="0">
+                <a:solidFill>
+                  <a:srgbClr val="1A2733"/>
+                </a:solidFill>
+                <a:latin typeface="Calibri" pitchFamily="34" charset="0"/>
+                <a:ea typeface="Calibri" pitchFamily="34" charset="-122"/>
+                <a:cs typeface="Calibri" pitchFamily="34" charset="-120"/>
+              </a:rPr>
+              <a:t>Закрытый контур без интернета?</a:t>
+            </a:r>
+            <a:endParaRPr lang="en-US" sz="900" dirty="0"/>
+          </a:p>
+        </p:txBody>
+      </p:sp>
+      <p:sp>
+        <p:nvSpPr>
+          <p:cNvPr id="58" name="Text 56"/>
+          <p:cNvSpPr txBox="1"/>
+          <p:nvPr/>
+        </p:nvSpPr>
+        <p:spPr>
+          <a:xfrm>
+            <a:off x="3827033" y="3363585"/>
+            <a:ext cx="489473" cy="254625"/>
+          </a:xfrm>
+          <a:prstGeom prst="rect">
+            <a:avLst/>
+          </a:prstGeom>
+          <a:noFill/>
+          <a:ln/>
+        </p:spPr>
+        <p:txBody>
+          <a:bodyPr wrap="square" lIns="0" tIns="0" rIns="0" bIns="0" rtlCol="0" anchor="ctr"/>
+          <a:lstStyle/>
+          <a:p>
+            <a:pPr algn="ctr" indent="0" marL="0">
+              <a:buNone/>
+            </a:pPr>
+            <a:r>
+              <a:rPr lang="en-US" sz="1100" b="1" dirty="0">
+                <a:solidFill>
+                  <a:srgbClr val="1E7B4D"/>
+                </a:solidFill>
+                <a:latin typeface="Calibri" pitchFamily="34" charset="0"/>
+                <a:ea typeface="Calibri" pitchFamily="34" charset="-122"/>
+                <a:cs typeface="Calibri" pitchFamily="34" charset="-120"/>
+              </a:rPr>
+              <a:t>X</a:t>
+            </a:r>
+            <a:endParaRPr lang="en-US" sz="1100" dirty="0"/>
+          </a:p>
+        </p:txBody>
+      </p:sp>
+      <p:sp>
+        <p:nvSpPr>
+          <p:cNvPr id="59" name="Text 57"/>
+          <p:cNvSpPr txBox="1"/>
+          <p:nvPr/>
+        </p:nvSpPr>
+        <p:spPr>
+          <a:xfrm>
+            <a:off x="4316506" y="3363585"/>
+            <a:ext cx="489473" cy="254625"/>
+          </a:xfrm>
+          <a:prstGeom prst="rect">
+            <a:avLst/>
+          </a:prstGeom>
+          <a:noFill/>
+          <a:ln/>
+        </p:spPr>
+        <p:txBody>
+          <a:bodyPr wrap="square" lIns="0" tIns="0" rIns="0" bIns="0" rtlCol="0" anchor="ctr"/>
+          <a:lstStyle/>
+          <a:p>
+            <a:pPr algn="ctr" indent="0" marL="0">
+              <a:buNone/>
+            </a:pPr>
+            <a:r>
+              <a:rPr lang="en-US" sz="1100" b="1" dirty="0">
+                <a:solidFill>
+                  <a:srgbClr val="C97A1A"/>
+                </a:solidFill>
+                <a:latin typeface="Calibri" pitchFamily="34" charset="0"/>
+                <a:ea typeface="Calibri" pitchFamily="34" charset="-122"/>
+                <a:cs typeface="Calibri" pitchFamily="34" charset="-120"/>
+              </a:rPr>
+              <a:t>~</a:t>
+            </a:r>
+            <a:endParaRPr lang="en-US" sz="1100" dirty="0"/>
+          </a:p>
+        </p:txBody>
+      </p:sp>
+      <p:sp>
+        <p:nvSpPr>
+          <p:cNvPr id="60" name="Text 58"/>
+          <p:cNvSpPr txBox="1"/>
+          <p:nvPr/>
+        </p:nvSpPr>
+        <p:spPr>
+          <a:xfrm>
+            <a:off x="576072" y="3618210"/>
+            <a:ext cx="2688336" cy="254625"/>
+          </a:xfrm>
+          <a:prstGeom prst="rect">
+            <a:avLst/>
+          </a:prstGeom>
+          <a:noFill/>
+          <a:ln/>
+        </p:spPr>
+        <p:txBody>
+          <a:bodyPr wrap="square" lIns="0" tIns="0" rIns="0" bIns="0" rtlCol="0" anchor="ctr"/>
+          <a:lstStyle/>
+          <a:p>
+            <a:pPr indent="0" marL="0">
+              <a:lnSpc>
+                <a:spcPct val="95000"/>
+              </a:lnSpc>
+              <a:buNone/>
+            </a:pPr>
+            <a:r>
+              <a:rPr lang="en-US" sz="900" dirty="0">
+                <a:solidFill>
+                  <a:srgbClr val="1A2733"/>
+                </a:solidFill>
+                <a:latin typeface="Calibri" pitchFamily="34" charset="0"/>
+                <a:ea typeface="Calibri" pitchFamily="34" charset="-122"/>
+                <a:cs typeface="Calibri" pitchFamily="34" charset="-120"/>
+              </a:rPr>
+              <a:t>Ответ из нескольких систем сразу?</a:t>
+            </a:r>
+            <a:endParaRPr lang="en-US" sz="900" dirty="0"/>
+          </a:p>
+        </p:txBody>
+      </p:sp>
+      <p:sp>
+        <p:nvSpPr>
+          <p:cNvPr id="61" name="Text 59"/>
+          <p:cNvSpPr txBox="1"/>
+          <p:nvPr/>
+        </p:nvSpPr>
+        <p:spPr>
+          <a:xfrm>
+            <a:off x="4805979" y="3618210"/>
+            <a:ext cx="489473" cy="254625"/>
+          </a:xfrm>
+          <a:prstGeom prst="rect">
+            <a:avLst/>
+          </a:prstGeom>
+          <a:noFill/>
+          <a:ln/>
+        </p:spPr>
+        <p:txBody>
+          <a:bodyPr wrap="square" lIns="0" tIns="0" rIns="0" bIns="0" rtlCol="0" anchor="ctr"/>
+          <a:lstStyle/>
+          <a:p>
+            <a:pPr algn="ctr" indent="0" marL="0">
+              <a:buNone/>
+            </a:pPr>
+            <a:r>
+              <a:rPr lang="en-US" sz="1100" b="1" dirty="0">
+                <a:solidFill>
+                  <a:srgbClr val="1E7B4D"/>
+                </a:solidFill>
+                <a:latin typeface="Calibri" pitchFamily="34" charset="0"/>
+                <a:ea typeface="Calibri" pitchFamily="34" charset="-122"/>
+                <a:cs typeface="Calibri" pitchFamily="34" charset="-120"/>
+              </a:rPr>
+              <a:t>X</a:t>
+            </a:r>
+            <a:endParaRPr lang="en-US" sz="1100" dirty="0"/>
+          </a:p>
+        </p:txBody>
+      </p:sp>
+      <p:sp>
+        <p:nvSpPr>
+          <p:cNvPr id="62" name="Text 60"/>
+          <p:cNvSpPr txBox="1"/>
+          <p:nvPr/>
+        </p:nvSpPr>
+        <p:spPr>
+          <a:xfrm>
+            <a:off x="576072" y="3872836"/>
+            <a:ext cx="2688336" cy="254625"/>
+          </a:xfrm>
+          <a:prstGeom prst="rect">
+            <a:avLst/>
+          </a:prstGeom>
+          <a:noFill/>
+          <a:ln/>
+        </p:spPr>
+        <p:txBody>
+          <a:bodyPr wrap="square" lIns="0" tIns="0" rIns="0" bIns="0" rtlCol="0" anchor="ctr"/>
+          <a:lstStyle/>
+          <a:p>
+            <a:pPr indent="0" marL="0">
+              <a:lnSpc>
+                <a:spcPct val="95000"/>
+              </a:lnSpc>
+              <a:buNone/>
+            </a:pPr>
+            <a:r>
+              <a:rPr lang="en-US" sz="900" dirty="0">
+                <a:solidFill>
+                  <a:srgbClr val="1A2733"/>
+                </a:solidFill>
+                <a:latin typeface="Calibri" pitchFamily="34" charset="0"/>
+                <a:ea typeface="Calibri" pitchFamily="34" charset="-122"/>
+                <a:cs typeface="Calibri" pitchFamily="34" charset="-120"/>
+              </a:rPr>
+              <a:t>Единый справочник показателей?</a:t>
+            </a:r>
+            <a:endParaRPr lang="en-US" sz="900" dirty="0"/>
+          </a:p>
+        </p:txBody>
+      </p:sp>
+      <p:sp>
+        <p:nvSpPr>
+          <p:cNvPr id="63" name="Text 61"/>
+          <p:cNvSpPr txBox="1"/>
+          <p:nvPr/>
+        </p:nvSpPr>
+        <p:spPr>
+          <a:xfrm>
+            <a:off x="5295452" y="3872836"/>
+            <a:ext cx="489473" cy="254625"/>
+          </a:xfrm>
+          <a:prstGeom prst="rect">
+            <a:avLst/>
+          </a:prstGeom>
+          <a:noFill/>
+          <a:ln/>
+        </p:spPr>
+        <p:txBody>
+          <a:bodyPr wrap="square" lIns="0" tIns="0" rIns="0" bIns="0" rtlCol="0" anchor="ctr"/>
+          <a:lstStyle/>
+          <a:p>
+            <a:pPr algn="ctr" indent="0" marL="0">
+              <a:buNone/>
+            </a:pPr>
+            <a:r>
+              <a:rPr lang="en-US" sz="1100" b="1" dirty="0">
+                <a:solidFill>
+                  <a:srgbClr val="C97A1A"/>
+                </a:solidFill>
+                <a:latin typeface="Calibri" pitchFamily="34" charset="0"/>
+                <a:ea typeface="Calibri" pitchFamily="34" charset="-122"/>
+                <a:cs typeface="Calibri" pitchFamily="34" charset="-120"/>
+              </a:rPr>
+              <a:t>~</a:t>
+            </a:r>
+            <a:endParaRPr lang="en-US" sz="1100" dirty="0"/>
+          </a:p>
+        </p:txBody>
+      </p:sp>
+      <p:sp>
+        <p:nvSpPr>
+          <p:cNvPr id="64" name="Text 62"/>
+          <p:cNvSpPr txBox="1"/>
+          <p:nvPr/>
+        </p:nvSpPr>
+        <p:spPr>
+          <a:xfrm>
+            <a:off x="5784925" y="3872836"/>
+            <a:ext cx="489473" cy="254625"/>
+          </a:xfrm>
+          <a:prstGeom prst="rect">
+            <a:avLst/>
+          </a:prstGeom>
+          <a:noFill/>
+          <a:ln/>
+        </p:spPr>
+        <p:txBody>
+          <a:bodyPr wrap="square" lIns="0" tIns="0" rIns="0" bIns="0" rtlCol="0" anchor="ctr"/>
+          <a:lstStyle/>
+          <a:p>
+            <a:pPr algn="ctr" indent="0" marL="0">
+              <a:buNone/>
+            </a:pPr>
+            <a:r>
+              <a:rPr lang="en-US" sz="1100" b="1" dirty="0">
+                <a:solidFill>
+                  <a:srgbClr val="1E7B4D"/>
+                </a:solidFill>
+                <a:latin typeface="Calibri" pitchFamily="34" charset="0"/>
+                <a:ea typeface="Calibri" pitchFamily="34" charset="-122"/>
+                <a:cs typeface="Calibri" pitchFamily="34" charset="-120"/>
+              </a:rPr>
+              <a:t>X</a:t>
+            </a:r>
+            <a:endParaRPr lang="en-US" sz="1100" dirty="0"/>
+          </a:p>
+        </p:txBody>
+      </p:sp>
+      <p:sp>
+        <p:nvSpPr>
+          <p:cNvPr id="65" name="Text 63"/>
+          <p:cNvSpPr txBox="1"/>
+          <p:nvPr/>
+        </p:nvSpPr>
+        <p:spPr>
+          <a:xfrm>
+            <a:off x="6274398" y="3872836"/>
+            <a:ext cx="489473" cy="254625"/>
+          </a:xfrm>
+          <a:prstGeom prst="rect">
+            <a:avLst/>
+          </a:prstGeom>
+          <a:noFill/>
+          <a:ln/>
+        </p:spPr>
+        <p:txBody>
+          <a:bodyPr wrap="square" lIns="0" tIns="0" rIns="0" bIns="0" rtlCol="0" anchor="ctr"/>
+          <a:lstStyle/>
+          <a:p>
+            <a:pPr algn="ctr" indent="0" marL="0">
+              <a:buNone/>
+            </a:pPr>
+            <a:r>
+              <a:rPr lang="en-US" sz="1100" b="1" dirty="0">
+                <a:solidFill>
+                  <a:srgbClr val="1E7B4D"/>
+                </a:solidFill>
+                <a:latin typeface="Calibri" pitchFamily="34" charset="0"/>
+                <a:ea typeface="Calibri" pitchFamily="34" charset="-122"/>
+                <a:cs typeface="Calibri" pitchFamily="34" charset="-120"/>
+              </a:rPr>
+              <a:t>X</a:t>
+            </a:r>
+            <a:endParaRPr lang="en-US" sz="1100" dirty="0"/>
+          </a:p>
+        </p:txBody>
+      </p:sp>
+      <p:sp>
+        <p:nvSpPr>
+          <p:cNvPr id="66" name="Text 64"/>
+          <p:cNvSpPr txBox="1"/>
+          <p:nvPr/>
+        </p:nvSpPr>
+        <p:spPr>
+          <a:xfrm>
+            <a:off x="576072" y="4127461"/>
+            <a:ext cx="2688336" cy="254625"/>
+          </a:xfrm>
+          <a:prstGeom prst="rect">
+            <a:avLst/>
+          </a:prstGeom>
+          <a:noFill/>
+          <a:ln/>
+        </p:spPr>
+        <p:txBody>
+          <a:bodyPr wrap="square" lIns="0" tIns="0" rIns="0" bIns="0" rtlCol="0" anchor="ctr"/>
+          <a:lstStyle/>
+          <a:p>
+            <a:pPr indent="0" marL="0">
+              <a:lnSpc>
+                <a:spcPct val="95000"/>
+              </a:lnSpc>
+              <a:buNone/>
+            </a:pPr>
+            <a:r>
+              <a:rPr lang="en-US" sz="900" dirty="0">
+                <a:solidFill>
+                  <a:srgbClr val="1A2733"/>
+                </a:solidFill>
+                <a:latin typeface="Calibri" pitchFamily="34" charset="0"/>
+                <a:ea typeface="Calibri" pitchFamily="34" charset="-122"/>
+                <a:cs typeface="Calibri" pitchFamily="34" charset="-120"/>
+              </a:rPr>
+              <a:t>Логи действий в SIEM?</a:t>
+            </a:r>
+            <a:endParaRPr lang="en-US" sz="900" dirty="0"/>
+          </a:p>
+        </p:txBody>
+      </p:sp>
+      <p:sp>
+        <p:nvSpPr>
+          <p:cNvPr id="67" name="Text 65"/>
+          <p:cNvSpPr txBox="1"/>
+          <p:nvPr/>
+        </p:nvSpPr>
+        <p:spPr>
+          <a:xfrm>
+            <a:off x="6763871" y="4127461"/>
+            <a:ext cx="489473" cy="254625"/>
+          </a:xfrm>
+          <a:prstGeom prst="rect">
+            <a:avLst/>
+          </a:prstGeom>
+          <a:noFill/>
+          <a:ln/>
+        </p:spPr>
+        <p:txBody>
+          <a:bodyPr wrap="square" lIns="0" tIns="0" rIns="0" bIns="0" rtlCol="0" anchor="ctr"/>
+          <a:lstStyle/>
+          <a:p>
+            <a:pPr algn="ctr" indent="0" marL="0">
+              <a:buNone/>
+            </a:pPr>
+            <a:r>
+              <a:rPr lang="en-US" sz="1100" b="1" dirty="0">
+                <a:solidFill>
+                  <a:srgbClr val="1E7B4D"/>
+                </a:solidFill>
+                <a:latin typeface="Calibri" pitchFamily="34" charset="0"/>
+                <a:ea typeface="Calibri" pitchFamily="34" charset="-122"/>
+                <a:cs typeface="Calibri" pitchFamily="34" charset="-120"/>
+              </a:rPr>
+              <a:t>X</a:t>
+            </a:r>
+            <a:endParaRPr lang="en-US" sz="1100" dirty="0"/>
+          </a:p>
+        </p:txBody>
+      </p:sp>
+      <p:sp>
+        <p:nvSpPr>
+          <p:cNvPr id="68" name="Text 66"/>
+          <p:cNvSpPr txBox="1"/>
+          <p:nvPr/>
+        </p:nvSpPr>
+        <p:spPr>
+          <a:xfrm>
+            <a:off x="576072" y="4382086"/>
+            <a:ext cx="2688336" cy="254625"/>
+          </a:xfrm>
+          <a:prstGeom prst="rect">
+            <a:avLst/>
+          </a:prstGeom>
+          <a:noFill/>
+          <a:ln/>
+        </p:spPr>
+        <p:txBody>
+          <a:bodyPr wrap="square" lIns="0" tIns="0" rIns="0" bIns="0" rtlCol="0" anchor="ctr"/>
+          <a:lstStyle/>
+          <a:p>
+            <a:pPr indent="0" marL="0">
+              <a:lnSpc>
+                <a:spcPct val="95000"/>
+              </a:lnSpc>
+              <a:buNone/>
+            </a:pPr>
+            <a:r>
+              <a:rPr lang="en-US" sz="900" dirty="0">
+                <a:solidFill>
+                  <a:srgbClr val="1A2733"/>
+                </a:solidFill>
+                <a:latin typeface="Calibri" pitchFamily="34" charset="0"/>
+                <a:ea typeface="Calibri" pitchFamily="34" charset="-122"/>
+                <a:cs typeface="Calibri" pitchFamily="34" charset="-120"/>
+              </a:rPr>
+              <a:t>Подтверждение действий агента?</a:t>
+            </a:r>
+            <a:endParaRPr lang="en-US" sz="900" dirty="0"/>
+          </a:p>
+        </p:txBody>
+      </p:sp>
+      <p:sp>
+        <p:nvSpPr>
+          <p:cNvPr id="69" name="Text 67"/>
+          <p:cNvSpPr txBox="1"/>
+          <p:nvPr/>
+        </p:nvSpPr>
+        <p:spPr>
+          <a:xfrm>
+            <a:off x="7253344" y="4382086"/>
+            <a:ext cx="489473" cy="254625"/>
+          </a:xfrm>
+          <a:prstGeom prst="rect">
+            <a:avLst/>
+          </a:prstGeom>
+          <a:noFill/>
+          <a:ln/>
+        </p:spPr>
+        <p:txBody>
+          <a:bodyPr wrap="square" lIns="0" tIns="0" rIns="0" bIns="0" rtlCol="0" anchor="ctr"/>
+          <a:lstStyle/>
+          <a:p>
+            <a:pPr algn="ctr" indent="0" marL="0">
+              <a:buNone/>
+            </a:pPr>
+            <a:r>
+              <a:rPr lang="en-US" sz="1100" b="1" dirty="0">
+                <a:solidFill>
+                  <a:srgbClr val="1E7B4D"/>
+                </a:solidFill>
+                <a:latin typeface="Calibri" pitchFamily="34" charset="0"/>
+                <a:ea typeface="Calibri" pitchFamily="34" charset="-122"/>
+                <a:cs typeface="Calibri" pitchFamily="34" charset="-120"/>
+              </a:rPr>
+              <a:t>X</a:t>
+            </a:r>
+            <a:endParaRPr lang="en-US" sz="1100" dirty="0"/>
+          </a:p>
+        </p:txBody>
+      </p:sp>
+      <p:sp>
+        <p:nvSpPr>
+          <p:cNvPr id="70" name="Text 68"/>
+          <p:cNvSpPr txBox="1"/>
+          <p:nvPr/>
+        </p:nvSpPr>
+        <p:spPr>
+          <a:xfrm>
+            <a:off x="576072" y="4636711"/>
+            <a:ext cx="2688336" cy="254625"/>
+          </a:xfrm>
+          <a:prstGeom prst="rect">
+            <a:avLst/>
+          </a:prstGeom>
+          <a:noFill/>
+          <a:ln/>
+        </p:spPr>
+        <p:txBody>
+          <a:bodyPr wrap="square" lIns="0" tIns="0" rIns="0" bIns="0" rtlCol="0" anchor="ctr"/>
+          <a:lstStyle/>
+          <a:p>
+            <a:pPr indent="0" marL="0">
+              <a:lnSpc>
+                <a:spcPct val="95000"/>
+              </a:lnSpc>
+              <a:buNone/>
+            </a:pPr>
+            <a:r>
+              <a:rPr lang="en-US" sz="900" dirty="0">
+                <a:solidFill>
+                  <a:srgbClr val="1A2733"/>
+                </a:solidFill>
+                <a:latin typeface="Calibri" pitchFamily="34" charset="0"/>
+                <a:ea typeface="Calibri" pitchFamily="34" charset="-122"/>
+                <a:cs typeface="Calibri" pitchFamily="34" charset="-120"/>
+              </a:rPr>
+              <a:t>Гибкий доступ по папкам?</a:t>
+            </a:r>
+            <a:endParaRPr lang="en-US" sz="900" dirty="0"/>
+          </a:p>
+        </p:txBody>
+      </p:sp>
+      <p:sp>
+        <p:nvSpPr>
+          <p:cNvPr id="71" name="Text 69"/>
+          <p:cNvSpPr txBox="1"/>
+          <p:nvPr/>
+        </p:nvSpPr>
+        <p:spPr>
+          <a:xfrm>
+            <a:off x="7742816" y="4636711"/>
+            <a:ext cx="489473" cy="254625"/>
+          </a:xfrm>
+          <a:prstGeom prst="rect">
+            <a:avLst/>
+          </a:prstGeom>
+          <a:noFill/>
+          <a:ln/>
+        </p:spPr>
+        <p:txBody>
+          <a:bodyPr wrap="square" lIns="0" tIns="0" rIns="0" bIns="0" rtlCol="0" anchor="ctr"/>
+          <a:lstStyle/>
+          <a:p>
+            <a:pPr algn="ctr" indent="0" marL="0">
+              <a:buNone/>
+            </a:pPr>
+            <a:r>
+              <a:rPr lang="en-US" sz="1100" b="1" dirty="0">
+                <a:solidFill>
+                  <a:srgbClr val="C97A1A"/>
+                </a:solidFill>
+                <a:latin typeface="Calibri" pitchFamily="34" charset="0"/>
+                <a:ea typeface="Calibri" pitchFamily="34" charset="-122"/>
+                <a:cs typeface="Calibri" pitchFamily="34" charset="-120"/>
+              </a:rPr>
+              <a:t>~</a:t>
+            </a:r>
+            <a:endParaRPr lang="en-US" sz="1100" dirty="0"/>
+          </a:p>
+        </p:txBody>
+      </p:sp>
+      <p:sp>
+        <p:nvSpPr>
+          <p:cNvPr id="72" name="Text 70"/>
+          <p:cNvSpPr txBox="1"/>
+          <p:nvPr/>
+        </p:nvSpPr>
+        <p:spPr>
+          <a:xfrm>
+            <a:off x="8232289" y="4636711"/>
+            <a:ext cx="489473" cy="254625"/>
+          </a:xfrm>
+          <a:prstGeom prst="rect">
+            <a:avLst/>
+          </a:prstGeom>
+          <a:noFill/>
+          <a:ln/>
+        </p:spPr>
+        <p:txBody>
+          <a:bodyPr wrap="square" lIns="0" tIns="0" rIns="0" bIns="0" rtlCol="0" anchor="ctr"/>
+          <a:lstStyle/>
+          <a:p>
+            <a:pPr algn="ctr" indent="0" marL="0">
+              <a:buNone/>
+            </a:pPr>
+            <a:r>
+              <a:rPr lang="en-US" sz="1100" b="1" dirty="0">
+                <a:solidFill>
+                  <a:srgbClr val="C97A1A"/>
+                </a:solidFill>
+                <a:latin typeface="Calibri" pitchFamily="34" charset="0"/>
+                <a:ea typeface="Calibri" pitchFamily="34" charset="-122"/>
+                <a:cs typeface="Calibri" pitchFamily="34" charset="-120"/>
+              </a:rPr>
+              <a:t>~</a:t>
+            </a:r>
+            <a:endParaRPr lang="en-US" sz="1100" dirty="0"/>
+          </a:p>
+        </p:txBody>
+      </p:sp>
+      <p:sp>
+        <p:nvSpPr>
+          <p:cNvPr id="73" name="Text 71"/>
+          <p:cNvSpPr txBox="1"/>
+          <p:nvPr/>
+        </p:nvSpPr>
+        <p:spPr>
+          <a:xfrm>
+            <a:off x="576072" y="4891337"/>
+            <a:ext cx="2688336" cy="254625"/>
+          </a:xfrm>
+          <a:prstGeom prst="rect">
+            <a:avLst/>
+          </a:prstGeom>
+          <a:noFill/>
+          <a:ln/>
+        </p:spPr>
+        <p:txBody>
+          <a:bodyPr wrap="square" lIns="0" tIns="0" rIns="0" bIns="0" rtlCol="0" anchor="ctr"/>
+          <a:lstStyle/>
+          <a:p>
+            <a:pPr indent="0" marL="0">
+              <a:lnSpc>
+                <a:spcPct val="95000"/>
+              </a:lnSpc>
+              <a:buNone/>
+            </a:pPr>
+            <a:r>
+              <a:rPr lang="en-US" sz="900" dirty="0">
+                <a:solidFill>
+                  <a:srgbClr val="1A2733"/>
+                </a:solidFill>
+                <a:latin typeface="Calibri" pitchFamily="34" charset="0"/>
+                <a:ea typeface="Calibri" pitchFamily="34" charset="-122"/>
+                <a:cs typeface="Calibri" pitchFamily="34" charset="-120"/>
+              </a:rPr>
+              <a:t>Автоматический расчёт по системам?</a:t>
+            </a:r>
+            <a:endParaRPr lang="en-US" sz="900" dirty="0"/>
+          </a:p>
+        </p:txBody>
+      </p:sp>
+      <p:sp>
+        <p:nvSpPr>
+          <p:cNvPr id="74" name="Text 72"/>
+          <p:cNvSpPr txBox="1"/>
+          <p:nvPr/>
+        </p:nvSpPr>
+        <p:spPr>
+          <a:xfrm>
+            <a:off x="8721762" y="4891337"/>
+            <a:ext cx="489473" cy="254625"/>
+          </a:xfrm>
+          <a:prstGeom prst="rect">
+            <a:avLst/>
+          </a:prstGeom>
+          <a:noFill/>
+          <a:ln/>
+        </p:spPr>
+        <p:txBody>
+          <a:bodyPr wrap="square" lIns="0" tIns="0" rIns="0" bIns="0" rtlCol="0" anchor="ctr"/>
+          <a:lstStyle/>
+          <a:p>
+            <a:pPr algn="ctr" indent="0" marL="0">
+              <a:buNone/>
+            </a:pPr>
+            <a:r>
+              <a:rPr lang="en-US" sz="1100" b="1" dirty="0">
+                <a:solidFill>
+                  <a:srgbClr val="1E7B4D"/>
+                </a:solidFill>
+                <a:latin typeface="Calibri" pitchFamily="34" charset="0"/>
+                <a:ea typeface="Calibri" pitchFamily="34" charset="-122"/>
+                <a:cs typeface="Calibri" pitchFamily="34" charset="-120"/>
+              </a:rPr>
+              <a:t>X</a:t>
+            </a:r>
+            <a:endParaRPr lang="en-US" sz="1100" dirty="0"/>
+          </a:p>
+        </p:txBody>
+      </p:sp>
+      <p:sp>
+        <p:nvSpPr>
+          <p:cNvPr id="75" name="Text 73"/>
+          <p:cNvSpPr txBox="1"/>
+          <p:nvPr/>
+        </p:nvSpPr>
+        <p:spPr>
+          <a:xfrm>
+            <a:off x="576072" y="5145962"/>
+            <a:ext cx="2688336" cy="254625"/>
+          </a:xfrm>
+          <a:prstGeom prst="rect">
+            <a:avLst/>
+          </a:prstGeom>
+          <a:noFill/>
+          <a:ln/>
+        </p:spPr>
+        <p:txBody>
+          <a:bodyPr wrap="square" lIns="0" tIns="0" rIns="0" bIns="0" rtlCol="0" anchor="ctr"/>
+          <a:lstStyle/>
+          <a:p>
+            <a:pPr indent="0" marL="0">
+              <a:lnSpc>
+                <a:spcPct val="95000"/>
+              </a:lnSpc>
+              <a:buNone/>
+            </a:pPr>
+            <a:r>
+              <a:rPr lang="en-US" sz="900" dirty="0">
+                <a:solidFill>
+                  <a:srgbClr val="1A2733"/>
+                </a:solidFill>
+                <a:latin typeface="Calibri" pitchFamily="34" charset="0"/>
+                <a:ea typeface="Calibri" pitchFamily="34" charset="-122"/>
+                <a:cs typeface="Calibri" pitchFamily="34" charset="-120"/>
+              </a:rPr>
+              <a:t>Выборки данных без программиста?</a:t>
+            </a:r>
+            <a:endParaRPr lang="en-US" sz="900" dirty="0"/>
+          </a:p>
+        </p:txBody>
+      </p:sp>
+      <p:sp>
+        <p:nvSpPr>
+          <p:cNvPr id="76" name="Text 74"/>
+          <p:cNvSpPr txBox="1"/>
+          <p:nvPr/>
+        </p:nvSpPr>
+        <p:spPr>
+          <a:xfrm>
+            <a:off x="9211235" y="5145962"/>
+            <a:ext cx="489473" cy="254625"/>
+          </a:xfrm>
+          <a:prstGeom prst="rect">
+            <a:avLst/>
+          </a:prstGeom>
+          <a:noFill/>
+          <a:ln/>
+        </p:spPr>
+        <p:txBody>
+          <a:bodyPr wrap="square" lIns="0" tIns="0" rIns="0" bIns="0" rtlCol="0" anchor="ctr"/>
+          <a:lstStyle/>
+          <a:p>
+            <a:pPr algn="ctr" indent="0" marL="0">
+              <a:buNone/>
+            </a:pPr>
+            <a:r>
+              <a:rPr lang="en-US" sz="1100" b="1" dirty="0">
+                <a:solidFill>
+                  <a:srgbClr val="1E7B4D"/>
+                </a:solidFill>
+                <a:latin typeface="Calibri" pitchFamily="34" charset="0"/>
+                <a:ea typeface="Calibri" pitchFamily="34" charset="-122"/>
+                <a:cs typeface="Calibri" pitchFamily="34" charset="-120"/>
+              </a:rPr>
+              <a:t>X</a:t>
+            </a:r>
+            <a:endParaRPr lang="en-US" sz="1100" dirty="0"/>
+          </a:p>
+        </p:txBody>
+      </p:sp>
+      <p:sp>
+        <p:nvSpPr>
+          <p:cNvPr id="77" name="Text 75"/>
+          <p:cNvSpPr txBox="1"/>
+          <p:nvPr/>
+        </p:nvSpPr>
+        <p:spPr>
+          <a:xfrm>
+            <a:off x="576072" y="5400587"/>
+            <a:ext cx="2688336" cy="254625"/>
+          </a:xfrm>
+          <a:prstGeom prst="rect">
+            <a:avLst/>
+          </a:prstGeom>
+          <a:noFill/>
+          <a:ln/>
+        </p:spPr>
+        <p:txBody>
+          <a:bodyPr wrap="square" lIns="0" tIns="0" rIns="0" bIns="0" rtlCol="0" anchor="ctr"/>
+          <a:lstStyle/>
+          <a:p>
+            <a:pPr indent="0" marL="0">
+              <a:lnSpc>
+                <a:spcPct val="95000"/>
+              </a:lnSpc>
+              <a:buNone/>
+            </a:pPr>
+            <a:r>
+              <a:rPr lang="en-US" sz="900" dirty="0">
+                <a:solidFill>
+                  <a:srgbClr val="1A2733"/>
+                </a:solidFill>
+                <a:latin typeface="Calibri" pitchFamily="34" charset="0"/>
+                <a:ea typeface="Calibri" pitchFamily="34" charset="-122"/>
+                <a:cs typeface="Calibri" pitchFamily="34" charset="-120"/>
+              </a:rPr>
+              <a:t>Подключение к своим моделям?</a:t>
+            </a:r>
+            <a:endParaRPr lang="en-US" sz="900" dirty="0"/>
+          </a:p>
+        </p:txBody>
+      </p:sp>
+      <p:sp>
+        <p:nvSpPr>
+          <p:cNvPr id="78" name="Text 76"/>
+          <p:cNvSpPr txBox="1"/>
+          <p:nvPr/>
+        </p:nvSpPr>
+        <p:spPr>
+          <a:xfrm>
+            <a:off x="9700708" y="5400587"/>
+            <a:ext cx="489473" cy="254625"/>
+          </a:xfrm>
+          <a:prstGeom prst="rect">
+            <a:avLst/>
+          </a:prstGeom>
+          <a:noFill/>
+          <a:ln/>
+        </p:spPr>
+        <p:txBody>
+          <a:bodyPr wrap="square" lIns="0" tIns="0" rIns="0" bIns="0" rtlCol="0" anchor="ctr"/>
+          <a:lstStyle/>
+          <a:p>
+            <a:pPr algn="ctr" indent="0" marL="0">
+              <a:buNone/>
+            </a:pPr>
+            <a:r>
+              <a:rPr lang="en-US" sz="1100" b="1" dirty="0">
+                <a:solidFill>
+                  <a:srgbClr val="1E7B4D"/>
+                </a:solidFill>
+                <a:latin typeface="Calibri" pitchFamily="34" charset="0"/>
+                <a:ea typeface="Calibri" pitchFamily="34" charset="-122"/>
+                <a:cs typeface="Calibri" pitchFamily="34" charset="-120"/>
+              </a:rPr>
+              <a:t>X</a:t>
+            </a:r>
+            <a:endParaRPr lang="en-US" sz="1100" dirty="0"/>
+          </a:p>
+        </p:txBody>
+      </p:sp>
+      <p:sp>
+        <p:nvSpPr>
+          <p:cNvPr id="79" name="Text 77"/>
+          <p:cNvSpPr txBox="1"/>
+          <p:nvPr/>
+        </p:nvSpPr>
+        <p:spPr>
+          <a:xfrm>
+            <a:off x="10190181" y="5400587"/>
+            <a:ext cx="489473" cy="254625"/>
+          </a:xfrm>
+          <a:prstGeom prst="rect">
+            <a:avLst/>
+          </a:prstGeom>
+          <a:noFill/>
+          <a:ln/>
+        </p:spPr>
+        <p:txBody>
+          <a:bodyPr wrap="square" lIns="0" tIns="0" rIns="0" bIns="0" rtlCol="0" anchor="ctr"/>
+          <a:lstStyle/>
+          <a:p>
+            <a:pPr algn="ctr" indent="0" marL="0">
+              <a:buNone/>
+            </a:pPr>
+            <a:r>
+              <a:rPr lang="en-US" sz="1100" b="1" dirty="0">
+                <a:solidFill>
+                  <a:srgbClr val="C97A1A"/>
+                </a:solidFill>
+                <a:latin typeface="Calibri" pitchFamily="34" charset="0"/>
+                <a:ea typeface="Calibri" pitchFamily="34" charset="-122"/>
+                <a:cs typeface="Calibri" pitchFamily="34" charset="-120"/>
+              </a:rPr>
+              <a:t>~</a:t>
+            </a:r>
+            <a:endParaRPr lang="en-US" sz="1100" dirty="0"/>
+          </a:p>
+        </p:txBody>
+      </p:sp>
+      <p:sp>
+        <p:nvSpPr>
+          <p:cNvPr id="80" name="Text 78"/>
+          <p:cNvSpPr txBox="1"/>
+          <p:nvPr/>
+        </p:nvSpPr>
+        <p:spPr>
+          <a:xfrm>
+            <a:off x="576072" y="5655212"/>
+            <a:ext cx="2688336" cy="254625"/>
+          </a:xfrm>
+          <a:prstGeom prst="rect">
+            <a:avLst/>
+          </a:prstGeom>
+          <a:noFill/>
+          <a:ln/>
+        </p:spPr>
+        <p:txBody>
+          <a:bodyPr wrap="square" lIns="0" tIns="0" rIns="0" bIns="0" rtlCol="0" anchor="ctr"/>
+          <a:lstStyle/>
+          <a:p>
+            <a:pPr indent="0" marL="0">
+              <a:lnSpc>
+                <a:spcPct val="95000"/>
+              </a:lnSpc>
+              <a:buNone/>
+            </a:pPr>
+            <a:r>
+              <a:rPr lang="en-US" sz="900" dirty="0">
+                <a:solidFill>
+                  <a:srgbClr val="1A2733"/>
+                </a:solidFill>
+                <a:latin typeface="Calibri" pitchFamily="34" charset="0"/>
+                <a:ea typeface="Calibri" pitchFamily="34" charset="-122"/>
+                <a:cs typeface="Calibri" pitchFamily="34" charset="-120"/>
+              </a:rPr>
+              <a:t>Защита паролей и ключей?</a:t>
+            </a:r>
+            <a:endParaRPr lang="en-US" sz="900" dirty="0"/>
+          </a:p>
+        </p:txBody>
+      </p:sp>
+      <p:sp>
+        <p:nvSpPr>
+          <p:cNvPr id="81" name="Text 79"/>
+          <p:cNvSpPr txBox="1"/>
+          <p:nvPr/>
+        </p:nvSpPr>
+        <p:spPr>
+          <a:xfrm>
+            <a:off x="10679654" y="5655212"/>
+            <a:ext cx="489473" cy="254625"/>
+          </a:xfrm>
+          <a:prstGeom prst="rect">
+            <a:avLst/>
+          </a:prstGeom>
+          <a:noFill/>
+          <a:ln/>
+        </p:spPr>
+        <p:txBody>
+          <a:bodyPr wrap="square" lIns="0" tIns="0" rIns="0" bIns="0" rtlCol="0" anchor="ctr"/>
+          <a:lstStyle/>
+          <a:p>
+            <a:pPr algn="ctr" indent="0" marL="0">
+              <a:buNone/>
+            </a:pPr>
+            <a:r>
+              <a:rPr lang="en-US" sz="1100" b="1" dirty="0">
+                <a:solidFill>
+                  <a:srgbClr val="1E7B4D"/>
+                </a:solidFill>
+                <a:latin typeface="Calibri" pitchFamily="34" charset="0"/>
+                <a:ea typeface="Calibri" pitchFamily="34" charset="-122"/>
+                <a:cs typeface="Calibri" pitchFamily="34" charset="-120"/>
+              </a:rPr>
+              <a:t>X</a:t>
+            </a:r>
+            <a:endParaRPr lang="en-US" sz="1100" dirty="0"/>
+          </a:p>
+        </p:txBody>
+      </p:sp>
+      <p:sp>
+        <p:nvSpPr>
+          <p:cNvPr id="82" name="Text 80"/>
+          <p:cNvSpPr txBox="1"/>
+          <p:nvPr/>
+        </p:nvSpPr>
+        <p:spPr>
+          <a:xfrm>
+            <a:off x="576072" y="5909838"/>
+            <a:ext cx="2688336" cy="254625"/>
+          </a:xfrm>
+          <a:prstGeom prst="rect">
+            <a:avLst/>
+          </a:prstGeom>
+          <a:noFill/>
+          <a:ln/>
+        </p:spPr>
+        <p:txBody>
+          <a:bodyPr wrap="square" lIns="0" tIns="0" rIns="0" bIns="0" rtlCol="0" anchor="ctr"/>
+          <a:lstStyle/>
+          <a:p>
+            <a:pPr indent="0" marL="0">
+              <a:lnSpc>
+                <a:spcPct val="95000"/>
+              </a:lnSpc>
+              <a:buNone/>
+            </a:pPr>
+            <a:r>
+              <a:rPr lang="en-US" sz="900" dirty="0">
+                <a:solidFill>
+                  <a:srgbClr val="1A2733"/>
+                </a:solidFill>
+                <a:latin typeface="Calibri" pitchFamily="34" charset="0"/>
+                <a:ea typeface="Calibri" pitchFamily="34" charset="-122"/>
+                <a:cs typeface="Calibri" pitchFamily="34" charset="-120"/>
+              </a:rPr>
+              <a:t>Видимость доступов агентов?</a:t>
+            </a:r>
+            <a:endParaRPr lang="en-US" sz="900" dirty="0"/>
+          </a:p>
+        </p:txBody>
+      </p:sp>
+      <p:sp>
+        <p:nvSpPr>
+          <p:cNvPr id="83" name="Text 81"/>
+          <p:cNvSpPr txBox="1"/>
+          <p:nvPr/>
+        </p:nvSpPr>
+        <p:spPr>
+          <a:xfrm>
+            <a:off x="7742816" y="5909838"/>
+            <a:ext cx="489473" cy="254625"/>
+          </a:xfrm>
+          <a:prstGeom prst="rect">
+            <a:avLst/>
+          </a:prstGeom>
+          <a:noFill/>
+          <a:ln/>
+        </p:spPr>
+        <p:txBody>
+          <a:bodyPr wrap="square" lIns="0" tIns="0" rIns="0" bIns="0" rtlCol="0" anchor="ctr"/>
+          <a:lstStyle/>
+          <a:p>
+            <a:pPr algn="ctr" indent="0" marL="0">
+              <a:buNone/>
+            </a:pPr>
+            <a:r>
+              <a:rPr lang="en-US" sz="1100" b="1" dirty="0">
+                <a:solidFill>
+                  <a:srgbClr val="1E7B4D"/>
+                </a:solidFill>
+                <a:latin typeface="Calibri" pitchFamily="34" charset="0"/>
+                <a:ea typeface="Calibri" pitchFamily="34" charset="-122"/>
+                <a:cs typeface="Calibri" pitchFamily="34" charset="-120"/>
+              </a:rPr>
+              <a:t>X</a:t>
+            </a:r>
+            <a:endParaRPr lang="en-US" sz="1100" dirty="0"/>
+          </a:p>
+        </p:txBody>
+      </p:sp>
+      <p:sp>
+        <p:nvSpPr>
+          <p:cNvPr id="84" name="Text 82"/>
+          <p:cNvSpPr txBox="1"/>
+          <p:nvPr/>
+        </p:nvSpPr>
+        <p:spPr>
+          <a:xfrm>
+            <a:off x="576072" y="6164463"/>
+            <a:ext cx="2688336" cy="254625"/>
+          </a:xfrm>
+          <a:prstGeom prst="rect">
+            <a:avLst/>
+          </a:prstGeom>
+          <a:noFill/>
+          <a:ln/>
+        </p:spPr>
+        <p:txBody>
+          <a:bodyPr wrap="square" lIns="0" tIns="0" rIns="0" bIns="0" rtlCol="0" anchor="ctr"/>
+          <a:lstStyle/>
+          <a:p>
+            <a:pPr indent="0" marL="0">
+              <a:lnSpc>
+                <a:spcPct val="95000"/>
+              </a:lnSpc>
+              <a:buNone/>
+            </a:pPr>
+            <a:r>
+              <a:rPr lang="en-US" sz="900" dirty="0">
+                <a:solidFill>
+                  <a:srgbClr val="1A2733"/>
+                </a:solidFill>
+                <a:latin typeface="Calibri" pitchFamily="34" charset="0"/>
+                <a:ea typeface="Calibri" pitchFamily="34" charset="-122"/>
+                <a:cs typeface="Calibri" pitchFamily="34" charset="-120"/>
+              </a:rPr>
+              <a:t>Текст ИИ отличим от человека?</a:t>
+            </a:r>
+            <a:endParaRPr lang="en-US" sz="900" dirty="0"/>
+          </a:p>
+        </p:txBody>
+      </p:sp>
+      <p:sp>
+        <p:nvSpPr>
+          <p:cNvPr id="85" name="Text 83"/>
+          <p:cNvSpPr txBox="1"/>
+          <p:nvPr/>
+        </p:nvSpPr>
+        <p:spPr>
+          <a:xfrm>
+            <a:off x="11169127" y="6164463"/>
+            <a:ext cx="489473" cy="254625"/>
+          </a:xfrm>
+          <a:prstGeom prst="rect">
+            <a:avLst/>
+          </a:prstGeom>
+          <a:noFill/>
+          <a:ln/>
+        </p:spPr>
+        <p:txBody>
+          <a:bodyPr wrap="square" lIns="0" tIns="0" rIns="0" bIns="0" rtlCol="0" anchor="ctr"/>
+          <a:lstStyle/>
+          <a:p>
+            <a:pPr algn="ctr" indent="0" marL="0">
+              <a:buNone/>
+            </a:pPr>
+            <a:r>
+              <a:rPr lang="en-US" sz="1100" b="1" dirty="0">
+                <a:solidFill>
+                  <a:srgbClr val="1E7B4D"/>
+                </a:solidFill>
+                <a:latin typeface="Calibri" pitchFamily="34" charset="0"/>
+                <a:ea typeface="Calibri" pitchFamily="34" charset="-122"/>
+                <a:cs typeface="Calibri" pitchFamily="34" charset="-120"/>
+              </a:rPr>
+              <a:t>X</a:t>
+            </a:r>
+            <a:endParaRPr lang="en-US" sz="1100" dirty="0"/>
+          </a:p>
+        </p:txBody>
+      </p:sp>
+      <p:sp>
+        <p:nvSpPr>
+          <p:cNvPr id="86" name="Text 84"/>
           <p:cNvSpPr txBox="1"/>
           <p:nvPr/>
         </p:nvSpPr>
@@ -5427,1981 +7177,7 @@
                 <a:ea typeface="Calibri" pitchFamily="34" charset="-122"/>
                 <a:cs typeface="Calibri" pitchFamily="34" charset="-120"/>
               </a:rPr>
-              <a:t>6 / 7</a:t>
-            </a:r>
-            <a:endParaRPr lang="en-US" sz="1050" dirty="0"/>
-          </a:p>
-        </p:txBody>
-      </p:sp>
-    </p:spTree>
-  </p:cSld>
-  <p:clrMapOvr>
-    <a:masterClrMapping/>
-  </p:clrMapOvr>
-</p:sld>
-</file>
-
-<file path=ppt/slides/slide7.xml><?xml version="1.0" encoding="utf-8"?>
-<p:sld xmlns:a="http://schemas.openxmlformats.org/drawingml/2006/main" xmlns:r="http://schemas.openxmlformats.org/officeDocument/2006/relationships" xmlns:p="http://schemas.openxmlformats.org/presentationml/2006/main">
-  <p:cSld name="Slide 7">
-    <p:spTree>
-      <p:nvGrpSpPr>
-        <p:cNvPr id="1" name=""/>
-        <p:cNvGrpSpPr/>
-        <p:nvPr/>
-      </p:nvGrpSpPr>
-      <p:grpSpPr>
-        <a:xfrm>
-          <a:off x="0" y="0"/>
-          <a:ext cx="0" cy="0"/>
-          <a:chOff x="0" y="0"/>
-          <a:chExt cx="0" cy="0"/>
-        </a:xfrm>
-      </p:grpSpPr>
-      <p:sp>
-        <p:nvSpPr>
-          <p:cNvPr id="2" name="Text 0"/>
-          <p:cNvSpPr txBox="1"/>
-          <p:nvPr/>
-        </p:nvSpPr>
-        <p:spPr>
-          <a:xfrm>
-            <a:off x="502920" y="320040"/>
-            <a:ext cx="11155680" cy="274320"/>
-          </a:xfrm>
-          <a:prstGeom prst="rect">
-            <a:avLst/>
-          </a:prstGeom>
-          <a:noFill/>
-          <a:ln/>
-        </p:spPr>
-        <p:txBody>
-          <a:bodyPr wrap="square" lIns="0" tIns="0" rIns="0" bIns="0" rtlCol="0" anchor="ctr"/>
-          <a:lstStyle/>
-          <a:p>
-            <a:pPr indent="0" marL="0">
-              <a:buNone/>
-            </a:pPr>
-            <a:r>
-              <a:rPr lang="en-US" sz="1100" b="1" spc="120" kern="0" dirty="0">
-                <a:solidFill>
-                  <a:srgbClr val="0E7C86"/>
-                </a:solidFill>
-                <a:latin typeface="Calibri" pitchFamily="34" charset="0"/>
-                <a:ea typeface="Calibri" pitchFamily="34" charset="-122"/>
-                <a:cs typeface="Calibri" pitchFamily="34" charset="-120"/>
-              </a:rPr>
-              <a:t>6 · КАК ИСПОЛЬЗОВАТЬ РЕЗУЛЬТАТ</a:t>
-            </a:r>
-            <a:endParaRPr lang="en-US" sz="1100" dirty="0"/>
-          </a:p>
-        </p:txBody>
-      </p:sp>
-      <p:sp>
-        <p:nvSpPr>
-          <p:cNvPr id="3" name="Text 1"/>
-          <p:cNvSpPr txBox="1"/>
-          <p:nvPr/>
-        </p:nvSpPr>
-        <p:spPr>
-          <a:xfrm>
-            <a:off x="502920" y="621792"/>
-            <a:ext cx="11155680" cy="548640"/>
-          </a:xfrm>
-          <a:prstGeom prst="rect">
-            <a:avLst/>
-          </a:prstGeom>
-          <a:noFill/>
-          <a:ln/>
-        </p:spPr>
-        <p:txBody>
-          <a:bodyPr wrap="square" lIns="0" tIns="0" rIns="0" bIns="0" rtlCol="0" anchor="ctr"/>
-          <a:lstStyle/>
-          <a:p>
-            <a:pPr indent="0" marL="0">
-              <a:buNone/>
-            </a:pPr>
-            <a:r>
-              <a:rPr lang="en-US" sz="2700" b="1" dirty="0">
-                <a:solidFill>
-                  <a:srgbClr val="1A2733"/>
-                </a:solidFill>
-                <a:latin typeface="Cambria" pitchFamily="34" charset="0"/>
-                <a:ea typeface="Cambria" pitchFamily="34" charset="-122"/>
-                <a:cs typeface="Cambria" pitchFamily="34" charset="-120"/>
-              </a:rPr>
-              <a:t>Сравнение рынка — накапливаем по мере опросов</a:t>
-            </a:r>
-            <a:endParaRPr lang="en-US" sz="2700" dirty="0"/>
-          </a:p>
-        </p:txBody>
-      </p:sp>
-      <p:sp>
-        <p:nvSpPr>
-          <p:cNvPr id="4" name="Text 2"/>
-          <p:cNvSpPr txBox="1"/>
-          <p:nvPr/>
-        </p:nvSpPr>
-        <p:spPr>
-          <a:xfrm>
-            <a:off x="502920" y="1170432"/>
-            <a:ext cx="11155680" cy="365760"/>
-          </a:xfrm>
-          <a:prstGeom prst="rect">
-            <a:avLst/>
-          </a:prstGeom>
-          <a:noFill/>
-          <a:ln/>
-        </p:spPr>
-        <p:txBody>
-          <a:bodyPr wrap="square" lIns="0" tIns="0" rIns="0" bIns="0" rtlCol="0" anchor="ctr"/>
-          <a:lstStyle/>
-          <a:p>
-            <a:pPr indent="0" marL="0">
-              <a:buNone/>
-            </a:pPr>
-            <a:r>
-              <a:rPr lang="en-US" sz="1300" dirty="0">
-                <a:solidFill>
-                  <a:srgbClr val="5B6B7A"/>
-                </a:solidFill>
-                <a:latin typeface="Calibri" pitchFamily="34" charset="0"/>
-                <a:ea typeface="Calibri" pitchFamily="34" charset="-122"/>
-                <a:cs typeface="Calibri" pitchFamily="34" charset="-120"/>
-              </a:rPr>
-              <a:t>«Наша платформа» — по текущему роадмапу. Колонки под конкурентов добавляются в xlsx по мере разговоров</a:t>
-            </a:r>
-            <a:endParaRPr lang="en-US" sz="1300" dirty="0"/>
-          </a:p>
-        </p:txBody>
-      </p:sp>
-      <p:graphicFrame>
-        <p:nvGraphicFramePr>
-          <p:cNvPr id="8" name="Table 0"/>
-          <p:cNvGraphicFramePr>
-            <a:graphicFrameLocks noGrp="1"/>
-          </p:cNvGraphicFramePr>
-          <p:nvPr>
-            <p:extLst>
-              <p:ext uri="{D42A27DB-BD31-4B8C-83A1-F6EECF244321}">
-                <p14:modId xmlns:p14="http://schemas.microsoft.com/office/powerpoint/2010/main" val="1579011935"/>
-              </p:ext>
-            </p:extLst>
-          </p:nvPr>
-        </p:nvGraphicFramePr>
-        <p:xfrm>
-          <a:off x="502920" y="1691640"/>
-          <a:ext cx="11155680" cy="4206240"/>
-        </p:xfrm>
-        <a:graphic>
-          <a:graphicData uri="http://schemas.openxmlformats.org/drawingml/2006/table">
-            <a:tbl>
-              <a:tblPr/>
-              <a:tblGrid>
-                <a:gridCol w="3108960"/>
-                <a:gridCol w="2011680"/>
-                <a:gridCol w="6035040"/>
-              </a:tblGrid>
-              <a:tr h="525780">
-                <a:tc>
-                  <a:txBody>
-                    <a:bodyPr/>
-                    <a:lstStyle/>
-                    <a:p>
-                      <a:pPr indent="0" marL="0">
-                        <a:buNone/>
-                      </a:pPr>
-                      <a:r>
-                        <a:rPr lang="en-US" sz="1100" b="1" dirty="0">
-                          <a:solidFill>
-                            <a:srgbClr val="FFFFFF"/>
-                          </a:solidFill>
-                          <a:latin typeface="Calibri" pitchFamily="34" charset="0"/>
-                          <a:ea typeface="Calibri" pitchFamily="34" charset="-122"/>
-                          <a:cs typeface="Calibri" pitchFamily="34" charset="-120"/>
-                        </a:rPr>
-                        <a:t>Категория</a:t>
-                      </a:r>
-                      <a:endParaRPr lang="en-US" sz="1100" dirty="0">
-                        <a:latin typeface="Calibri" charset="0"/>
-                        <a:ea typeface="Calibri" charset="0"/>
-                        <a:cs typeface="Calibri" charset="0"/>
-                      </a:endParaRPr>
-                    </a:p>
-                  </a:txBody>
-                  <a:tcPr marL="114300" marR="114300" marT="76200" marB="76200" anchor="ctr">
-                    <a:lnL w="9525" cap="flat" cmpd="sng" algn="ctr">
-                      <a:solidFill>
-                        <a:srgbClr val="D8DEE2"/>
-                      </a:solidFill>
-                      <a:prstDash val="solid"/>
-                      <a:round/>
-                      <a:headEnd type="none" w="med" len="med"/>
-                      <a:tailEnd type="none" w="med" len="med"/>
-                    </a:lnL>
-                    <a:lnR w="9525" cap="flat" cmpd="sng" algn="ctr">
-                      <a:solidFill>
-                        <a:srgbClr val="D8DEE2"/>
-                      </a:solidFill>
-                      <a:prstDash val="solid"/>
-                      <a:round/>
-                      <a:headEnd type="none" w="med" len="med"/>
-                      <a:tailEnd type="none" w="med" len="med"/>
-                    </a:lnR>
-                    <a:lnT w="9525" cap="flat" cmpd="sng" algn="ctr">
-                      <a:solidFill>
-                        <a:srgbClr val="D8DEE2"/>
-                      </a:solidFill>
-                      <a:prstDash val="solid"/>
-                      <a:round/>
-                      <a:headEnd type="none" w="med" len="med"/>
-                      <a:tailEnd type="none" w="med" len="med"/>
-                    </a:lnT>
-                    <a:lnB w="9525" cap="flat" cmpd="sng" algn="ctr">
-                      <a:solidFill>
-                        <a:srgbClr val="D8DEE2"/>
-                      </a:solidFill>
-                      <a:prstDash val="solid"/>
-                      <a:round/>
-                      <a:headEnd type="none" w="med" len="med"/>
-                      <a:tailEnd type="none" w="med" len="med"/>
-                    </a:lnB>
-                    <a:solidFill>
-                      <a:srgbClr val="1A2733"/>
-                    </a:solidFill>
-                  </a:tcPr>
-                </a:tc>
-                <a:tc>
-                  <a:txBody>
-                    <a:bodyPr/>
-                    <a:lstStyle/>
-                    <a:p>
-                      <a:pPr algn="ctr" indent="0" marL="0">
-                        <a:buNone/>
-                      </a:pPr>
-                      <a:r>
-                        <a:rPr lang="en-US" sz="1100" b="1" dirty="0">
-                          <a:solidFill>
-                            <a:srgbClr val="FFFFFF"/>
-                          </a:solidFill>
-                          <a:latin typeface="Calibri" pitchFamily="34" charset="0"/>
-                          <a:ea typeface="Calibri" pitchFamily="34" charset="-122"/>
-                          <a:cs typeface="Calibri" pitchFamily="34" charset="-120"/>
-                        </a:rPr>
-                        <a:t>Наша платформа</a:t>
-                      </a:r>
-                      <a:endParaRPr lang="en-US" sz="1100" dirty="0">
-                        <a:latin typeface="Calibri" charset="0"/>
-                        <a:ea typeface="Calibri" charset="0"/>
-                        <a:cs typeface="Calibri" charset="0"/>
-                      </a:endParaRPr>
-                    </a:p>
-                  </a:txBody>
-                  <a:tcPr marL="114300" marR="114300" marT="76200" marB="76200" anchor="ctr">
-                    <a:lnL w="9525" cap="flat" cmpd="sng" algn="ctr">
-                      <a:solidFill>
-                        <a:srgbClr val="D8DEE2"/>
-                      </a:solidFill>
-                      <a:prstDash val="solid"/>
-                      <a:round/>
-                      <a:headEnd type="none" w="med" len="med"/>
-                      <a:tailEnd type="none" w="med" len="med"/>
-                    </a:lnL>
-                    <a:lnR w="9525" cap="flat" cmpd="sng" algn="ctr">
-                      <a:solidFill>
-                        <a:srgbClr val="D8DEE2"/>
-                      </a:solidFill>
-                      <a:prstDash val="solid"/>
-                      <a:round/>
-                      <a:headEnd type="none" w="med" len="med"/>
-                      <a:tailEnd type="none" w="med" len="med"/>
-                    </a:lnR>
-                    <a:lnT w="9525" cap="flat" cmpd="sng" algn="ctr">
-                      <a:solidFill>
-                        <a:srgbClr val="D8DEE2"/>
-                      </a:solidFill>
-                      <a:prstDash val="solid"/>
-                      <a:round/>
-                      <a:headEnd type="none" w="med" len="med"/>
-                      <a:tailEnd type="none" w="med" len="med"/>
-                    </a:lnT>
-                    <a:lnB w="9525" cap="flat" cmpd="sng" algn="ctr">
-                      <a:solidFill>
-                        <a:srgbClr val="D8DEE2"/>
-                      </a:solidFill>
-                      <a:prstDash val="solid"/>
-                      <a:round/>
-                      <a:headEnd type="none" w="med" len="med"/>
-                      <a:tailEnd type="none" w="med" len="med"/>
-                    </a:lnB>
-                    <a:solidFill>
-                      <a:srgbClr val="1A2733"/>
-                    </a:solidFill>
-                  </a:tcPr>
-                </a:tc>
-                <a:tc>
-                  <a:txBody>
-                    <a:bodyPr/>
-                    <a:lstStyle/>
-                    <a:p>
-                      <a:pPr indent="0" marL="0">
-                        <a:buNone/>
-                      </a:pPr>
-                      <a:r>
-                        <a:rPr lang="en-US" sz="1100" b="1" dirty="0">
-                          <a:solidFill>
-                            <a:srgbClr val="FFFFFF"/>
-                          </a:solidFill>
-                          <a:latin typeface="Calibri" pitchFamily="34" charset="0"/>
-                          <a:ea typeface="Calibri" pitchFamily="34" charset="-122"/>
-                          <a:cs typeface="Calibri" pitchFamily="34" charset="-120"/>
-                        </a:rPr>
-                        <a:t>Комментарий</a:t>
-                      </a:r>
-                      <a:endParaRPr lang="en-US" sz="1100" dirty="0">
-                        <a:latin typeface="Calibri" charset="0"/>
-                        <a:ea typeface="Calibri" charset="0"/>
-                        <a:cs typeface="Calibri" charset="0"/>
-                      </a:endParaRPr>
-                    </a:p>
-                  </a:txBody>
-                  <a:tcPr marL="114300" marR="114300" marT="76200" marB="76200" anchor="ctr">
-                    <a:lnL w="9525" cap="flat" cmpd="sng" algn="ctr">
-                      <a:solidFill>
-                        <a:srgbClr val="D8DEE2"/>
-                      </a:solidFill>
-                      <a:prstDash val="solid"/>
-                      <a:round/>
-                      <a:headEnd type="none" w="med" len="med"/>
-                      <a:tailEnd type="none" w="med" len="med"/>
-                    </a:lnL>
-                    <a:lnR w="9525" cap="flat" cmpd="sng" algn="ctr">
-                      <a:solidFill>
-                        <a:srgbClr val="D8DEE2"/>
-                      </a:solidFill>
-                      <a:prstDash val="solid"/>
-                      <a:round/>
-                      <a:headEnd type="none" w="med" len="med"/>
-                      <a:tailEnd type="none" w="med" len="med"/>
-                    </a:lnR>
-                    <a:lnT w="9525" cap="flat" cmpd="sng" algn="ctr">
-                      <a:solidFill>
-                        <a:srgbClr val="D8DEE2"/>
-                      </a:solidFill>
-                      <a:prstDash val="solid"/>
-                      <a:round/>
-                      <a:headEnd type="none" w="med" len="med"/>
-                      <a:tailEnd type="none" w="med" len="med"/>
-                    </a:lnT>
-                    <a:lnB w="9525" cap="flat" cmpd="sng" algn="ctr">
-                      <a:solidFill>
-                        <a:srgbClr val="D8DEE2"/>
-                      </a:solidFill>
-                      <a:prstDash val="solid"/>
-                      <a:round/>
-                      <a:headEnd type="none" w="med" len="med"/>
-                      <a:tailEnd type="none" w="med" len="med"/>
-                    </a:lnB>
-                    <a:solidFill>
-                      <a:srgbClr val="1A2733"/>
-                    </a:solidFill>
-                  </a:tcPr>
-                </a:tc>
-              </a:tr>
-              <a:tr h="525780">
-                <a:tc>
-                  <a:txBody>
-                    <a:bodyPr/>
-                    <a:lstStyle/>
-                    <a:p>
-                      <a:pPr indent="0" marL="0">
-                        <a:buNone/>
-                      </a:pPr>
-                      <a:r>
-                        <a:rPr lang="en-US" sz="1100" b="1" dirty="0">
-                          <a:solidFill>
-                            <a:srgbClr val="1A2733"/>
-                          </a:solidFill>
-                          <a:latin typeface="Calibri" pitchFamily="34" charset="0"/>
-                          <a:ea typeface="Calibri" pitchFamily="34" charset="-122"/>
-                          <a:cs typeface="Calibri" pitchFamily="34" charset="-120"/>
-                        </a:rPr>
-                        <a:t>Источники данных и интеграции</a:t>
-                      </a:r>
-                      <a:endParaRPr lang="en-US" sz="1100" dirty="0">
-                        <a:latin typeface="Calibri" charset="0"/>
-                        <a:ea typeface="Calibri" charset="0"/>
-                        <a:cs typeface="Calibri" charset="0"/>
-                      </a:endParaRPr>
-                    </a:p>
-                  </a:txBody>
-                  <a:tcPr marL="114300" marR="114300" marT="76200" marB="76200" anchor="ctr">
-                    <a:lnL w="9525" cap="flat" cmpd="sng" algn="ctr">
-                      <a:solidFill>
-                        <a:srgbClr val="D8DEE2"/>
-                      </a:solidFill>
-                      <a:prstDash val="solid"/>
-                      <a:round/>
-                      <a:headEnd type="none" w="med" len="med"/>
-                      <a:tailEnd type="none" w="med" len="med"/>
-                    </a:lnL>
-                    <a:lnR w="9525" cap="flat" cmpd="sng" algn="ctr">
-                      <a:solidFill>
-                        <a:srgbClr val="D8DEE2"/>
-                      </a:solidFill>
-                      <a:prstDash val="solid"/>
-                      <a:round/>
-                      <a:headEnd type="none" w="med" len="med"/>
-                      <a:tailEnd type="none" w="med" len="med"/>
-                    </a:lnR>
-                    <a:lnT w="9525" cap="flat" cmpd="sng" algn="ctr">
-                      <a:solidFill>
-                        <a:srgbClr val="D8DEE2"/>
-                      </a:solidFill>
-                      <a:prstDash val="solid"/>
-                      <a:round/>
-                      <a:headEnd type="none" w="med" len="med"/>
-                      <a:tailEnd type="none" w="med" len="med"/>
-                    </a:lnT>
-                    <a:lnB w="9525" cap="flat" cmpd="sng" algn="ctr">
-                      <a:solidFill>
-                        <a:srgbClr val="D8DEE2"/>
-                      </a:solidFill>
-                      <a:prstDash val="solid"/>
-                      <a:round/>
-                      <a:headEnd type="none" w="med" len="med"/>
-                      <a:tailEnd type="none" w="med" len="med"/>
-                    </a:lnB>
-                  </a:tcPr>
-                </a:tc>
-                <a:tc>
-                  <a:txBody>
-                    <a:bodyPr/>
-                    <a:lstStyle/>
-                    <a:p>
-                      <a:pPr algn="ctr" indent="0" marL="0">
-                        <a:buNone/>
-                      </a:pPr>
-                      <a:r>
-                        <a:rPr lang="en-US" sz="1100" b="1" dirty="0">
-                          <a:solidFill>
-                            <a:srgbClr val="1E7B4D"/>
-                          </a:solidFill>
-                          <a:latin typeface="Calibri" pitchFamily="34" charset="0"/>
-                          <a:ea typeface="Calibri" pitchFamily="34" charset="-122"/>
-                          <a:cs typeface="Calibri" pitchFamily="34" charset="-120"/>
-                        </a:rPr>
-                        <a:t>Есть</a:t>
-                      </a:r>
-                      <a:endParaRPr lang="en-US" sz="1100" dirty="0">
-                        <a:latin typeface="Calibri" charset="0"/>
-                        <a:ea typeface="Calibri" charset="0"/>
-                        <a:cs typeface="Calibri" charset="0"/>
-                      </a:endParaRPr>
-                    </a:p>
-                  </a:txBody>
-                  <a:tcPr marL="114300" marR="114300" marT="76200" marB="76200" anchor="ctr">
-                    <a:lnL w="9525" cap="flat" cmpd="sng" algn="ctr">
-                      <a:solidFill>
-                        <a:srgbClr val="D8DEE2"/>
-                      </a:solidFill>
-                      <a:prstDash val="solid"/>
-                      <a:round/>
-                      <a:headEnd type="none" w="med" len="med"/>
-                      <a:tailEnd type="none" w="med" len="med"/>
-                    </a:lnL>
-                    <a:lnR w="9525" cap="flat" cmpd="sng" algn="ctr">
-                      <a:solidFill>
-                        <a:srgbClr val="D8DEE2"/>
-                      </a:solidFill>
-                      <a:prstDash val="solid"/>
-                      <a:round/>
-                      <a:headEnd type="none" w="med" len="med"/>
-                      <a:tailEnd type="none" w="med" len="med"/>
-                    </a:lnR>
-                    <a:lnT w="9525" cap="flat" cmpd="sng" algn="ctr">
-                      <a:solidFill>
-                        <a:srgbClr val="D8DEE2"/>
-                      </a:solidFill>
-                      <a:prstDash val="solid"/>
-                      <a:round/>
-                      <a:headEnd type="none" w="med" len="med"/>
-                      <a:tailEnd type="none" w="med" len="med"/>
-                    </a:lnT>
-                    <a:lnB w="9525" cap="flat" cmpd="sng" algn="ctr">
-                      <a:solidFill>
-                        <a:srgbClr val="D8DEE2"/>
-                      </a:solidFill>
-                      <a:prstDash val="solid"/>
-                      <a:round/>
-                      <a:headEnd type="none" w="med" len="med"/>
-                      <a:tailEnd type="none" w="med" len="med"/>
-                    </a:lnB>
-                  </a:tcPr>
-                </a:tc>
-                <a:tc>
-                  <a:txBody>
-                    <a:bodyPr/>
-                    <a:lstStyle/>
-                    <a:p>
-                      <a:pPr indent="0" marL="0">
-                        <a:buNone/>
-                      </a:pPr>
-                      <a:r>
-                        <a:rPr lang="en-US" sz="1050" dirty="0">
-                          <a:solidFill>
-                            <a:srgbClr val="5B6B7A"/>
-                          </a:solidFill>
-                          <a:latin typeface="Calibri" pitchFamily="34" charset="0"/>
-                          <a:ea typeface="Calibri" pitchFamily="34" charset="-122"/>
-                          <a:cs typeface="Calibri" pitchFamily="34" charset="-120"/>
-                        </a:rPr>
-                        <a:t>Совместимость с ещё одним форматом API — в доработке</a:t>
-                      </a:r>
-                      <a:endParaRPr lang="en-US" sz="1050" dirty="0">
-                        <a:latin typeface="Calibri" charset="0"/>
-                        <a:ea typeface="Calibri" charset="0"/>
-                        <a:cs typeface="Calibri" charset="0"/>
-                      </a:endParaRPr>
-                    </a:p>
-                  </a:txBody>
-                  <a:tcPr marL="114300" marR="114300" marT="76200" marB="76200" anchor="ctr">
-                    <a:lnL w="9525" cap="flat" cmpd="sng" algn="ctr">
-                      <a:solidFill>
-                        <a:srgbClr val="D8DEE2"/>
-                      </a:solidFill>
-                      <a:prstDash val="solid"/>
-                      <a:round/>
-                      <a:headEnd type="none" w="med" len="med"/>
-                      <a:tailEnd type="none" w="med" len="med"/>
-                    </a:lnL>
-                    <a:lnR w="9525" cap="flat" cmpd="sng" algn="ctr">
-                      <a:solidFill>
-                        <a:srgbClr val="D8DEE2"/>
-                      </a:solidFill>
-                      <a:prstDash val="solid"/>
-                      <a:round/>
-                      <a:headEnd type="none" w="med" len="med"/>
-                      <a:tailEnd type="none" w="med" len="med"/>
-                    </a:lnR>
-                    <a:lnT w="9525" cap="flat" cmpd="sng" algn="ctr">
-                      <a:solidFill>
-                        <a:srgbClr val="D8DEE2"/>
-                      </a:solidFill>
-                      <a:prstDash val="solid"/>
-                      <a:round/>
-                      <a:headEnd type="none" w="med" len="med"/>
-                      <a:tailEnd type="none" w="med" len="med"/>
-                    </a:lnT>
-                    <a:lnB w="9525" cap="flat" cmpd="sng" algn="ctr">
-                      <a:solidFill>
-                        <a:srgbClr val="D8DEE2"/>
-                      </a:solidFill>
-                      <a:prstDash val="solid"/>
-                      <a:round/>
-                      <a:headEnd type="none" w="med" len="med"/>
-                      <a:tailEnd type="none" w="med" len="med"/>
-                    </a:lnB>
-                  </a:tcPr>
-                </a:tc>
-              </a:tr>
-              <a:tr h="525780">
-                <a:tc>
-                  <a:txBody>
-                    <a:bodyPr/>
-                    <a:lstStyle/>
-                    <a:p>
-                      <a:pPr indent="0" marL="0">
-                        <a:buNone/>
-                      </a:pPr>
-                      <a:r>
-                        <a:rPr lang="en-US" sz="1100" b="1" dirty="0">
-                          <a:solidFill>
-                            <a:srgbClr val="1A2733"/>
-                          </a:solidFill>
-                          <a:latin typeface="Calibri" pitchFamily="34" charset="0"/>
-                          <a:ea typeface="Calibri" pitchFamily="34" charset="-122"/>
-                          <a:cs typeface="Calibri" pitchFamily="34" charset="-120"/>
-                        </a:rPr>
-                        <a:t>Единый справочник показателей</a:t>
-                      </a:r>
-                      <a:endParaRPr lang="en-US" sz="1100" dirty="0">
-                        <a:latin typeface="Calibri" charset="0"/>
-                        <a:ea typeface="Calibri" charset="0"/>
-                        <a:cs typeface="Calibri" charset="0"/>
-                      </a:endParaRPr>
-                    </a:p>
-                  </a:txBody>
-                  <a:tcPr marL="114300" marR="114300" marT="76200" marB="76200" anchor="ctr">
-                    <a:lnL w="9525" cap="flat" cmpd="sng" algn="ctr">
-                      <a:solidFill>
-                        <a:srgbClr val="D8DEE2"/>
-                      </a:solidFill>
-                      <a:prstDash val="solid"/>
-                      <a:round/>
-                      <a:headEnd type="none" w="med" len="med"/>
-                      <a:tailEnd type="none" w="med" len="med"/>
-                    </a:lnL>
-                    <a:lnR w="9525" cap="flat" cmpd="sng" algn="ctr">
-                      <a:solidFill>
-                        <a:srgbClr val="D8DEE2"/>
-                      </a:solidFill>
-                      <a:prstDash val="solid"/>
-                      <a:round/>
-                      <a:headEnd type="none" w="med" len="med"/>
-                      <a:tailEnd type="none" w="med" len="med"/>
-                    </a:lnR>
-                    <a:lnT w="9525" cap="flat" cmpd="sng" algn="ctr">
-                      <a:solidFill>
-                        <a:srgbClr val="D8DEE2"/>
-                      </a:solidFill>
-                      <a:prstDash val="solid"/>
-                      <a:round/>
-                      <a:headEnd type="none" w="med" len="med"/>
-                      <a:tailEnd type="none" w="med" len="med"/>
-                    </a:lnT>
-                    <a:lnB w="9525" cap="flat" cmpd="sng" algn="ctr">
-                      <a:solidFill>
-                        <a:srgbClr val="D8DEE2"/>
-                      </a:solidFill>
-                      <a:prstDash val="solid"/>
-                      <a:round/>
-                      <a:headEnd type="none" w="med" len="med"/>
-                      <a:tailEnd type="none" w="med" len="med"/>
-                    </a:lnB>
-                  </a:tcPr>
-                </a:tc>
-                <a:tc>
-                  <a:txBody>
-                    <a:bodyPr/>
-                    <a:lstStyle/>
-                    <a:p>
-                      <a:pPr algn="ctr" indent="0" marL="0">
-                        <a:buNone/>
-                      </a:pPr>
-                      <a:r>
-                        <a:rPr lang="en-US" sz="1100" b="1" dirty="0">
-                          <a:solidFill>
-                            <a:srgbClr val="C97A1A"/>
-                          </a:solidFill>
-                          <a:latin typeface="Calibri" pitchFamily="34" charset="0"/>
-                          <a:ea typeface="Calibri" pitchFamily="34" charset="-122"/>
-                          <a:cs typeface="Calibri" pitchFamily="34" charset="-120"/>
-                        </a:rPr>
-                        <a:t>Скоро</a:t>
-                      </a:r>
-                      <a:endParaRPr lang="en-US" sz="1100" dirty="0">
-                        <a:latin typeface="Calibri" charset="0"/>
-                        <a:ea typeface="Calibri" charset="0"/>
-                        <a:cs typeface="Calibri" charset="0"/>
-                      </a:endParaRPr>
-                    </a:p>
-                  </a:txBody>
-                  <a:tcPr marL="114300" marR="114300" marT="76200" marB="76200" anchor="ctr">
-                    <a:lnL w="9525" cap="flat" cmpd="sng" algn="ctr">
-                      <a:solidFill>
-                        <a:srgbClr val="D8DEE2"/>
-                      </a:solidFill>
-                      <a:prstDash val="solid"/>
-                      <a:round/>
-                      <a:headEnd type="none" w="med" len="med"/>
-                      <a:tailEnd type="none" w="med" len="med"/>
-                    </a:lnL>
-                    <a:lnR w="9525" cap="flat" cmpd="sng" algn="ctr">
-                      <a:solidFill>
-                        <a:srgbClr val="D8DEE2"/>
-                      </a:solidFill>
-                      <a:prstDash val="solid"/>
-                      <a:round/>
-                      <a:headEnd type="none" w="med" len="med"/>
-                      <a:tailEnd type="none" w="med" len="med"/>
-                    </a:lnR>
-                    <a:lnT w="9525" cap="flat" cmpd="sng" algn="ctr">
-                      <a:solidFill>
-                        <a:srgbClr val="D8DEE2"/>
-                      </a:solidFill>
-                      <a:prstDash val="solid"/>
-                      <a:round/>
-                      <a:headEnd type="none" w="med" len="med"/>
-                      <a:tailEnd type="none" w="med" len="med"/>
-                    </a:lnT>
-                    <a:lnB w="9525" cap="flat" cmpd="sng" algn="ctr">
-                      <a:solidFill>
-                        <a:srgbClr val="D8DEE2"/>
-                      </a:solidFill>
-                      <a:prstDash val="solid"/>
-                      <a:round/>
-                      <a:headEnd type="none" w="med" len="med"/>
-                      <a:tailEnd type="none" w="med" len="med"/>
-                    </a:lnB>
-                  </a:tcPr>
-                </a:tc>
-                <a:tc>
-                  <a:txBody>
-                    <a:bodyPr/>
-                    <a:lstStyle/>
-                    <a:p>
-                      <a:pPr indent="0" marL="0">
-                        <a:buNone/>
-                      </a:pPr>
-                      <a:r>
-                        <a:rPr lang="en-US" sz="1050" dirty="0">
-                          <a:solidFill>
-                            <a:srgbClr val="5B6B7A"/>
-                          </a:solidFill>
-                          <a:latin typeface="Calibri" pitchFamily="34" charset="0"/>
-                          <a:ea typeface="Calibri" pitchFamily="34" charset="-122"/>
-                          <a:cs typeface="Calibri" pitchFamily="34" charset="-120"/>
-                        </a:rPr>
-                        <a:t>В разработке</a:t>
-                      </a:r>
-                      <a:endParaRPr lang="en-US" sz="1050" dirty="0">
-                        <a:latin typeface="Calibri" charset="0"/>
-                        <a:ea typeface="Calibri" charset="0"/>
-                        <a:cs typeface="Calibri" charset="0"/>
-                      </a:endParaRPr>
-                    </a:p>
-                  </a:txBody>
-                  <a:tcPr marL="114300" marR="114300" marT="76200" marB="76200" anchor="ctr">
-                    <a:lnL w="9525" cap="flat" cmpd="sng" algn="ctr">
-                      <a:solidFill>
-                        <a:srgbClr val="D8DEE2"/>
-                      </a:solidFill>
-                      <a:prstDash val="solid"/>
-                      <a:round/>
-                      <a:headEnd type="none" w="med" len="med"/>
-                      <a:tailEnd type="none" w="med" len="med"/>
-                    </a:lnL>
-                    <a:lnR w="9525" cap="flat" cmpd="sng" algn="ctr">
-                      <a:solidFill>
-                        <a:srgbClr val="D8DEE2"/>
-                      </a:solidFill>
-                      <a:prstDash val="solid"/>
-                      <a:round/>
-                      <a:headEnd type="none" w="med" len="med"/>
-                      <a:tailEnd type="none" w="med" len="med"/>
-                    </a:lnR>
-                    <a:lnT w="9525" cap="flat" cmpd="sng" algn="ctr">
-                      <a:solidFill>
-                        <a:srgbClr val="D8DEE2"/>
-                      </a:solidFill>
-                      <a:prstDash val="solid"/>
-                      <a:round/>
-                      <a:headEnd type="none" w="med" len="med"/>
-                      <a:tailEnd type="none" w="med" len="med"/>
-                    </a:lnT>
-                    <a:lnB w="9525" cap="flat" cmpd="sng" algn="ctr">
-                      <a:solidFill>
-                        <a:srgbClr val="D8DEE2"/>
-                      </a:solidFill>
-                      <a:prstDash val="solid"/>
-                      <a:round/>
-                      <a:headEnd type="none" w="med" len="med"/>
-                      <a:tailEnd type="none" w="med" len="med"/>
-                    </a:lnB>
-                  </a:tcPr>
-                </a:tc>
-              </a:tr>
-              <a:tr h="525780">
-                <a:tc>
-                  <a:txBody>
-                    <a:bodyPr/>
-                    <a:lstStyle/>
-                    <a:p>
-                      <a:pPr indent="0" marL="0">
-                        <a:buNone/>
-                      </a:pPr>
-                      <a:r>
-                        <a:rPr lang="en-US" sz="1100" b="1" dirty="0">
-                          <a:solidFill>
-                            <a:srgbClr val="1A2733"/>
-                          </a:solidFill>
-                          <a:latin typeface="Calibri" pitchFamily="34" charset="0"/>
-                          <a:ea typeface="Calibri" pitchFamily="34" charset="-122"/>
-                          <a:cs typeface="Calibri" pitchFamily="34" charset="-120"/>
-                        </a:rPr>
-                        <a:t>Настройка и поставка</a:t>
-                      </a:r>
-                      <a:endParaRPr lang="en-US" sz="1100" dirty="0">
-                        <a:latin typeface="Calibri" charset="0"/>
-                        <a:ea typeface="Calibri" charset="0"/>
-                        <a:cs typeface="Calibri" charset="0"/>
-                      </a:endParaRPr>
-                    </a:p>
-                  </a:txBody>
-                  <a:tcPr marL="114300" marR="114300" marT="76200" marB="76200" anchor="ctr">
-                    <a:lnL w="9525" cap="flat" cmpd="sng" algn="ctr">
-                      <a:solidFill>
-                        <a:srgbClr val="D8DEE2"/>
-                      </a:solidFill>
-                      <a:prstDash val="solid"/>
-                      <a:round/>
-                      <a:headEnd type="none" w="med" len="med"/>
-                      <a:tailEnd type="none" w="med" len="med"/>
-                    </a:lnL>
-                    <a:lnR w="9525" cap="flat" cmpd="sng" algn="ctr">
-                      <a:solidFill>
-                        <a:srgbClr val="D8DEE2"/>
-                      </a:solidFill>
-                      <a:prstDash val="solid"/>
-                      <a:round/>
-                      <a:headEnd type="none" w="med" len="med"/>
-                      <a:tailEnd type="none" w="med" len="med"/>
-                    </a:lnR>
-                    <a:lnT w="9525" cap="flat" cmpd="sng" algn="ctr">
-                      <a:solidFill>
-                        <a:srgbClr val="D8DEE2"/>
-                      </a:solidFill>
-                      <a:prstDash val="solid"/>
-                      <a:round/>
-                      <a:headEnd type="none" w="med" len="med"/>
-                      <a:tailEnd type="none" w="med" len="med"/>
-                    </a:lnT>
-                    <a:lnB w="9525" cap="flat" cmpd="sng" algn="ctr">
-                      <a:solidFill>
-                        <a:srgbClr val="D8DEE2"/>
-                      </a:solidFill>
-                      <a:prstDash val="solid"/>
-                      <a:round/>
-                      <a:headEnd type="none" w="med" len="med"/>
-                      <a:tailEnd type="none" w="med" len="med"/>
-                    </a:lnB>
-                  </a:tcPr>
-                </a:tc>
-                <a:tc>
-                  <a:txBody>
-                    <a:bodyPr/>
-                    <a:lstStyle/>
-                    <a:p>
-                      <a:pPr algn="ctr" indent="0" marL="0">
-                        <a:buNone/>
-                      </a:pPr>
-                      <a:r>
-                        <a:rPr lang="en-US" sz="1100" b="1" dirty="0">
-                          <a:solidFill>
-                            <a:srgbClr val="C97A1A"/>
-                          </a:solidFill>
-                          <a:latin typeface="Calibri" pitchFamily="34" charset="0"/>
-                          <a:ea typeface="Calibri" pitchFamily="34" charset="-122"/>
-                          <a:cs typeface="Calibri" pitchFamily="34" charset="-120"/>
-                        </a:rPr>
-                        <a:t>Скоро</a:t>
-                      </a:r>
-                      <a:endParaRPr lang="en-US" sz="1100" dirty="0">
-                        <a:latin typeface="Calibri" charset="0"/>
-                        <a:ea typeface="Calibri" charset="0"/>
-                        <a:cs typeface="Calibri" charset="0"/>
-                      </a:endParaRPr>
-                    </a:p>
-                  </a:txBody>
-                  <a:tcPr marL="114300" marR="114300" marT="76200" marB="76200" anchor="ctr">
-                    <a:lnL w="9525" cap="flat" cmpd="sng" algn="ctr">
-                      <a:solidFill>
-                        <a:srgbClr val="D8DEE2"/>
-                      </a:solidFill>
-                      <a:prstDash val="solid"/>
-                      <a:round/>
-                      <a:headEnd type="none" w="med" len="med"/>
-                      <a:tailEnd type="none" w="med" len="med"/>
-                    </a:lnL>
-                    <a:lnR w="9525" cap="flat" cmpd="sng" algn="ctr">
-                      <a:solidFill>
-                        <a:srgbClr val="D8DEE2"/>
-                      </a:solidFill>
-                      <a:prstDash val="solid"/>
-                      <a:round/>
-                      <a:headEnd type="none" w="med" len="med"/>
-                      <a:tailEnd type="none" w="med" len="med"/>
-                    </a:lnR>
-                    <a:lnT w="9525" cap="flat" cmpd="sng" algn="ctr">
-                      <a:solidFill>
-                        <a:srgbClr val="D8DEE2"/>
-                      </a:solidFill>
-                      <a:prstDash val="solid"/>
-                      <a:round/>
-                      <a:headEnd type="none" w="med" len="med"/>
-                      <a:tailEnd type="none" w="med" len="med"/>
-                    </a:lnT>
-                    <a:lnB w="9525" cap="flat" cmpd="sng" algn="ctr">
-                      <a:solidFill>
-                        <a:srgbClr val="D8DEE2"/>
-                      </a:solidFill>
-                      <a:prstDash val="solid"/>
-                      <a:round/>
-                      <a:headEnd type="none" w="med" len="med"/>
-                      <a:tailEnd type="none" w="med" len="med"/>
-                    </a:lnB>
-                  </a:tcPr>
-                </a:tc>
-                <a:tc>
-                  <a:txBody>
-                    <a:bodyPr/>
-                    <a:lstStyle/>
-                    <a:p>
-                      <a:pPr indent="0" marL="0">
-                        <a:buNone/>
-                      </a:pPr>
-                      <a:r>
-                        <a:rPr lang="en-US" sz="1050" dirty="0">
-                          <a:solidFill>
-                            <a:srgbClr val="5B6B7A"/>
-                          </a:solidFill>
-                          <a:latin typeface="Calibri" pitchFamily="34" charset="0"/>
-                          <a:ea typeface="Calibri" pitchFamily="34" charset="-122"/>
-                          <a:cs typeface="Calibri" pitchFamily="34" charset="-120"/>
-                        </a:rPr>
-                        <a:t>В разработке, гейт для демо</a:t>
-                      </a:r>
-                      <a:endParaRPr lang="en-US" sz="1050" dirty="0">
-                        <a:latin typeface="Calibri" charset="0"/>
-                        <a:ea typeface="Calibri" charset="0"/>
-                        <a:cs typeface="Calibri" charset="0"/>
-                      </a:endParaRPr>
-                    </a:p>
-                  </a:txBody>
-                  <a:tcPr marL="114300" marR="114300" marT="76200" marB="76200" anchor="ctr">
-                    <a:lnL w="9525" cap="flat" cmpd="sng" algn="ctr">
-                      <a:solidFill>
-                        <a:srgbClr val="D8DEE2"/>
-                      </a:solidFill>
-                      <a:prstDash val="solid"/>
-                      <a:round/>
-                      <a:headEnd type="none" w="med" len="med"/>
-                      <a:tailEnd type="none" w="med" len="med"/>
-                    </a:lnL>
-                    <a:lnR w="9525" cap="flat" cmpd="sng" algn="ctr">
-                      <a:solidFill>
-                        <a:srgbClr val="D8DEE2"/>
-                      </a:solidFill>
-                      <a:prstDash val="solid"/>
-                      <a:round/>
-                      <a:headEnd type="none" w="med" len="med"/>
-                      <a:tailEnd type="none" w="med" len="med"/>
-                    </a:lnR>
-                    <a:lnT w="9525" cap="flat" cmpd="sng" algn="ctr">
-                      <a:solidFill>
-                        <a:srgbClr val="D8DEE2"/>
-                      </a:solidFill>
-                      <a:prstDash val="solid"/>
-                      <a:round/>
-                      <a:headEnd type="none" w="med" len="med"/>
-                      <a:tailEnd type="none" w="med" len="med"/>
-                    </a:lnT>
-                    <a:lnB w="9525" cap="flat" cmpd="sng" algn="ctr">
-                      <a:solidFill>
-                        <a:srgbClr val="D8DEE2"/>
-                      </a:solidFill>
-                      <a:prstDash val="solid"/>
-                      <a:round/>
-                      <a:headEnd type="none" w="med" len="med"/>
-                      <a:tailEnd type="none" w="med" len="med"/>
-                    </a:lnB>
-                  </a:tcPr>
-                </a:tc>
-              </a:tr>
-              <a:tr h="525780">
-                <a:tc>
-                  <a:txBody>
-                    <a:bodyPr/>
-                    <a:lstStyle/>
-                    <a:p>
-                      <a:pPr indent="0" marL="0">
-                        <a:buNone/>
-                      </a:pPr>
-                      <a:r>
-                        <a:rPr lang="en-US" sz="1100" b="1" dirty="0">
-                          <a:solidFill>
-                            <a:srgbClr val="1A2733"/>
-                          </a:solidFill>
-                          <a:latin typeface="Calibri" pitchFamily="34" charset="0"/>
-                          <a:ea typeface="Calibri" pitchFamily="34" charset="-122"/>
-                          <a:cs typeface="Calibri" pitchFamily="34" charset="-120"/>
-                        </a:rPr>
-                        <a:t>Защита данных и приватность</a:t>
-                      </a:r>
-                      <a:endParaRPr lang="en-US" sz="1100" dirty="0">
-                        <a:latin typeface="Calibri" charset="0"/>
-                        <a:ea typeface="Calibri" charset="0"/>
-                        <a:cs typeface="Calibri" charset="0"/>
-                      </a:endParaRPr>
-                    </a:p>
-                  </a:txBody>
-                  <a:tcPr marL="114300" marR="114300" marT="76200" marB="76200" anchor="ctr">
-                    <a:lnL w="9525" cap="flat" cmpd="sng" algn="ctr">
-                      <a:solidFill>
-                        <a:srgbClr val="D8DEE2"/>
-                      </a:solidFill>
-                      <a:prstDash val="solid"/>
-                      <a:round/>
-                      <a:headEnd type="none" w="med" len="med"/>
-                      <a:tailEnd type="none" w="med" len="med"/>
-                    </a:lnL>
-                    <a:lnR w="9525" cap="flat" cmpd="sng" algn="ctr">
-                      <a:solidFill>
-                        <a:srgbClr val="D8DEE2"/>
-                      </a:solidFill>
-                      <a:prstDash val="solid"/>
-                      <a:round/>
-                      <a:headEnd type="none" w="med" len="med"/>
-                      <a:tailEnd type="none" w="med" len="med"/>
-                    </a:lnR>
-                    <a:lnT w="9525" cap="flat" cmpd="sng" algn="ctr">
-                      <a:solidFill>
-                        <a:srgbClr val="D8DEE2"/>
-                      </a:solidFill>
-                      <a:prstDash val="solid"/>
-                      <a:round/>
-                      <a:headEnd type="none" w="med" len="med"/>
-                      <a:tailEnd type="none" w="med" len="med"/>
-                    </a:lnT>
-                    <a:lnB w="9525" cap="flat" cmpd="sng" algn="ctr">
-                      <a:solidFill>
-                        <a:srgbClr val="D8DEE2"/>
-                      </a:solidFill>
-                      <a:prstDash val="solid"/>
-                      <a:round/>
-                      <a:headEnd type="none" w="med" len="med"/>
-                      <a:tailEnd type="none" w="med" len="med"/>
-                    </a:lnB>
-                  </a:tcPr>
-                </a:tc>
-                <a:tc>
-                  <a:txBody>
-                    <a:bodyPr/>
-                    <a:lstStyle/>
-                    <a:p>
-                      <a:pPr algn="ctr" indent="0" marL="0">
-                        <a:buNone/>
-                      </a:pPr>
-                      <a:r>
-                        <a:rPr lang="en-US" sz="1100" b="1" dirty="0">
-                          <a:solidFill>
-                            <a:srgbClr val="1E7B4D"/>
-                          </a:solidFill>
-                          <a:latin typeface="Calibri" pitchFamily="34" charset="0"/>
-                          <a:ea typeface="Calibri" pitchFamily="34" charset="-122"/>
-                          <a:cs typeface="Calibri" pitchFamily="34" charset="-120"/>
-                        </a:rPr>
-                        <a:t>Есть</a:t>
-                      </a:r>
-                      <a:endParaRPr lang="en-US" sz="1100" dirty="0">
-                        <a:latin typeface="Calibri" charset="0"/>
-                        <a:ea typeface="Calibri" charset="0"/>
-                        <a:cs typeface="Calibri" charset="0"/>
-                      </a:endParaRPr>
-                    </a:p>
-                  </a:txBody>
-                  <a:tcPr marL="114300" marR="114300" marT="76200" marB="76200" anchor="ctr">
-                    <a:lnL w="9525" cap="flat" cmpd="sng" algn="ctr">
-                      <a:solidFill>
-                        <a:srgbClr val="D8DEE2"/>
-                      </a:solidFill>
-                      <a:prstDash val="solid"/>
-                      <a:round/>
-                      <a:headEnd type="none" w="med" len="med"/>
-                      <a:tailEnd type="none" w="med" len="med"/>
-                    </a:lnL>
-                    <a:lnR w="9525" cap="flat" cmpd="sng" algn="ctr">
-                      <a:solidFill>
-                        <a:srgbClr val="D8DEE2"/>
-                      </a:solidFill>
-                      <a:prstDash val="solid"/>
-                      <a:round/>
-                      <a:headEnd type="none" w="med" len="med"/>
-                      <a:tailEnd type="none" w="med" len="med"/>
-                    </a:lnR>
-                    <a:lnT w="9525" cap="flat" cmpd="sng" algn="ctr">
-                      <a:solidFill>
-                        <a:srgbClr val="D8DEE2"/>
-                      </a:solidFill>
-                      <a:prstDash val="solid"/>
-                      <a:round/>
-                      <a:headEnd type="none" w="med" len="med"/>
-                      <a:tailEnd type="none" w="med" len="med"/>
-                    </a:lnT>
-                    <a:lnB w="9525" cap="flat" cmpd="sng" algn="ctr">
-                      <a:solidFill>
-                        <a:srgbClr val="D8DEE2"/>
-                      </a:solidFill>
-                      <a:prstDash val="solid"/>
-                      <a:round/>
-                      <a:headEnd type="none" w="med" len="med"/>
-                      <a:tailEnd type="none" w="med" len="med"/>
-                    </a:lnB>
-                  </a:tcPr>
-                </a:tc>
-                <a:tc>
-                  <a:txBody>
-                    <a:bodyPr/>
-                    <a:lstStyle/>
-                    <a:p>
-                      <a:pPr indent="0" marL="0">
-                        <a:buNone/>
-                      </a:pPr>
-                      <a:r>
-                        <a:rPr lang="en-US" sz="1050" dirty="0">
-                          <a:solidFill>
-                            <a:srgbClr val="5B6B7A"/>
-                          </a:solidFill>
-                          <a:latin typeface="Calibri" pitchFamily="34" charset="0"/>
-                          <a:ea typeface="Calibri" pitchFamily="34" charset="-122"/>
-                          <a:cs typeface="Calibri" pitchFamily="34" charset="-120"/>
-                        </a:rPr>
-                        <a:t>Маскирование и защита ключей — готово; оповещения о качестве — скоро</a:t>
-                      </a:r>
-                      <a:endParaRPr lang="en-US" sz="1050" dirty="0">
-                        <a:latin typeface="Calibri" charset="0"/>
-                        <a:ea typeface="Calibri" charset="0"/>
-                        <a:cs typeface="Calibri" charset="0"/>
-                      </a:endParaRPr>
-                    </a:p>
-                  </a:txBody>
-                  <a:tcPr marL="114300" marR="114300" marT="76200" marB="76200" anchor="ctr">
-                    <a:lnL w="9525" cap="flat" cmpd="sng" algn="ctr">
-                      <a:solidFill>
-                        <a:srgbClr val="D8DEE2"/>
-                      </a:solidFill>
-                      <a:prstDash val="solid"/>
-                      <a:round/>
-                      <a:headEnd type="none" w="med" len="med"/>
-                      <a:tailEnd type="none" w="med" len="med"/>
-                    </a:lnL>
-                    <a:lnR w="9525" cap="flat" cmpd="sng" algn="ctr">
-                      <a:solidFill>
-                        <a:srgbClr val="D8DEE2"/>
-                      </a:solidFill>
-                      <a:prstDash val="solid"/>
-                      <a:round/>
-                      <a:headEnd type="none" w="med" len="med"/>
-                      <a:tailEnd type="none" w="med" len="med"/>
-                    </a:lnR>
-                    <a:lnT w="9525" cap="flat" cmpd="sng" algn="ctr">
-                      <a:solidFill>
-                        <a:srgbClr val="D8DEE2"/>
-                      </a:solidFill>
-                      <a:prstDash val="solid"/>
-                      <a:round/>
-                      <a:headEnd type="none" w="med" len="med"/>
-                      <a:tailEnd type="none" w="med" len="med"/>
-                    </a:lnT>
-                    <a:lnB w="9525" cap="flat" cmpd="sng" algn="ctr">
-                      <a:solidFill>
-                        <a:srgbClr val="D8DEE2"/>
-                      </a:solidFill>
-                      <a:prstDash val="solid"/>
-                      <a:round/>
-                      <a:headEnd type="none" w="med" len="med"/>
-                      <a:tailEnd type="none" w="med" len="med"/>
-                    </a:lnB>
-                  </a:tcPr>
-                </a:tc>
-              </a:tr>
-              <a:tr h="525780">
-                <a:tc>
-                  <a:txBody>
-                    <a:bodyPr/>
-                    <a:lstStyle/>
-                    <a:p>
-                      <a:pPr indent="0" marL="0">
-                        <a:buNone/>
-                      </a:pPr>
-                      <a:r>
-                        <a:rPr lang="en-US" sz="1100" b="1" dirty="0">
-                          <a:solidFill>
-                            <a:srgbClr val="1A2733"/>
-                          </a:solidFill>
-                          <a:latin typeface="Calibri" pitchFamily="34" charset="0"/>
-                          <a:ea typeface="Calibri" pitchFamily="34" charset="-122"/>
-                          <a:cs typeface="Calibri" pitchFamily="34" charset="-120"/>
-                        </a:rPr>
-                        <a:t>ИИ-агенты и контроль действий</a:t>
-                      </a:r>
-                      <a:endParaRPr lang="en-US" sz="1100" dirty="0">
-                        <a:latin typeface="Calibri" charset="0"/>
-                        <a:ea typeface="Calibri" charset="0"/>
-                        <a:cs typeface="Calibri" charset="0"/>
-                      </a:endParaRPr>
-                    </a:p>
-                  </a:txBody>
-                  <a:tcPr marL="114300" marR="114300" marT="76200" marB="76200" anchor="ctr">
-                    <a:lnL w="9525" cap="flat" cmpd="sng" algn="ctr">
-                      <a:solidFill>
-                        <a:srgbClr val="D8DEE2"/>
-                      </a:solidFill>
-                      <a:prstDash val="solid"/>
-                      <a:round/>
-                      <a:headEnd type="none" w="med" len="med"/>
-                      <a:tailEnd type="none" w="med" len="med"/>
-                    </a:lnL>
-                    <a:lnR w="9525" cap="flat" cmpd="sng" algn="ctr">
-                      <a:solidFill>
-                        <a:srgbClr val="D8DEE2"/>
-                      </a:solidFill>
-                      <a:prstDash val="solid"/>
-                      <a:round/>
-                      <a:headEnd type="none" w="med" len="med"/>
-                      <a:tailEnd type="none" w="med" len="med"/>
-                    </a:lnR>
-                    <a:lnT w="9525" cap="flat" cmpd="sng" algn="ctr">
-                      <a:solidFill>
-                        <a:srgbClr val="D8DEE2"/>
-                      </a:solidFill>
-                      <a:prstDash val="solid"/>
-                      <a:round/>
-                      <a:headEnd type="none" w="med" len="med"/>
-                      <a:tailEnd type="none" w="med" len="med"/>
-                    </a:lnT>
-                    <a:lnB w="9525" cap="flat" cmpd="sng" algn="ctr">
-                      <a:solidFill>
-                        <a:srgbClr val="D8DEE2"/>
-                      </a:solidFill>
-                      <a:prstDash val="solid"/>
-                      <a:round/>
-                      <a:headEnd type="none" w="med" len="med"/>
-                      <a:tailEnd type="none" w="med" len="med"/>
-                    </a:lnB>
-                  </a:tcPr>
-                </a:tc>
-                <a:tc>
-                  <a:txBody>
-                    <a:bodyPr/>
-                    <a:lstStyle/>
-                    <a:p>
-                      <a:pPr algn="ctr" indent="0" marL="0">
-                        <a:buNone/>
-                      </a:pPr>
-                      <a:r>
-                        <a:rPr lang="en-US" sz="1100" b="1" dirty="0">
-                          <a:solidFill>
-                            <a:srgbClr val="C97A1A"/>
-                          </a:solidFill>
-                          <a:latin typeface="Calibri" pitchFamily="34" charset="0"/>
-                          <a:ea typeface="Calibri" pitchFamily="34" charset="-122"/>
-                          <a:cs typeface="Calibri" pitchFamily="34" charset="-120"/>
-                        </a:rPr>
-                        <a:t>Скоро</a:t>
-                      </a:r>
-                      <a:endParaRPr lang="en-US" sz="1100" dirty="0">
-                        <a:latin typeface="Calibri" charset="0"/>
-                        <a:ea typeface="Calibri" charset="0"/>
-                        <a:cs typeface="Calibri" charset="0"/>
-                      </a:endParaRPr>
-                    </a:p>
-                  </a:txBody>
-                  <a:tcPr marL="114300" marR="114300" marT="76200" marB="76200" anchor="ctr">
-                    <a:lnL w="9525" cap="flat" cmpd="sng" algn="ctr">
-                      <a:solidFill>
-                        <a:srgbClr val="D8DEE2"/>
-                      </a:solidFill>
-                      <a:prstDash val="solid"/>
-                      <a:round/>
-                      <a:headEnd type="none" w="med" len="med"/>
-                      <a:tailEnd type="none" w="med" len="med"/>
-                    </a:lnL>
-                    <a:lnR w="9525" cap="flat" cmpd="sng" algn="ctr">
-                      <a:solidFill>
-                        <a:srgbClr val="D8DEE2"/>
-                      </a:solidFill>
-                      <a:prstDash val="solid"/>
-                      <a:round/>
-                      <a:headEnd type="none" w="med" len="med"/>
-                      <a:tailEnd type="none" w="med" len="med"/>
-                    </a:lnR>
-                    <a:lnT w="9525" cap="flat" cmpd="sng" algn="ctr">
-                      <a:solidFill>
-                        <a:srgbClr val="D8DEE2"/>
-                      </a:solidFill>
-                      <a:prstDash val="solid"/>
-                      <a:round/>
-                      <a:headEnd type="none" w="med" len="med"/>
-                      <a:tailEnd type="none" w="med" len="med"/>
-                    </a:lnT>
-                    <a:lnB w="9525" cap="flat" cmpd="sng" algn="ctr">
-                      <a:solidFill>
-                        <a:srgbClr val="D8DEE2"/>
-                      </a:solidFill>
-                      <a:prstDash val="solid"/>
-                      <a:round/>
-                      <a:headEnd type="none" w="med" len="med"/>
-                      <a:tailEnd type="none" w="med" len="med"/>
-                    </a:lnB>
-                  </a:tcPr>
-                </a:tc>
-                <a:tc>
-                  <a:txBody>
-                    <a:bodyPr/>
-                    <a:lstStyle/>
-                    <a:p>
-                      <a:pPr indent="0" marL="0">
-                        <a:buNone/>
-                      </a:pPr>
-                      <a:r>
-                        <a:rPr lang="en-US" sz="1050" dirty="0">
-                          <a:solidFill>
-                            <a:srgbClr val="5B6B7A"/>
-                          </a:solidFill>
-                          <a:latin typeface="Calibri" pitchFamily="34" charset="0"/>
-                          <a:ea typeface="Calibri" pitchFamily="34" charset="-122"/>
-                          <a:cs typeface="Calibri" pitchFamily="34" charset="-120"/>
-                        </a:rPr>
-                        <a:t>В разработке</a:t>
-                      </a:r>
-                      <a:endParaRPr lang="en-US" sz="1050" dirty="0">
-                        <a:latin typeface="Calibri" charset="0"/>
-                        <a:ea typeface="Calibri" charset="0"/>
-                        <a:cs typeface="Calibri" charset="0"/>
-                      </a:endParaRPr>
-                    </a:p>
-                  </a:txBody>
-                  <a:tcPr marL="114300" marR="114300" marT="76200" marB="76200" anchor="ctr">
-                    <a:lnL w="9525" cap="flat" cmpd="sng" algn="ctr">
-                      <a:solidFill>
-                        <a:srgbClr val="D8DEE2"/>
-                      </a:solidFill>
-                      <a:prstDash val="solid"/>
-                      <a:round/>
-                      <a:headEnd type="none" w="med" len="med"/>
-                      <a:tailEnd type="none" w="med" len="med"/>
-                    </a:lnL>
-                    <a:lnR w="9525" cap="flat" cmpd="sng" algn="ctr">
-                      <a:solidFill>
-                        <a:srgbClr val="D8DEE2"/>
-                      </a:solidFill>
-                      <a:prstDash val="solid"/>
-                      <a:round/>
-                      <a:headEnd type="none" w="med" len="med"/>
-                      <a:tailEnd type="none" w="med" len="med"/>
-                    </a:lnR>
-                    <a:lnT w="9525" cap="flat" cmpd="sng" algn="ctr">
-                      <a:solidFill>
-                        <a:srgbClr val="D8DEE2"/>
-                      </a:solidFill>
-                      <a:prstDash val="solid"/>
-                      <a:round/>
-                      <a:headEnd type="none" w="med" len="med"/>
-                      <a:tailEnd type="none" w="med" len="med"/>
-                    </a:lnT>
-                    <a:lnB w="9525" cap="flat" cmpd="sng" algn="ctr">
-                      <a:solidFill>
-                        <a:srgbClr val="D8DEE2"/>
-                      </a:solidFill>
-                      <a:prstDash val="solid"/>
-                      <a:round/>
-                      <a:headEnd type="none" w="med" len="med"/>
-                      <a:tailEnd type="none" w="med" len="med"/>
-                    </a:lnB>
-                  </a:tcPr>
-                </a:tc>
-              </a:tr>
-              <a:tr h="525780">
-                <a:tc>
-                  <a:txBody>
-                    <a:bodyPr/>
-                    <a:lstStyle/>
-                    <a:p>
-                      <a:pPr indent="0" marL="0">
-                        <a:buNone/>
-                      </a:pPr>
-                      <a:r>
-                        <a:rPr lang="en-US" sz="1100" b="1" dirty="0">
-                          <a:solidFill>
-                            <a:srgbClr val="1A2733"/>
-                          </a:solidFill>
-                          <a:latin typeface="Calibri" pitchFamily="34" charset="0"/>
-                          <a:ea typeface="Calibri" pitchFamily="34" charset="-122"/>
-                          <a:cs typeface="Calibri" pitchFamily="34" charset="-120"/>
-                        </a:rPr>
-                        <a:t>Аудит и информационная безопасность</a:t>
-                      </a:r>
-                      <a:endParaRPr lang="en-US" sz="1100" dirty="0">
-                        <a:latin typeface="Calibri" charset="0"/>
-                        <a:ea typeface="Calibri" charset="0"/>
-                        <a:cs typeface="Calibri" charset="0"/>
-                      </a:endParaRPr>
-                    </a:p>
-                  </a:txBody>
-                  <a:tcPr marL="114300" marR="114300" marT="76200" marB="76200" anchor="ctr">
-                    <a:lnL w="9525" cap="flat" cmpd="sng" algn="ctr">
-                      <a:solidFill>
-                        <a:srgbClr val="D8DEE2"/>
-                      </a:solidFill>
-                      <a:prstDash val="solid"/>
-                      <a:round/>
-                      <a:headEnd type="none" w="med" len="med"/>
-                      <a:tailEnd type="none" w="med" len="med"/>
-                    </a:lnL>
-                    <a:lnR w="9525" cap="flat" cmpd="sng" algn="ctr">
-                      <a:solidFill>
-                        <a:srgbClr val="D8DEE2"/>
-                      </a:solidFill>
-                      <a:prstDash val="solid"/>
-                      <a:round/>
-                      <a:headEnd type="none" w="med" len="med"/>
-                      <a:tailEnd type="none" w="med" len="med"/>
-                    </a:lnR>
-                    <a:lnT w="9525" cap="flat" cmpd="sng" algn="ctr">
-                      <a:solidFill>
-                        <a:srgbClr val="D8DEE2"/>
-                      </a:solidFill>
-                      <a:prstDash val="solid"/>
-                      <a:round/>
-                      <a:headEnd type="none" w="med" len="med"/>
-                      <a:tailEnd type="none" w="med" len="med"/>
-                    </a:lnT>
-                    <a:lnB w="9525" cap="flat" cmpd="sng" algn="ctr">
-                      <a:solidFill>
-                        <a:srgbClr val="D8DEE2"/>
-                      </a:solidFill>
-                      <a:prstDash val="solid"/>
-                      <a:round/>
-                      <a:headEnd type="none" w="med" len="med"/>
-                      <a:tailEnd type="none" w="med" len="med"/>
-                    </a:lnB>
-                  </a:tcPr>
-                </a:tc>
-                <a:tc>
-                  <a:txBody>
-                    <a:bodyPr/>
-                    <a:lstStyle/>
-                    <a:p>
-                      <a:pPr algn="ctr" indent="0" marL="0">
-                        <a:buNone/>
-                      </a:pPr>
-                      <a:r>
-                        <a:rPr lang="en-US" sz="1100" b="1" dirty="0">
-                          <a:solidFill>
-                            <a:srgbClr val="1E7B4D"/>
-                          </a:solidFill>
-                          <a:latin typeface="Calibri" pitchFamily="34" charset="0"/>
-                          <a:ea typeface="Calibri" pitchFamily="34" charset="-122"/>
-                          <a:cs typeface="Calibri" pitchFamily="34" charset="-120"/>
-                        </a:rPr>
-                        <a:t>Есть</a:t>
-                      </a:r>
-                      <a:endParaRPr lang="en-US" sz="1100" dirty="0">
-                        <a:latin typeface="Calibri" charset="0"/>
-                        <a:ea typeface="Calibri" charset="0"/>
-                        <a:cs typeface="Calibri" charset="0"/>
-                      </a:endParaRPr>
-                    </a:p>
-                  </a:txBody>
-                  <a:tcPr marL="114300" marR="114300" marT="76200" marB="76200" anchor="ctr">
-                    <a:lnL w="9525" cap="flat" cmpd="sng" algn="ctr">
-                      <a:solidFill>
-                        <a:srgbClr val="D8DEE2"/>
-                      </a:solidFill>
-                      <a:prstDash val="solid"/>
-                      <a:round/>
-                      <a:headEnd type="none" w="med" len="med"/>
-                      <a:tailEnd type="none" w="med" len="med"/>
-                    </a:lnL>
-                    <a:lnR w="9525" cap="flat" cmpd="sng" algn="ctr">
-                      <a:solidFill>
-                        <a:srgbClr val="D8DEE2"/>
-                      </a:solidFill>
-                      <a:prstDash val="solid"/>
-                      <a:round/>
-                      <a:headEnd type="none" w="med" len="med"/>
-                      <a:tailEnd type="none" w="med" len="med"/>
-                    </a:lnR>
-                    <a:lnT w="9525" cap="flat" cmpd="sng" algn="ctr">
-                      <a:solidFill>
-                        <a:srgbClr val="D8DEE2"/>
-                      </a:solidFill>
-                      <a:prstDash val="solid"/>
-                      <a:round/>
-                      <a:headEnd type="none" w="med" len="med"/>
-                      <a:tailEnd type="none" w="med" len="med"/>
-                    </a:lnT>
-                    <a:lnB w="9525" cap="flat" cmpd="sng" algn="ctr">
-                      <a:solidFill>
-                        <a:srgbClr val="D8DEE2"/>
-                      </a:solidFill>
-                      <a:prstDash val="solid"/>
-                      <a:round/>
-                      <a:headEnd type="none" w="med" len="med"/>
-                      <a:tailEnd type="none" w="med" len="med"/>
-                    </a:lnB>
-                  </a:tcPr>
-                </a:tc>
-                <a:tc>
-                  <a:txBody>
-                    <a:bodyPr/>
-                    <a:lstStyle/>
-                    <a:p>
-                      <a:pPr indent="0" marL="0">
-                        <a:buNone/>
-                      </a:pPr>
-                      <a:r>
-                        <a:rPr lang="en-US" sz="1050" dirty="0">
-                          <a:solidFill>
-                            <a:srgbClr val="5B6B7A"/>
-                          </a:solidFill>
-                          <a:latin typeface="Calibri" pitchFamily="34" charset="0"/>
-                          <a:ea typeface="Calibri" pitchFamily="34" charset="-122"/>
-                          <a:cs typeface="Calibri" pitchFamily="34" charset="-120"/>
-                        </a:rPr>
-                        <a:t>SIEM — готово; аудит внешних обменов — скоро</a:t>
-                      </a:r>
-                      <a:endParaRPr lang="en-US" sz="1050" dirty="0">
-                        <a:latin typeface="Calibri" charset="0"/>
-                        <a:ea typeface="Calibri" charset="0"/>
-                        <a:cs typeface="Calibri" charset="0"/>
-                      </a:endParaRPr>
-                    </a:p>
-                  </a:txBody>
-                  <a:tcPr marL="114300" marR="114300" marT="76200" marB="76200" anchor="ctr">
-                    <a:lnL w="9525" cap="flat" cmpd="sng" algn="ctr">
-                      <a:solidFill>
-                        <a:srgbClr val="D8DEE2"/>
-                      </a:solidFill>
-                      <a:prstDash val="solid"/>
-                      <a:round/>
-                      <a:headEnd type="none" w="med" len="med"/>
-                      <a:tailEnd type="none" w="med" len="med"/>
-                    </a:lnL>
-                    <a:lnR w="9525" cap="flat" cmpd="sng" algn="ctr">
-                      <a:solidFill>
-                        <a:srgbClr val="D8DEE2"/>
-                      </a:solidFill>
-                      <a:prstDash val="solid"/>
-                      <a:round/>
-                      <a:headEnd type="none" w="med" len="med"/>
-                      <a:tailEnd type="none" w="med" len="med"/>
-                    </a:lnR>
-                    <a:lnT w="9525" cap="flat" cmpd="sng" algn="ctr">
-                      <a:solidFill>
-                        <a:srgbClr val="D8DEE2"/>
-                      </a:solidFill>
-                      <a:prstDash val="solid"/>
-                      <a:round/>
-                      <a:headEnd type="none" w="med" len="med"/>
-                      <a:tailEnd type="none" w="med" len="med"/>
-                    </a:lnT>
-                    <a:lnB w="9525" cap="flat" cmpd="sng" algn="ctr">
-                      <a:solidFill>
-                        <a:srgbClr val="D8DEE2"/>
-                      </a:solidFill>
-                      <a:prstDash val="solid"/>
-                      <a:round/>
-                      <a:headEnd type="none" w="med" len="med"/>
-                      <a:tailEnd type="none" w="med" len="med"/>
-                    </a:lnB>
-                  </a:tcPr>
-                </a:tc>
-              </a:tr>
-              <a:tr h="525780">
-                <a:tc>
-                  <a:txBody>
-                    <a:bodyPr/>
-                    <a:lstStyle/>
-                    <a:p>
-                      <a:pPr indent="0" marL="0">
-                        <a:buNone/>
-                      </a:pPr>
-                      <a:r>
-                        <a:rPr lang="en-US" sz="1100" b="1" dirty="0">
-                          <a:solidFill>
-                            <a:srgbClr val="1A2733"/>
-                          </a:solidFill>
-                          <a:latin typeface="Calibri" pitchFamily="34" charset="0"/>
-                          <a:ea typeface="Calibri" pitchFamily="34" charset="-122"/>
-                          <a:cs typeface="Calibri" pitchFamily="34" charset="-120"/>
-                        </a:rPr>
-                        <a:t>Поиск и общие возможности</a:t>
-                      </a:r>
-                      <a:endParaRPr lang="en-US" sz="1100" dirty="0">
-                        <a:latin typeface="Calibri" charset="0"/>
-                        <a:ea typeface="Calibri" charset="0"/>
-                        <a:cs typeface="Calibri" charset="0"/>
-                      </a:endParaRPr>
-                    </a:p>
-                  </a:txBody>
-                  <a:tcPr marL="114300" marR="114300" marT="76200" marB="76200" anchor="ctr">
-                    <a:lnL w="9525" cap="flat" cmpd="sng" algn="ctr">
-                      <a:solidFill>
-                        <a:srgbClr val="D8DEE2"/>
-                      </a:solidFill>
-                      <a:prstDash val="solid"/>
-                      <a:round/>
-                      <a:headEnd type="none" w="med" len="med"/>
-                      <a:tailEnd type="none" w="med" len="med"/>
-                    </a:lnL>
-                    <a:lnR w="9525" cap="flat" cmpd="sng" algn="ctr">
-                      <a:solidFill>
-                        <a:srgbClr val="D8DEE2"/>
-                      </a:solidFill>
-                      <a:prstDash val="solid"/>
-                      <a:round/>
-                      <a:headEnd type="none" w="med" len="med"/>
-                      <a:tailEnd type="none" w="med" len="med"/>
-                    </a:lnR>
-                    <a:lnT w="9525" cap="flat" cmpd="sng" algn="ctr">
-                      <a:solidFill>
-                        <a:srgbClr val="D8DEE2"/>
-                      </a:solidFill>
-                      <a:prstDash val="solid"/>
-                      <a:round/>
-                      <a:headEnd type="none" w="med" len="med"/>
-                      <a:tailEnd type="none" w="med" len="med"/>
-                    </a:lnT>
-                    <a:lnB w="9525" cap="flat" cmpd="sng" algn="ctr">
-                      <a:solidFill>
-                        <a:srgbClr val="D8DEE2"/>
-                      </a:solidFill>
-                      <a:prstDash val="solid"/>
-                      <a:round/>
-                      <a:headEnd type="none" w="med" len="med"/>
-                      <a:tailEnd type="none" w="med" len="med"/>
-                    </a:lnB>
-                  </a:tcPr>
-                </a:tc>
-                <a:tc>
-                  <a:txBody>
-                    <a:bodyPr/>
-                    <a:lstStyle/>
-                    <a:p>
-                      <a:pPr algn="ctr" indent="0" marL="0">
-                        <a:buNone/>
-                      </a:pPr>
-                      <a:r>
-                        <a:rPr lang="en-US" sz="1100" b="1" dirty="0">
-                          <a:solidFill>
-                            <a:srgbClr val="1E7B4D"/>
-                          </a:solidFill>
-                          <a:latin typeface="Calibri" pitchFamily="34" charset="0"/>
-                          <a:ea typeface="Calibri" pitchFamily="34" charset="-122"/>
-                          <a:cs typeface="Calibri" pitchFamily="34" charset="-120"/>
-                        </a:rPr>
-                        <a:t>Есть</a:t>
-                      </a:r>
-                      <a:endParaRPr lang="en-US" sz="1100" dirty="0">
-                        <a:latin typeface="Calibri" charset="0"/>
-                        <a:ea typeface="Calibri" charset="0"/>
-                        <a:cs typeface="Calibri" charset="0"/>
-                      </a:endParaRPr>
-                    </a:p>
-                  </a:txBody>
-                  <a:tcPr marL="114300" marR="114300" marT="76200" marB="76200" anchor="ctr">
-                    <a:lnL w="9525" cap="flat" cmpd="sng" algn="ctr">
-                      <a:solidFill>
-                        <a:srgbClr val="D8DEE2"/>
-                      </a:solidFill>
-                      <a:prstDash val="solid"/>
-                      <a:round/>
-                      <a:headEnd type="none" w="med" len="med"/>
-                      <a:tailEnd type="none" w="med" len="med"/>
-                    </a:lnL>
-                    <a:lnR w="9525" cap="flat" cmpd="sng" algn="ctr">
-                      <a:solidFill>
-                        <a:srgbClr val="D8DEE2"/>
-                      </a:solidFill>
-                      <a:prstDash val="solid"/>
-                      <a:round/>
-                      <a:headEnd type="none" w="med" len="med"/>
-                      <a:tailEnd type="none" w="med" len="med"/>
-                    </a:lnR>
-                    <a:lnT w="9525" cap="flat" cmpd="sng" algn="ctr">
-                      <a:solidFill>
-                        <a:srgbClr val="D8DEE2"/>
-                      </a:solidFill>
-                      <a:prstDash val="solid"/>
-                      <a:round/>
-                      <a:headEnd type="none" w="med" len="med"/>
-                      <a:tailEnd type="none" w="med" len="med"/>
-                    </a:lnT>
-                    <a:lnB w="9525" cap="flat" cmpd="sng" algn="ctr">
-                      <a:solidFill>
-                        <a:srgbClr val="D8DEE2"/>
-                      </a:solidFill>
-                      <a:prstDash val="solid"/>
-                      <a:round/>
-                      <a:headEnd type="none" w="med" len="med"/>
-                      <a:tailEnd type="none" w="med" len="med"/>
-                    </a:lnB>
-                  </a:tcPr>
-                </a:tc>
-                <a:tc>
-                  <a:txBody>
-                    <a:bodyPr/>
-                    <a:lstStyle/>
-                    <a:p>
-                      <a:pPr indent="0" marL="0">
-                        <a:buNone/>
-                      </a:pPr>
-                      <a:r>
-                        <a:rPr lang="en-US" sz="1050" dirty="0">
-                          <a:solidFill>
-                            <a:srgbClr val="5B6B7A"/>
-                          </a:solidFill>
-                          <a:latin typeface="Calibri" pitchFamily="34" charset="0"/>
-                          <a:ea typeface="Calibri" pitchFamily="34" charset="-122"/>
-                          <a:cs typeface="Calibri" pitchFamily="34" charset="-120"/>
-                        </a:rPr>
-                        <a:t>Веб-поиск готов; гибкий доступ по папкам — зависит от реестра доступов</a:t>
-                      </a:r>
-                      <a:endParaRPr lang="en-US" sz="1050" dirty="0">
-                        <a:latin typeface="Calibri" charset="0"/>
-                        <a:ea typeface="Calibri" charset="0"/>
-                        <a:cs typeface="Calibri" charset="0"/>
-                      </a:endParaRPr>
-                    </a:p>
-                  </a:txBody>
-                  <a:tcPr marL="114300" marR="114300" marT="76200" marB="76200" anchor="ctr">
-                    <a:lnL w="9525" cap="flat" cmpd="sng" algn="ctr">
-                      <a:solidFill>
-                        <a:srgbClr val="D8DEE2"/>
-                      </a:solidFill>
-                      <a:prstDash val="solid"/>
-                      <a:round/>
-                      <a:headEnd type="none" w="med" len="med"/>
-                      <a:tailEnd type="none" w="med" len="med"/>
-                    </a:lnL>
-                    <a:lnR w="9525" cap="flat" cmpd="sng" algn="ctr">
-                      <a:solidFill>
-                        <a:srgbClr val="D8DEE2"/>
-                      </a:solidFill>
-                      <a:prstDash val="solid"/>
-                      <a:round/>
-                      <a:headEnd type="none" w="med" len="med"/>
-                      <a:tailEnd type="none" w="med" len="med"/>
-                    </a:lnR>
-                    <a:lnT w="9525" cap="flat" cmpd="sng" algn="ctr">
-                      <a:solidFill>
-                        <a:srgbClr val="D8DEE2"/>
-                      </a:solidFill>
-                      <a:prstDash val="solid"/>
-                      <a:round/>
-                      <a:headEnd type="none" w="med" len="med"/>
-                      <a:tailEnd type="none" w="med" len="med"/>
-                    </a:lnT>
-                    <a:lnB w="9525" cap="flat" cmpd="sng" algn="ctr">
-                      <a:solidFill>
-                        <a:srgbClr val="D8DEE2"/>
-                      </a:solidFill>
-                      <a:prstDash val="solid"/>
-                      <a:round/>
-                      <a:headEnd type="none" w="med" len="med"/>
-                      <a:tailEnd type="none" w="med" len="med"/>
-                    </a:lnB>
-                  </a:tcPr>
-                </a:tc>
-              </a:tr>
-            </a:tbl>
-          </a:graphicData>
-        </a:graphic>
-      </p:graphicFrame>
-      <p:sp>
-        <p:nvSpPr>
-          <p:cNvPr id="6" name="Shape 3"/>
-          <p:cNvSpPr/>
-          <p:nvPr/>
-        </p:nvSpPr>
-        <p:spPr>
-          <a:xfrm>
-            <a:off x="502920" y="6172200"/>
-            <a:ext cx="219456" cy="182880"/>
-          </a:xfrm>
-          <a:prstGeom prst="rect">
-            <a:avLst/>
-          </a:prstGeom>
-          <a:solidFill>
-            <a:srgbClr val="1E7B4D"/>
-          </a:solidFill>
-          <a:ln/>
-        </p:spPr>
-      </p:sp>
-      <p:sp>
-        <p:nvSpPr>
-          <p:cNvPr id="7" name="Text 4"/>
-          <p:cNvSpPr txBox="1"/>
-          <p:nvPr/>
-        </p:nvSpPr>
-        <p:spPr>
-          <a:xfrm>
-            <a:off x="795528" y="6126480"/>
-            <a:ext cx="2377440" cy="274320"/>
-          </a:xfrm>
-          <a:prstGeom prst="rect">
-            <a:avLst/>
-          </a:prstGeom>
-          <a:noFill/>
-          <a:ln/>
-        </p:spPr>
-        <p:txBody>
-          <a:bodyPr wrap="square" lIns="0" tIns="0" rIns="0" bIns="0" rtlCol="0" anchor="ctr"/>
-          <a:lstStyle/>
-          <a:p>
-            <a:pPr indent="0" marL="0">
-              <a:buNone/>
-            </a:pPr>
-            <a:r>
-              <a:rPr lang="en-US" sz="1050" dirty="0">
-                <a:solidFill>
-                  <a:srgbClr val="5B6B7A"/>
-                </a:solidFill>
-                <a:latin typeface="Calibri" pitchFamily="34" charset="0"/>
-                <a:ea typeface="Calibri" pitchFamily="34" charset="-122"/>
-                <a:cs typeface="Calibri" pitchFamily="34" charset="-120"/>
-              </a:rPr>
-              <a:t>Есть</a:t>
-            </a:r>
-            <a:endParaRPr lang="en-US" sz="1050" dirty="0"/>
-          </a:p>
-        </p:txBody>
-      </p:sp>
-      <p:sp>
-        <p:nvSpPr>
-          <p:cNvPr id="8" name="Shape 5"/>
-          <p:cNvSpPr/>
-          <p:nvPr/>
-        </p:nvSpPr>
-        <p:spPr>
-          <a:xfrm>
-            <a:off x="3246120" y="6172200"/>
-            <a:ext cx="219456" cy="182880"/>
-          </a:xfrm>
-          <a:prstGeom prst="rect">
-            <a:avLst/>
-          </a:prstGeom>
-          <a:solidFill>
-            <a:srgbClr val="C97A1A"/>
-          </a:solidFill>
-          <a:ln/>
-        </p:spPr>
-      </p:sp>
-      <p:sp>
-        <p:nvSpPr>
-          <p:cNvPr id="9" name="Text 6"/>
-          <p:cNvSpPr txBox="1"/>
-          <p:nvPr/>
-        </p:nvSpPr>
-        <p:spPr>
-          <a:xfrm>
-            <a:off x="3538728" y="6126480"/>
-            <a:ext cx="2377440" cy="274320"/>
-          </a:xfrm>
-          <a:prstGeom prst="rect">
-            <a:avLst/>
-          </a:prstGeom>
-          <a:noFill/>
-          <a:ln/>
-        </p:spPr>
-        <p:txBody>
-          <a:bodyPr wrap="square" lIns="0" tIns="0" rIns="0" bIns="0" rtlCol="0" anchor="ctr"/>
-          <a:lstStyle/>
-          <a:p>
-            <a:pPr indent="0" marL="0">
-              <a:buNone/>
-            </a:pPr>
-            <a:r>
-              <a:rPr lang="en-US" sz="1050" dirty="0">
-                <a:solidFill>
-                  <a:srgbClr val="5B6B7A"/>
-                </a:solidFill>
-                <a:latin typeface="Calibri" pitchFamily="34" charset="0"/>
-                <a:ea typeface="Calibri" pitchFamily="34" charset="-122"/>
-                <a:cs typeface="Calibri" pitchFamily="34" charset="-120"/>
-              </a:rPr>
-              <a:t>Скоро</a:t>
-            </a:r>
-            <a:endParaRPr lang="en-US" sz="1050" dirty="0"/>
-          </a:p>
-        </p:txBody>
-      </p:sp>
-      <p:sp>
-        <p:nvSpPr>
-          <p:cNvPr id="10" name="Shape 7"/>
-          <p:cNvSpPr/>
-          <p:nvPr/>
-        </p:nvSpPr>
-        <p:spPr>
-          <a:xfrm>
-            <a:off x="5989320" y="6172200"/>
-            <a:ext cx="219456" cy="182880"/>
-          </a:xfrm>
-          <a:prstGeom prst="rect">
-            <a:avLst/>
-          </a:prstGeom>
-          <a:solidFill>
-            <a:srgbClr val="8C99A6"/>
-          </a:solidFill>
-          <a:ln/>
-        </p:spPr>
-      </p:sp>
-      <p:sp>
-        <p:nvSpPr>
-          <p:cNvPr id="11" name="Text 8"/>
-          <p:cNvSpPr txBox="1"/>
-          <p:nvPr/>
-        </p:nvSpPr>
-        <p:spPr>
-          <a:xfrm>
-            <a:off x="6281928" y="6126480"/>
-            <a:ext cx="2377440" cy="274320"/>
-          </a:xfrm>
-          <a:prstGeom prst="rect">
-            <a:avLst/>
-          </a:prstGeom>
-          <a:noFill/>
-          <a:ln/>
-        </p:spPr>
-        <p:txBody>
-          <a:bodyPr wrap="square" lIns="0" tIns="0" rIns="0" bIns="0" rtlCol="0" anchor="ctr"/>
-          <a:lstStyle/>
-          <a:p>
-            <a:pPr indent="0" marL="0">
-              <a:buNone/>
-            </a:pPr>
-            <a:r>
-              <a:rPr lang="en-US" sz="1050" dirty="0">
-                <a:solidFill>
-                  <a:srgbClr val="5B6B7A"/>
-                </a:solidFill>
-                <a:latin typeface="Calibri" pitchFamily="34" charset="0"/>
-                <a:ea typeface="Calibri" pitchFamily="34" charset="-122"/>
-                <a:cs typeface="Calibri" pitchFamily="34" charset="-120"/>
-              </a:rPr>
-              <a:t>В планах</a:t>
-            </a:r>
-            <a:endParaRPr lang="en-US" sz="1050" dirty="0"/>
-          </a:p>
-        </p:txBody>
-      </p:sp>
-      <p:sp>
-        <p:nvSpPr>
-          <p:cNvPr id="12" name="Text 9"/>
-          <p:cNvSpPr txBox="1"/>
-          <p:nvPr/>
-        </p:nvSpPr>
-        <p:spPr>
-          <a:xfrm>
-            <a:off x="10881360" y="6473952"/>
-            <a:ext cx="822960" cy="274320"/>
-          </a:xfrm>
-          <a:prstGeom prst="rect">
-            <a:avLst/>
-          </a:prstGeom>
-          <a:noFill/>
-          <a:ln/>
-        </p:spPr>
-        <p:txBody>
-          <a:bodyPr wrap="square" lIns="0" tIns="0" rIns="0" bIns="0" rtlCol="0" anchor="ctr"/>
-          <a:lstStyle/>
-          <a:p>
-            <a:pPr algn="r" indent="0" marL="0">
-              <a:buNone/>
-            </a:pPr>
-            <a:r>
-              <a:rPr lang="en-US" sz="1050" dirty="0">
-                <a:solidFill>
-                  <a:srgbClr val="8C99A6"/>
-                </a:solidFill>
-                <a:latin typeface="Calibri" pitchFamily="34" charset="0"/>
-                <a:ea typeface="Calibri" pitchFamily="34" charset="-122"/>
-                <a:cs typeface="Calibri" pitchFamily="34" charset="-120"/>
-              </a:rPr>
-              <a:t>7 / 7</a:t>
+              <a:t>6 / 6</a:t>
             </a:r>
             <a:endParaRPr lang="en-US" sz="1050" dirty="0"/>
           </a:p>
